--- a/docs/ppt/HotSpot_Sentinels_Submission.pptx
+++ b/docs/ppt/HotSpot_Sentinels_Submission.pptx
@@ -21,7 +21,7 @@
     <p:sldId id="269" r:id="rId16"/>
   </p:sldIdLst>
   <p:sldSz cx="9144000" cy="5143500"/>
-  <p:notesSz cx="6858000" cy="9144000"/>
+  <p:notesSz cx="7559675" cy="10691813"/>
 </p:presentation>
 </file>
 
@@ -56,7 +56,7 @@
         <p:txBody>
           <a:bodyPr/>
           <a:p>
-            <a:fld id="{917F1624-4946-4D3E-9B62-5A3B2BFFA5FF}" type="slidenum">
+            <a:fld id="{05826453-FAFF-48B6-961F-F547E5AF2AAD}" type="slidenum">
               <a:t>&lt;#&gt;</a:t>
             </a:fld>
           </a:p>
@@ -97,7 +97,7 @@
         <p:spPr>
           <a:xfrm>
             <a:off x="311760" y="744480"/>
-            <a:ext cx="8520120" cy="2052360"/>
+            <a:ext cx="8519400" cy="2051640"/>
           </a:xfrm>
           <a:prstGeom prst="rect">
             <a:avLst/>
@@ -112,10 +112,10 @@
             <a:noAutofit/>
           </a:bodyPr>
           <a:p>
-            <a:endParaRPr b="0" lang="en-US" sz="1400" spc="-1" strike="noStrike">
-              <a:solidFill>
-                <a:srgbClr val="000000"/>
-              </a:solidFill>
+            <a:pPr algn="ctr">
+              <a:buNone/>
+            </a:pPr>
+            <a:endParaRPr b="0" lang="en-US" sz="4400" spc="-1" strike="noStrike">
               <a:latin typeface="Arial"/>
             </a:endParaRPr>
           </a:p>
@@ -134,7 +134,7 @@
         <p:spPr>
           <a:xfrm>
             <a:off x="457200" y="1203480"/>
-            <a:ext cx="8229240" cy="1422720"/>
+            <a:ext cx="8228880" cy="1422360"/>
           </a:xfrm>
           <a:prstGeom prst="rect">
             <a:avLst/>
@@ -149,10 +149,7 @@
             <a:normAutofit/>
           </a:bodyPr>
           <a:p>
-            <a:endParaRPr b="0" lang="en-US" sz="1400" spc="-1" strike="noStrike">
-              <a:solidFill>
-                <a:srgbClr val="000000"/>
-              </a:solidFill>
+            <a:endParaRPr b="0" lang="en-US" sz="3200" spc="-1" strike="noStrike">
               <a:latin typeface="Arial"/>
             </a:endParaRPr>
           </a:p>
@@ -170,8 +167,8 @@
         </p:nvSpPr>
         <p:spPr>
           <a:xfrm>
-            <a:off x="457200" y="2761920"/>
-            <a:ext cx="8229240" cy="1422720"/>
+            <a:off x="457200" y="2761200"/>
+            <a:ext cx="8228880" cy="1422360"/>
           </a:xfrm>
           <a:prstGeom prst="rect">
             <a:avLst/>
@@ -186,10 +183,7 @@
             <a:normAutofit/>
           </a:bodyPr>
           <a:p>
-            <a:endParaRPr b="0" lang="en-US" sz="1400" spc="-1" strike="noStrike">
-              <a:solidFill>
-                <a:srgbClr val="000000"/>
-              </a:solidFill>
+            <a:endParaRPr b="0" lang="en-US" sz="3200" spc="-1" strike="noStrike">
               <a:latin typeface="Arial"/>
             </a:endParaRPr>
           </a:p>
@@ -209,7 +203,7 @@
         <p:txBody>
           <a:bodyPr/>
           <a:p>
-            <a:fld id="{3064FB8F-40A6-46DC-A970-BB53BBF9E725}" type="slidenum">
+            <a:fld id="{47D68D4D-D42A-47FE-8448-5111CC6E7574}" type="slidenum">
               <a:t>&lt;#&gt;</a:t>
             </a:fld>
           </a:p>
@@ -250,7 +244,7 @@
         <p:spPr>
           <a:xfrm>
             <a:off x="311760" y="744480"/>
-            <a:ext cx="8520120" cy="2052360"/>
+            <a:ext cx="8519400" cy="2051640"/>
           </a:xfrm>
           <a:prstGeom prst="rect">
             <a:avLst/>
@@ -265,10 +259,10 @@
             <a:noAutofit/>
           </a:bodyPr>
           <a:p>
-            <a:endParaRPr b="0" lang="en-US" sz="1400" spc="-1" strike="noStrike">
-              <a:solidFill>
-                <a:srgbClr val="000000"/>
-              </a:solidFill>
+            <a:pPr algn="ctr">
+              <a:buNone/>
+            </a:pPr>
+            <a:endParaRPr b="0" lang="en-US" sz="4400" spc="-1" strike="noStrike">
               <a:latin typeface="Arial"/>
             </a:endParaRPr>
           </a:p>
@@ -287,7 +281,7 @@
         <p:spPr>
           <a:xfrm>
             <a:off x="457200" y="1203480"/>
-            <a:ext cx="4015800" cy="1422720"/>
+            <a:ext cx="4015440" cy="1422360"/>
           </a:xfrm>
           <a:prstGeom prst="rect">
             <a:avLst/>
@@ -302,10 +296,7 @@
             <a:normAutofit/>
           </a:bodyPr>
           <a:p>
-            <a:endParaRPr b="0" lang="en-US" sz="1400" spc="-1" strike="noStrike">
-              <a:solidFill>
-                <a:srgbClr val="000000"/>
-              </a:solidFill>
+            <a:endParaRPr b="0" lang="en-US" sz="3200" spc="-1" strike="noStrike">
               <a:latin typeface="Arial"/>
             </a:endParaRPr>
           </a:p>
@@ -323,8 +314,8 @@
         </p:nvSpPr>
         <p:spPr>
           <a:xfrm>
-            <a:off x="4674240" y="1203480"/>
-            <a:ext cx="4015800" cy="1422720"/>
+            <a:off x="4673880" y="1203480"/>
+            <a:ext cx="4015440" cy="1422360"/>
           </a:xfrm>
           <a:prstGeom prst="rect">
             <a:avLst/>
@@ -339,10 +330,7 @@
             <a:normAutofit/>
           </a:bodyPr>
           <a:p>
-            <a:endParaRPr b="0" lang="en-US" sz="1400" spc="-1" strike="noStrike">
-              <a:solidFill>
-                <a:srgbClr val="000000"/>
-              </a:solidFill>
+            <a:endParaRPr b="0" lang="en-US" sz="3200" spc="-1" strike="noStrike">
               <a:latin typeface="Arial"/>
             </a:endParaRPr>
           </a:p>
@@ -360,8 +348,8 @@
         </p:nvSpPr>
         <p:spPr>
           <a:xfrm>
-            <a:off x="457200" y="2761920"/>
-            <a:ext cx="4015800" cy="1422720"/>
+            <a:off x="457200" y="2761200"/>
+            <a:ext cx="4015440" cy="1422360"/>
           </a:xfrm>
           <a:prstGeom prst="rect">
             <a:avLst/>
@@ -376,10 +364,7 @@
             <a:normAutofit/>
           </a:bodyPr>
           <a:p>
-            <a:endParaRPr b="0" lang="en-US" sz="1400" spc="-1" strike="noStrike">
-              <a:solidFill>
-                <a:srgbClr val="000000"/>
-              </a:solidFill>
+            <a:endParaRPr b="0" lang="en-US" sz="3200" spc="-1" strike="noStrike">
               <a:latin typeface="Arial"/>
             </a:endParaRPr>
           </a:p>
@@ -397,8 +382,8 @@
         </p:nvSpPr>
         <p:spPr>
           <a:xfrm>
-            <a:off x="4674240" y="2761920"/>
-            <a:ext cx="4015800" cy="1422720"/>
+            <a:off x="4673880" y="2761200"/>
+            <a:ext cx="4015440" cy="1422360"/>
           </a:xfrm>
           <a:prstGeom prst="rect">
             <a:avLst/>
@@ -413,10 +398,7 @@
             <a:normAutofit/>
           </a:bodyPr>
           <a:p>
-            <a:endParaRPr b="0" lang="en-US" sz="1400" spc="-1" strike="noStrike">
-              <a:solidFill>
-                <a:srgbClr val="000000"/>
-              </a:solidFill>
+            <a:endParaRPr b="0" lang="en-US" sz="3200" spc="-1" strike="noStrike">
               <a:latin typeface="Arial"/>
             </a:endParaRPr>
           </a:p>
@@ -436,7 +418,7 @@
         <p:txBody>
           <a:bodyPr/>
           <a:p>
-            <a:fld id="{79CECFFF-ABF3-4923-8EB5-83B0C377FE7F}" type="slidenum">
+            <a:fld id="{D6C5C14C-CB12-40C0-B49D-6249142CE78B}" type="slidenum">
               <a:t>&lt;#&gt;</a:t>
             </a:fld>
           </a:p>
@@ -477,7 +459,7 @@
         <p:spPr>
           <a:xfrm>
             <a:off x="311760" y="744480"/>
-            <a:ext cx="8520120" cy="2052360"/>
+            <a:ext cx="8519400" cy="2051640"/>
           </a:xfrm>
           <a:prstGeom prst="rect">
             <a:avLst/>
@@ -492,10 +474,10 @@
             <a:noAutofit/>
           </a:bodyPr>
           <a:p>
-            <a:endParaRPr b="0" lang="en-US" sz="1400" spc="-1" strike="noStrike">
-              <a:solidFill>
-                <a:srgbClr val="000000"/>
-              </a:solidFill>
+            <a:pPr algn="ctr">
+              <a:buNone/>
+            </a:pPr>
+            <a:endParaRPr b="0" lang="en-US" sz="4400" spc="-1" strike="noStrike">
               <a:latin typeface="Arial"/>
             </a:endParaRPr>
           </a:p>
@@ -514,7 +496,7 @@
         <p:spPr>
           <a:xfrm>
             <a:off x="457200" y="1203480"/>
-            <a:ext cx="2649600" cy="1422720"/>
+            <a:ext cx="2649600" cy="1422360"/>
           </a:xfrm>
           <a:prstGeom prst="rect">
             <a:avLst/>
@@ -529,10 +511,7 @@
             <a:normAutofit/>
           </a:bodyPr>
           <a:p>
-            <a:endParaRPr b="0" lang="en-US" sz="1400" spc="-1" strike="noStrike">
-              <a:solidFill>
-                <a:srgbClr val="000000"/>
-              </a:solidFill>
+            <a:endParaRPr b="0" lang="en-US" sz="3200" spc="-1" strike="noStrike">
               <a:latin typeface="Arial"/>
             </a:endParaRPr>
           </a:p>
@@ -551,7 +530,7 @@
         <p:spPr>
           <a:xfrm>
             <a:off x="3239640" y="1203480"/>
-            <a:ext cx="2649600" cy="1422720"/>
+            <a:ext cx="2649600" cy="1422360"/>
           </a:xfrm>
           <a:prstGeom prst="rect">
             <a:avLst/>
@@ -566,10 +545,7 @@
             <a:normAutofit/>
           </a:bodyPr>
           <a:p>
-            <a:endParaRPr b="0" lang="en-US" sz="1400" spc="-1" strike="noStrike">
-              <a:solidFill>
-                <a:srgbClr val="000000"/>
-              </a:solidFill>
+            <a:endParaRPr b="0" lang="en-US" sz="3200" spc="-1" strike="noStrike">
               <a:latin typeface="Arial"/>
             </a:endParaRPr>
           </a:p>
@@ -588,7 +564,7 @@
         <p:spPr>
           <a:xfrm>
             <a:off x="6022080" y="1203480"/>
-            <a:ext cx="2649600" cy="1422720"/>
+            <a:ext cx="2649600" cy="1422360"/>
           </a:xfrm>
           <a:prstGeom prst="rect">
             <a:avLst/>
@@ -603,10 +579,7 @@
             <a:normAutofit/>
           </a:bodyPr>
           <a:p>
-            <a:endParaRPr b="0" lang="en-US" sz="1400" spc="-1" strike="noStrike">
-              <a:solidFill>
-                <a:srgbClr val="000000"/>
-              </a:solidFill>
+            <a:endParaRPr b="0" lang="en-US" sz="3200" spc="-1" strike="noStrike">
               <a:latin typeface="Arial"/>
             </a:endParaRPr>
           </a:p>
@@ -624,8 +597,8 @@
         </p:nvSpPr>
         <p:spPr>
           <a:xfrm>
-            <a:off x="457200" y="2761920"/>
-            <a:ext cx="2649600" cy="1422720"/>
+            <a:off x="457200" y="2761200"/>
+            <a:ext cx="2649600" cy="1422360"/>
           </a:xfrm>
           <a:prstGeom prst="rect">
             <a:avLst/>
@@ -640,10 +613,7 @@
             <a:normAutofit/>
           </a:bodyPr>
           <a:p>
-            <a:endParaRPr b="0" lang="en-US" sz="1400" spc="-1" strike="noStrike">
-              <a:solidFill>
-                <a:srgbClr val="000000"/>
-              </a:solidFill>
+            <a:endParaRPr b="0" lang="en-US" sz="3200" spc="-1" strike="noStrike">
               <a:latin typeface="Arial"/>
             </a:endParaRPr>
           </a:p>
@@ -661,8 +631,8 @@
         </p:nvSpPr>
         <p:spPr>
           <a:xfrm>
-            <a:off x="3239640" y="2761920"/>
-            <a:ext cx="2649600" cy="1422720"/>
+            <a:off x="3239640" y="2761200"/>
+            <a:ext cx="2649600" cy="1422360"/>
           </a:xfrm>
           <a:prstGeom prst="rect">
             <a:avLst/>
@@ -677,10 +647,7 @@
             <a:normAutofit/>
           </a:bodyPr>
           <a:p>
-            <a:endParaRPr b="0" lang="en-US" sz="1400" spc="-1" strike="noStrike">
-              <a:solidFill>
-                <a:srgbClr val="000000"/>
-              </a:solidFill>
+            <a:endParaRPr b="0" lang="en-US" sz="3200" spc="-1" strike="noStrike">
               <a:latin typeface="Arial"/>
             </a:endParaRPr>
           </a:p>
@@ -698,8 +665,8 @@
         </p:nvSpPr>
         <p:spPr>
           <a:xfrm>
-            <a:off x="6022080" y="2761920"/>
-            <a:ext cx="2649600" cy="1422720"/>
+            <a:off x="6022080" y="2761200"/>
+            <a:ext cx="2649600" cy="1422360"/>
           </a:xfrm>
           <a:prstGeom prst="rect">
             <a:avLst/>
@@ -714,10 +681,7 @@
             <a:normAutofit/>
           </a:bodyPr>
           <a:p>
-            <a:endParaRPr b="0" lang="en-US" sz="1400" spc="-1" strike="noStrike">
-              <a:solidFill>
-                <a:srgbClr val="000000"/>
-              </a:solidFill>
+            <a:endParaRPr b="0" lang="en-US" sz="3200" spc="-1" strike="noStrike">
               <a:latin typeface="Arial"/>
             </a:endParaRPr>
           </a:p>
@@ -737,7 +701,7 @@
         <p:txBody>
           <a:bodyPr/>
           <a:p>
-            <a:fld id="{00CD498A-2FB4-42A3-BF51-63984AD2E6DD}" type="slidenum">
+            <a:fld id="{CECFAC1C-FA9D-4B64-B0AA-D86276B89D01}" type="slidenum">
               <a:t>&lt;#&gt;</a:t>
             </a:fld>
           </a:p>
@@ -778,7 +742,7 @@
         <p:spPr>
           <a:xfrm>
             <a:off x="311760" y="744480"/>
-            <a:ext cx="8520120" cy="2052360"/>
+            <a:ext cx="8519400" cy="2051640"/>
           </a:xfrm>
           <a:prstGeom prst="rect">
             <a:avLst/>
@@ -793,10 +757,10 @@
             <a:noAutofit/>
           </a:bodyPr>
           <a:p>
-            <a:endParaRPr b="0" lang="en-US" sz="1400" spc="-1" strike="noStrike">
-              <a:solidFill>
-                <a:srgbClr val="000000"/>
-              </a:solidFill>
+            <a:pPr algn="ctr">
+              <a:buNone/>
+            </a:pPr>
+            <a:endParaRPr b="0" lang="en-US" sz="4400" spc="-1" strike="noStrike">
               <a:latin typeface="Arial"/>
             </a:endParaRPr>
           </a:p>
@@ -815,7 +779,7 @@
         <p:spPr>
           <a:xfrm>
             <a:off x="457200" y="1203480"/>
-            <a:ext cx="8229240" cy="2982960"/>
+            <a:ext cx="8228880" cy="2982600"/>
           </a:xfrm>
           <a:prstGeom prst="rect">
             <a:avLst/>
@@ -853,7 +817,7 @@
         <p:txBody>
           <a:bodyPr/>
           <a:p>
-            <a:fld id="{2170AA65-B2E4-424B-B181-10F174273150}" type="slidenum">
+            <a:fld id="{32A8CAF3-2312-4A0F-BA2F-2FA3726E1F7B}" type="slidenum">
               <a:t>&lt;#&gt;</a:t>
             </a:fld>
           </a:p>
@@ -894,7 +858,7 @@
         <p:spPr>
           <a:xfrm>
             <a:off x="311760" y="744480"/>
-            <a:ext cx="8520120" cy="2052360"/>
+            <a:ext cx="8519400" cy="2051640"/>
           </a:xfrm>
           <a:prstGeom prst="rect">
             <a:avLst/>
@@ -909,10 +873,10 @@
             <a:noAutofit/>
           </a:bodyPr>
           <a:p>
-            <a:endParaRPr b="0" lang="en-US" sz="1400" spc="-1" strike="noStrike">
-              <a:solidFill>
-                <a:srgbClr val="000000"/>
-              </a:solidFill>
+            <a:pPr algn="ctr">
+              <a:buNone/>
+            </a:pPr>
+            <a:endParaRPr b="0" lang="en-US" sz="4400" spc="-1" strike="noStrike">
               <a:latin typeface="Arial"/>
             </a:endParaRPr>
           </a:p>
@@ -931,7 +895,7 @@
         <p:spPr>
           <a:xfrm>
             <a:off x="457200" y="1203480"/>
-            <a:ext cx="8229240" cy="2982960"/>
+            <a:ext cx="8228880" cy="2982600"/>
           </a:xfrm>
           <a:prstGeom prst="rect">
             <a:avLst/>
@@ -946,10 +910,7 @@
             <a:normAutofit/>
           </a:bodyPr>
           <a:p>
-            <a:endParaRPr b="0" lang="en-US" sz="1400" spc="-1" strike="noStrike">
-              <a:solidFill>
-                <a:srgbClr val="000000"/>
-              </a:solidFill>
+            <a:endParaRPr b="0" lang="en-US" sz="3200" spc="-1" strike="noStrike">
               <a:latin typeface="Arial"/>
             </a:endParaRPr>
           </a:p>
@@ -969,7 +930,7 @@
         <p:txBody>
           <a:bodyPr/>
           <a:p>
-            <a:fld id="{CA46BE3F-8888-4D07-8C67-CADFE06F6556}" type="slidenum">
+            <a:fld id="{417DB948-F077-47BA-BFAE-EAF3024B582F}" type="slidenum">
               <a:t>&lt;#&gt;</a:t>
             </a:fld>
           </a:p>
@@ -1010,7 +971,7 @@
         <p:spPr>
           <a:xfrm>
             <a:off x="311760" y="744480"/>
-            <a:ext cx="8520120" cy="2052360"/>
+            <a:ext cx="8519400" cy="2051640"/>
           </a:xfrm>
           <a:prstGeom prst="rect">
             <a:avLst/>
@@ -1025,10 +986,10 @@
             <a:noAutofit/>
           </a:bodyPr>
           <a:p>
-            <a:endParaRPr b="0" lang="en-US" sz="1400" spc="-1" strike="noStrike">
-              <a:solidFill>
-                <a:srgbClr val="000000"/>
-              </a:solidFill>
+            <a:pPr algn="ctr">
+              <a:buNone/>
+            </a:pPr>
+            <a:endParaRPr b="0" lang="en-US" sz="4400" spc="-1" strike="noStrike">
               <a:latin typeface="Arial"/>
             </a:endParaRPr>
           </a:p>
@@ -1047,7 +1008,7 @@
         <p:spPr>
           <a:xfrm>
             <a:off x="457200" y="1203480"/>
-            <a:ext cx="4015800" cy="2982960"/>
+            <a:ext cx="4015440" cy="2982600"/>
           </a:xfrm>
           <a:prstGeom prst="rect">
             <a:avLst/>
@@ -1062,10 +1023,7 @@
             <a:normAutofit/>
           </a:bodyPr>
           <a:p>
-            <a:endParaRPr b="0" lang="en-US" sz="1400" spc="-1" strike="noStrike">
-              <a:solidFill>
-                <a:srgbClr val="000000"/>
-              </a:solidFill>
+            <a:endParaRPr b="0" lang="en-US" sz="3200" spc="-1" strike="noStrike">
               <a:latin typeface="Arial"/>
             </a:endParaRPr>
           </a:p>
@@ -1083,8 +1041,8 @@
         </p:nvSpPr>
         <p:spPr>
           <a:xfrm>
-            <a:off x="4674240" y="1203480"/>
-            <a:ext cx="4015800" cy="2982960"/>
+            <a:off x="4673880" y="1203480"/>
+            <a:ext cx="4015440" cy="2982600"/>
           </a:xfrm>
           <a:prstGeom prst="rect">
             <a:avLst/>
@@ -1099,10 +1057,7 @@
             <a:normAutofit/>
           </a:bodyPr>
           <a:p>
-            <a:endParaRPr b="0" lang="en-US" sz="1400" spc="-1" strike="noStrike">
-              <a:solidFill>
-                <a:srgbClr val="000000"/>
-              </a:solidFill>
+            <a:endParaRPr b="0" lang="en-US" sz="3200" spc="-1" strike="noStrike">
               <a:latin typeface="Arial"/>
             </a:endParaRPr>
           </a:p>
@@ -1122,7 +1077,7 @@
         <p:txBody>
           <a:bodyPr/>
           <a:p>
-            <a:fld id="{89933BE6-79EF-4AFB-89C1-D82D97D8C4AA}" type="slidenum">
+            <a:fld id="{8EE00D16-801D-442E-8575-C22D2862F2DD}" type="slidenum">
               <a:t>&lt;#&gt;</a:t>
             </a:fld>
           </a:p>
@@ -1163,7 +1118,7 @@
         <p:spPr>
           <a:xfrm>
             <a:off x="311760" y="744480"/>
-            <a:ext cx="8520120" cy="2052360"/>
+            <a:ext cx="8519400" cy="2051640"/>
           </a:xfrm>
           <a:prstGeom prst="rect">
             <a:avLst/>
@@ -1178,10 +1133,10 @@
             <a:noAutofit/>
           </a:bodyPr>
           <a:p>
-            <a:endParaRPr b="0" lang="en-US" sz="1400" spc="-1" strike="noStrike">
-              <a:solidFill>
-                <a:srgbClr val="000000"/>
-              </a:solidFill>
+            <a:pPr algn="ctr">
+              <a:buNone/>
+            </a:pPr>
+            <a:endParaRPr b="0" lang="en-US" sz="4400" spc="-1" strike="noStrike">
               <a:latin typeface="Arial"/>
             </a:endParaRPr>
           </a:p>
@@ -1201,7 +1156,7 @@
         <p:txBody>
           <a:bodyPr/>
           <a:p>
-            <a:fld id="{68F04C51-89CD-4FAE-8255-DA0AB9F25630}" type="slidenum">
+            <a:fld id="{134DF267-E5F0-492A-9FB9-9ABC541184F9}" type="slidenum">
               <a:t>&lt;#&gt;</a:t>
             </a:fld>
           </a:p>
@@ -1242,7 +1197,7 @@
         <p:spPr>
           <a:xfrm>
             <a:off x="311760" y="744480"/>
-            <a:ext cx="8520120" cy="9514800"/>
+            <a:ext cx="8519400" cy="9511560"/>
           </a:xfrm>
           <a:prstGeom prst="rect">
             <a:avLst/>
@@ -1280,7 +1235,7 @@
         <p:txBody>
           <a:bodyPr/>
           <a:p>
-            <a:fld id="{94B98788-FD33-46E3-BC70-C7538542D9B2}" type="slidenum">
+            <a:fld id="{70FDDAC2-4EBB-430E-9A76-D69038B0A533}" type="slidenum">
               <a:t>&lt;#&gt;</a:t>
             </a:fld>
           </a:p>
@@ -1321,7 +1276,7 @@
         <p:spPr>
           <a:xfrm>
             <a:off x="311760" y="744480"/>
-            <a:ext cx="8520120" cy="2052360"/>
+            <a:ext cx="8519400" cy="2051640"/>
           </a:xfrm>
           <a:prstGeom prst="rect">
             <a:avLst/>
@@ -1336,10 +1291,10 @@
             <a:noAutofit/>
           </a:bodyPr>
           <a:p>
-            <a:endParaRPr b="0" lang="en-US" sz="1400" spc="-1" strike="noStrike">
-              <a:solidFill>
-                <a:srgbClr val="000000"/>
-              </a:solidFill>
+            <a:pPr algn="ctr">
+              <a:buNone/>
+            </a:pPr>
+            <a:endParaRPr b="0" lang="en-US" sz="4400" spc="-1" strike="noStrike">
               <a:latin typeface="Arial"/>
             </a:endParaRPr>
           </a:p>
@@ -1358,7 +1313,7 @@
         <p:spPr>
           <a:xfrm>
             <a:off x="457200" y="1203480"/>
-            <a:ext cx="4015800" cy="1422720"/>
+            <a:ext cx="4015440" cy="1422360"/>
           </a:xfrm>
           <a:prstGeom prst="rect">
             <a:avLst/>
@@ -1373,10 +1328,7 @@
             <a:normAutofit/>
           </a:bodyPr>
           <a:p>
-            <a:endParaRPr b="0" lang="en-US" sz="1400" spc="-1" strike="noStrike">
-              <a:solidFill>
-                <a:srgbClr val="000000"/>
-              </a:solidFill>
+            <a:endParaRPr b="0" lang="en-US" sz="3200" spc="-1" strike="noStrike">
               <a:latin typeface="Arial"/>
             </a:endParaRPr>
           </a:p>
@@ -1394,8 +1346,8 @@
         </p:nvSpPr>
         <p:spPr>
           <a:xfrm>
-            <a:off x="4674240" y="1203480"/>
-            <a:ext cx="4015800" cy="2982960"/>
+            <a:off x="4673880" y="1203480"/>
+            <a:ext cx="4015440" cy="2982600"/>
           </a:xfrm>
           <a:prstGeom prst="rect">
             <a:avLst/>
@@ -1410,10 +1362,7 @@
             <a:normAutofit/>
           </a:bodyPr>
           <a:p>
-            <a:endParaRPr b="0" lang="en-US" sz="1400" spc="-1" strike="noStrike">
-              <a:solidFill>
-                <a:srgbClr val="000000"/>
-              </a:solidFill>
+            <a:endParaRPr b="0" lang="en-US" sz="3200" spc="-1" strike="noStrike">
               <a:latin typeface="Arial"/>
             </a:endParaRPr>
           </a:p>
@@ -1431,8 +1380,8 @@
         </p:nvSpPr>
         <p:spPr>
           <a:xfrm>
-            <a:off x="457200" y="2761920"/>
-            <a:ext cx="4015800" cy="1422720"/>
+            <a:off x="457200" y="2761200"/>
+            <a:ext cx="4015440" cy="1422360"/>
           </a:xfrm>
           <a:prstGeom prst="rect">
             <a:avLst/>
@@ -1447,10 +1396,7 @@
             <a:normAutofit/>
           </a:bodyPr>
           <a:p>
-            <a:endParaRPr b="0" lang="en-US" sz="1400" spc="-1" strike="noStrike">
-              <a:solidFill>
-                <a:srgbClr val="000000"/>
-              </a:solidFill>
+            <a:endParaRPr b="0" lang="en-US" sz="3200" spc="-1" strike="noStrike">
               <a:latin typeface="Arial"/>
             </a:endParaRPr>
           </a:p>
@@ -1470,7 +1416,7 @@
         <p:txBody>
           <a:bodyPr/>
           <a:p>
-            <a:fld id="{D973028E-5379-47E6-A4A3-A28BCC24F6DD}" type="slidenum">
+            <a:fld id="{73FBE72E-AFC3-4162-9C88-896B8F81F620}" type="slidenum">
               <a:t>&lt;#&gt;</a:t>
             </a:fld>
           </a:p>
@@ -1511,7 +1457,7 @@
         <p:spPr>
           <a:xfrm>
             <a:off x="311760" y="744480"/>
-            <a:ext cx="8520120" cy="2052360"/>
+            <a:ext cx="8519400" cy="2051640"/>
           </a:xfrm>
           <a:prstGeom prst="rect">
             <a:avLst/>
@@ -1526,10 +1472,10 @@
             <a:noAutofit/>
           </a:bodyPr>
           <a:p>
-            <a:endParaRPr b="0" lang="en-US" sz="1400" spc="-1" strike="noStrike">
-              <a:solidFill>
-                <a:srgbClr val="000000"/>
-              </a:solidFill>
+            <a:pPr algn="ctr">
+              <a:buNone/>
+            </a:pPr>
+            <a:endParaRPr b="0" lang="en-US" sz="4400" spc="-1" strike="noStrike">
               <a:latin typeface="Arial"/>
             </a:endParaRPr>
           </a:p>
@@ -1548,7 +1494,7 @@
         <p:spPr>
           <a:xfrm>
             <a:off x="457200" y="1203480"/>
-            <a:ext cx="4015800" cy="2982960"/>
+            <a:ext cx="4015440" cy="2982600"/>
           </a:xfrm>
           <a:prstGeom prst="rect">
             <a:avLst/>
@@ -1563,10 +1509,7 @@
             <a:normAutofit/>
           </a:bodyPr>
           <a:p>
-            <a:endParaRPr b="0" lang="en-US" sz="1400" spc="-1" strike="noStrike">
-              <a:solidFill>
-                <a:srgbClr val="000000"/>
-              </a:solidFill>
+            <a:endParaRPr b="0" lang="en-US" sz="3200" spc="-1" strike="noStrike">
               <a:latin typeface="Arial"/>
             </a:endParaRPr>
           </a:p>
@@ -1584,8 +1527,8 @@
         </p:nvSpPr>
         <p:spPr>
           <a:xfrm>
-            <a:off x="4674240" y="1203480"/>
-            <a:ext cx="4015800" cy="1422720"/>
+            <a:off x="4673880" y="1203480"/>
+            <a:ext cx="4015440" cy="1422360"/>
           </a:xfrm>
           <a:prstGeom prst="rect">
             <a:avLst/>
@@ -1600,10 +1543,7 @@
             <a:normAutofit/>
           </a:bodyPr>
           <a:p>
-            <a:endParaRPr b="0" lang="en-US" sz="1400" spc="-1" strike="noStrike">
-              <a:solidFill>
-                <a:srgbClr val="000000"/>
-              </a:solidFill>
+            <a:endParaRPr b="0" lang="en-US" sz="3200" spc="-1" strike="noStrike">
               <a:latin typeface="Arial"/>
             </a:endParaRPr>
           </a:p>
@@ -1621,8 +1561,8 @@
         </p:nvSpPr>
         <p:spPr>
           <a:xfrm>
-            <a:off x="4674240" y="2761920"/>
-            <a:ext cx="4015800" cy="1422720"/>
+            <a:off x="4673880" y="2761200"/>
+            <a:ext cx="4015440" cy="1422360"/>
           </a:xfrm>
           <a:prstGeom prst="rect">
             <a:avLst/>
@@ -1637,10 +1577,7 @@
             <a:normAutofit/>
           </a:bodyPr>
           <a:p>
-            <a:endParaRPr b="0" lang="en-US" sz="1400" spc="-1" strike="noStrike">
-              <a:solidFill>
-                <a:srgbClr val="000000"/>
-              </a:solidFill>
+            <a:endParaRPr b="0" lang="en-US" sz="3200" spc="-1" strike="noStrike">
               <a:latin typeface="Arial"/>
             </a:endParaRPr>
           </a:p>
@@ -1660,7 +1597,7 @@
         <p:txBody>
           <a:bodyPr/>
           <a:p>
-            <a:fld id="{6C2C97F3-7994-4AE4-9F03-A93B1F20E54B}" type="slidenum">
+            <a:fld id="{05850F89-48BC-4588-8B34-67137A0E14CF}" type="slidenum">
               <a:t>&lt;#&gt;</a:t>
             </a:fld>
           </a:p>
@@ -1701,7 +1638,7 @@
         <p:spPr>
           <a:xfrm>
             <a:off x="311760" y="744480"/>
-            <a:ext cx="8520120" cy="2052360"/>
+            <a:ext cx="8519400" cy="2051640"/>
           </a:xfrm>
           <a:prstGeom prst="rect">
             <a:avLst/>
@@ -1716,10 +1653,10 @@
             <a:noAutofit/>
           </a:bodyPr>
           <a:p>
-            <a:endParaRPr b="0" lang="en-US" sz="1400" spc="-1" strike="noStrike">
-              <a:solidFill>
-                <a:srgbClr val="000000"/>
-              </a:solidFill>
+            <a:pPr algn="ctr">
+              <a:buNone/>
+            </a:pPr>
+            <a:endParaRPr b="0" lang="en-US" sz="4400" spc="-1" strike="noStrike">
               <a:latin typeface="Arial"/>
             </a:endParaRPr>
           </a:p>
@@ -1738,7 +1675,7 @@
         <p:spPr>
           <a:xfrm>
             <a:off x="457200" y="1203480"/>
-            <a:ext cx="4015800" cy="1422720"/>
+            <a:ext cx="4015440" cy="1422360"/>
           </a:xfrm>
           <a:prstGeom prst="rect">
             <a:avLst/>
@@ -1753,10 +1690,7 @@
             <a:normAutofit/>
           </a:bodyPr>
           <a:p>
-            <a:endParaRPr b="0" lang="en-US" sz="1400" spc="-1" strike="noStrike">
-              <a:solidFill>
-                <a:srgbClr val="000000"/>
-              </a:solidFill>
+            <a:endParaRPr b="0" lang="en-US" sz="3200" spc="-1" strike="noStrike">
               <a:latin typeface="Arial"/>
             </a:endParaRPr>
           </a:p>
@@ -1774,8 +1708,8 @@
         </p:nvSpPr>
         <p:spPr>
           <a:xfrm>
-            <a:off x="4674240" y="1203480"/>
-            <a:ext cx="4015800" cy="1422720"/>
+            <a:off x="4673880" y="1203480"/>
+            <a:ext cx="4015440" cy="1422360"/>
           </a:xfrm>
           <a:prstGeom prst="rect">
             <a:avLst/>
@@ -1790,10 +1724,7 @@
             <a:normAutofit/>
           </a:bodyPr>
           <a:p>
-            <a:endParaRPr b="0" lang="en-US" sz="1400" spc="-1" strike="noStrike">
-              <a:solidFill>
-                <a:srgbClr val="000000"/>
-              </a:solidFill>
+            <a:endParaRPr b="0" lang="en-US" sz="3200" spc="-1" strike="noStrike">
               <a:latin typeface="Arial"/>
             </a:endParaRPr>
           </a:p>
@@ -1811,8 +1742,8 @@
         </p:nvSpPr>
         <p:spPr>
           <a:xfrm>
-            <a:off x="457200" y="2761920"/>
-            <a:ext cx="8229240" cy="1422720"/>
+            <a:off x="457200" y="2761200"/>
+            <a:ext cx="8228880" cy="1422360"/>
           </a:xfrm>
           <a:prstGeom prst="rect">
             <a:avLst/>
@@ -1827,10 +1758,7 @@
             <a:normAutofit/>
           </a:bodyPr>
           <a:p>
-            <a:endParaRPr b="0" lang="en-US" sz="1400" spc="-1" strike="noStrike">
-              <a:solidFill>
-                <a:srgbClr val="000000"/>
-              </a:solidFill>
+            <a:endParaRPr b="0" lang="en-US" sz="3200" spc="-1" strike="noStrike">
               <a:latin typeface="Arial"/>
             </a:endParaRPr>
           </a:p>
@@ -1850,7 +1778,7 @@
         <p:txBody>
           <a:bodyPr/>
           <a:p>
-            <a:fld id="{A1A6D6DC-C58B-4629-802A-3718983BD011}" type="slidenum">
+            <a:fld id="{9AADAA76-CEF6-429E-A2DF-08B081E80465}" type="slidenum">
               <a:t>&lt;#&gt;</a:t>
             </a:fld>
           </a:p>
@@ -1898,7 +1826,7 @@
         <p:spPr>
           <a:xfrm>
             <a:off x="311760" y="744480"/>
-            <a:ext cx="8520120" cy="2052360"/>
+            <a:ext cx="8519400" cy="2051640"/>
           </a:xfrm>
           <a:prstGeom prst="rect">
             <a:avLst/>
@@ -1909,23 +1837,17 @@
           </a:ln>
         </p:spPr>
         <p:txBody>
-          <a:bodyPr tIns="91440" bIns="91440" anchor="b">
-            <a:normAutofit/>
+          <a:bodyPr lIns="0" rIns="0" tIns="0" bIns="0" anchor="ctr">
+            <a:noAutofit/>
           </a:bodyPr>
           <a:p>
             <a:r>
-              <a:rPr b="0" lang="en-US" sz="5200" spc="-1" strike="noStrike">
-                <a:solidFill>
-                  <a:srgbClr val="000000"/>
-                </a:solidFill>
+              <a:rPr b="0" lang="en-US" sz="1800" spc="-1" strike="noStrike">
                 <a:latin typeface="Arial"/>
               </a:rPr>
               <a:t>Click to edit the title text format</a:t>
             </a:r>
-            <a:endParaRPr b="0" lang="en-US" sz="5200" spc="-1" strike="noStrike">
-              <a:solidFill>
-                <a:srgbClr val="000000"/>
-              </a:solidFill>
+            <a:endParaRPr b="0" lang="en-US" sz="1800" spc="-1" strike="noStrike">
               <a:latin typeface="Arial"/>
             </a:endParaRPr>
           </a:p>
@@ -1934,77 +1856,6 @@
       <p:sp>
         <p:nvSpPr>
           <p:cNvPr id="1" name="PlaceHolder 2"/>
-          <p:cNvSpPr>
-            <a:spLocks noGrp="1"/>
-          </p:cNvSpPr>
-          <p:nvPr>
-            <p:ph type="sldNum" idx="1"/>
-          </p:nvPr>
-        </p:nvSpPr>
-        <p:spPr>
-          <a:xfrm>
-            <a:off x="8472600" y="4663080"/>
-            <a:ext cx="548280" cy="393120"/>
-          </a:xfrm>
-          <a:prstGeom prst="rect">
-            <a:avLst/>
-          </a:prstGeom>
-          <a:noFill/>
-          <a:ln w="0">
-            <a:noFill/>
-          </a:ln>
-        </p:spPr>
-        <p:txBody>
-          <a:bodyPr tIns="91440" bIns="91440" anchor="ctr">
-            <a:normAutofit/>
-          </a:bodyPr>
-          <a:lstStyle>
-            <a:lvl1pPr algn="r">
-              <a:lnSpc>
-                <a:spcPct val="100000"/>
-              </a:lnSpc>
-              <a:buNone/>
-              <a:tabLst>
-                <a:tab algn="l" pos="0"/>
-              </a:tabLst>
-              <a:defRPr b="0" lang="en-GB" sz="1000" spc="-1" strike="noStrike">
-                <a:solidFill>
-                  <a:srgbClr val="595959"/>
-                </a:solidFill>
-                <a:latin typeface="Arial"/>
-                <a:ea typeface="Arial"/>
-              </a:defRPr>
-            </a:lvl1pPr>
-          </a:lstStyle>
-          <a:p>
-            <a:pPr algn="r">
-              <a:lnSpc>
-                <a:spcPct val="100000"/>
-              </a:lnSpc>
-              <a:buNone/>
-              <a:tabLst>
-                <a:tab algn="l" pos="0"/>
-              </a:tabLst>
-            </a:pPr>
-            <a:fld id="{5FAD7535-556C-43A2-981E-8B68B8EC5560}" type="slidenum">
-              <a:rPr b="0" lang="en-GB" sz="1000" spc="-1" strike="noStrike">
-                <a:solidFill>
-                  <a:srgbClr val="595959"/>
-                </a:solidFill>
-                <a:latin typeface="Arial"/>
-                <a:ea typeface="Arial"/>
-              </a:rPr>
-              <a:t>&lt;number&gt;</a:t>
-            </a:fld>
-            <a:endParaRPr b="0" lang="en-US" sz="1000" spc="-1" strike="noStrike">
-              <a:latin typeface="Times New Roman"/>
-            </a:endParaRPr>
-          </a:p>
-        </p:txBody>
-      </p:sp>
-      <p:sp>
-        <p:nvSpPr>
-          <p:cNvPr id="2" name="PlaceHolder 3"/>
           <p:cNvSpPr>
             <a:spLocks noGrp="1"/>
           </p:cNvSpPr>
@@ -2015,7 +1866,7 @@
         <p:spPr>
           <a:xfrm>
             <a:off x="457200" y="1203480"/>
-            <a:ext cx="8229240" cy="2982960"/>
+            <a:ext cx="8228880" cy="2982600"/>
           </a:xfrm>
           <a:prstGeom prst="rect">
             <a:avLst/>
@@ -2042,18 +1893,12 @@
               <a:buChar char=""/>
             </a:pPr>
             <a:r>
-              <a:rPr b="0" lang="en-US" sz="1400" spc="-1" strike="noStrike">
-                <a:solidFill>
-                  <a:srgbClr val="000000"/>
-                </a:solidFill>
+              <a:rPr b="0" lang="en-US" sz="1800" spc="-1" strike="noStrike">
                 <a:latin typeface="Arial"/>
               </a:rPr>
               <a:t>Click to edit the outline text format</a:t>
             </a:r>
-            <a:endParaRPr b="0" lang="en-US" sz="1400" spc="-1" strike="noStrike">
-              <a:solidFill>
-                <a:srgbClr val="000000"/>
-              </a:solidFill>
+            <a:endParaRPr b="0" lang="en-US" sz="1800" spc="-1" strike="noStrike">
               <a:latin typeface="Arial"/>
             </a:endParaRPr>
           </a:p>
@@ -2070,18 +1915,12 @@
               <a:buChar char=""/>
             </a:pPr>
             <a:r>
-              <a:rPr b="0" lang="en-US" sz="1400" spc="-1" strike="noStrike">
-                <a:solidFill>
-                  <a:srgbClr val="000000"/>
-                </a:solidFill>
+              <a:rPr b="0" lang="en-US" sz="1800" spc="-1" strike="noStrike">
                 <a:latin typeface="Arial"/>
               </a:rPr>
               <a:t>Second Outline Level</a:t>
             </a:r>
-            <a:endParaRPr b="0" lang="en-US" sz="1400" spc="-1" strike="noStrike">
-              <a:solidFill>
-                <a:srgbClr val="000000"/>
-              </a:solidFill>
+            <a:endParaRPr b="0" lang="en-US" sz="1800" spc="-1" strike="noStrike">
               <a:latin typeface="Arial"/>
             </a:endParaRPr>
           </a:p>
@@ -2098,18 +1937,12 @@
               <a:buChar char=""/>
             </a:pPr>
             <a:r>
-              <a:rPr b="0" lang="en-US" sz="1400" spc="-1" strike="noStrike">
-                <a:solidFill>
-                  <a:srgbClr val="000000"/>
-                </a:solidFill>
+              <a:rPr b="0" lang="en-US" sz="1800" spc="-1" strike="noStrike">
                 <a:latin typeface="Arial"/>
               </a:rPr>
               <a:t>Third Outline Level</a:t>
             </a:r>
-            <a:endParaRPr b="0" lang="en-US" sz="1400" spc="-1" strike="noStrike">
-              <a:solidFill>
-                <a:srgbClr val="000000"/>
-              </a:solidFill>
+            <a:endParaRPr b="0" lang="en-US" sz="1800" spc="-1" strike="noStrike">
               <a:latin typeface="Arial"/>
             </a:endParaRPr>
           </a:p>
@@ -2126,18 +1959,12 @@
               <a:buChar char=""/>
             </a:pPr>
             <a:r>
-              <a:rPr b="0" lang="en-US" sz="1400" spc="-1" strike="noStrike">
-                <a:solidFill>
-                  <a:srgbClr val="000000"/>
-                </a:solidFill>
+              <a:rPr b="0" lang="en-US" sz="1800" spc="-1" strike="noStrike">
                 <a:latin typeface="Arial"/>
               </a:rPr>
               <a:t>Fourth Outline Level</a:t>
             </a:r>
-            <a:endParaRPr b="0" lang="en-US" sz="1400" spc="-1" strike="noStrike">
-              <a:solidFill>
-                <a:srgbClr val="000000"/>
-              </a:solidFill>
+            <a:endParaRPr b="0" lang="en-US" sz="1800" spc="-1" strike="noStrike">
               <a:latin typeface="Arial"/>
             </a:endParaRPr>
           </a:p>
@@ -2154,18 +1981,12 @@
               <a:buChar char=""/>
             </a:pPr>
             <a:r>
-              <a:rPr b="0" lang="en-US" sz="2000" spc="-1" strike="noStrike">
-                <a:solidFill>
-                  <a:srgbClr val="000000"/>
-                </a:solidFill>
+              <a:rPr b="0" lang="en-US" sz="1800" spc="-1" strike="noStrike">
                 <a:latin typeface="Arial"/>
               </a:rPr>
               <a:t>Fifth Outline Level</a:t>
             </a:r>
-            <a:endParaRPr b="0" lang="en-US" sz="2000" spc="-1" strike="noStrike">
-              <a:solidFill>
-                <a:srgbClr val="000000"/>
-              </a:solidFill>
+            <a:endParaRPr b="0" lang="en-US" sz="1800" spc="-1" strike="noStrike">
               <a:latin typeface="Arial"/>
             </a:endParaRPr>
           </a:p>
@@ -2182,18 +2003,12 @@
               <a:buChar char=""/>
             </a:pPr>
             <a:r>
-              <a:rPr b="0" lang="en-US" sz="2000" spc="-1" strike="noStrike">
-                <a:solidFill>
-                  <a:srgbClr val="000000"/>
-                </a:solidFill>
+              <a:rPr b="0" lang="en-US" sz="1800" spc="-1" strike="noStrike">
                 <a:latin typeface="Arial"/>
               </a:rPr>
               <a:t>Sixth Outline Level</a:t>
             </a:r>
-            <a:endParaRPr b="0" lang="en-US" sz="2000" spc="-1" strike="noStrike">
-              <a:solidFill>
-                <a:srgbClr val="000000"/>
-              </a:solidFill>
+            <a:endParaRPr b="0" lang="en-US" sz="1800" spc="-1" strike="noStrike">
               <a:latin typeface="Arial"/>
             </a:endParaRPr>
           </a:p>
@@ -2210,19 +2025,84 @@
               <a:buChar char=""/>
             </a:pPr>
             <a:r>
-              <a:rPr b="0" lang="en-US" sz="2000" spc="-1" strike="noStrike">
-                <a:solidFill>
-                  <a:srgbClr val="000000"/>
-                </a:solidFill>
+              <a:rPr b="0" lang="en-US" sz="1800" spc="-1" strike="noStrike">
                 <a:latin typeface="Arial"/>
               </a:rPr>
               <a:t>Seventh Outline Level</a:t>
             </a:r>
-            <a:endParaRPr b="0" lang="en-US" sz="2000" spc="-1" strike="noStrike">
-              <a:solidFill>
-                <a:srgbClr val="000000"/>
-              </a:solidFill>
-              <a:latin typeface="Arial"/>
+            <a:endParaRPr b="0" lang="en-US" sz="1800" spc="-1" strike="noStrike">
+              <a:latin typeface="Arial"/>
+            </a:endParaRPr>
+          </a:p>
+        </p:txBody>
+      </p:sp>
+      <p:sp>
+        <p:nvSpPr>
+          <p:cNvPr id="2" name="PlaceHolder 3"/>
+          <p:cNvSpPr>
+            <a:spLocks noGrp="1"/>
+          </p:cNvSpPr>
+          <p:nvPr>
+            <p:ph type="sldNum" idx="1"/>
+          </p:nvPr>
+        </p:nvSpPr>
+        <p:spPr>
+          <a:xfrm>
+            <a:off x="8472600" y="4663080"/>
+            <a:ext cx="547560" cy="392400"/>
+          </a:xfrm>
+          <a:prstGeom prst="rect">
+            <a:avLst/>
+          </a:prstGeom>
+          <a:noFill/>
+          <a:ln w="0">
+            <a:noFill/>
+          </a:ln>
+        </p:spPr>
+        <p:txBody>
+          <a:bodyPr lIns="90000" rIns="90000" tIns="91440" bIns="91440" anchor="ctr">
+            <a:noAutofit/>
+          </a:bodyPr>
+          <a:lstStyle>
+            <a:lvl1pPr algn="r">
+              <a:lnSpc>
+                <a:spcPct val="100000"/>
+              </a:lnSpc>
+              <a:buNone/>
+              <a:tabLst>
+                <a:tab algn="l" pos="0"/>
+              </a:tabLst>
+              <a:defRPr b="0" lang="en-GB" sz="1000" spc="-1" strike="noStrike">
+                <a:solidFill>
+                  <a:srgbClr val="595959"/>
+                </a:solidFill>
+                <a:latin typeface="Arial"/>
+                <a:ea typeface="Arial"/>
+              </a:defRPr>
+            </a:lvl1pPr>
+          </a:lstStyle>
+          <a:p>
+            <a:pPr algn="r">
+              <a:lnSpc>
+                <a:spcPct val="100000"/>
+              </a:lnSpc>
+              <a:buNone/>
+              <a:tabLst>
+                <a:tab algn="l" pos="0"/>
+              </a:tabLst>
+            </a:pPr>
+            <a:fld id="{59019C41-E1A4-4291-B525-CA77506CEA4B}" type="slidenum">
+              <a:rPr b="0" lang="en-GB" sz="1000" spc="-1" strike="noStrike">
+                <a:solidFill>
+                  <a:srgbClr val="595959"/>
+                </a:solidFill>
+                <a:latin typeface="Arial"/>
+                <a:ea typeface="Arial"/>
+              </a:rPr>
+              <a:t>&lt;number&gt;</a:t>
+            </a:fld>
+            <a:endParaRPr b="0" lang="en-US" sz="1000" spc="-1" strike="noStrike">
+              <a:latin typeface="Times New Roman"/>
             </a:endParaRPr>
           </a:p>
         </p:txBody>
@@ -2273,7 +2153,7 @@
         <p:spPr>
           <a:xfrm>
             <a:off x="146520" y="2902680"/>
-            <a:ext cx="8759520" cy="2003400"/>
+            <a:ext cx="8758800" cy="2002680"/>
           </a:xfrm>
           <a:prstGeom prst="rect">
             <a:avLst/>
@@ -2290,7 +2170,7 @@
           <a:fontRef idx="minor"/>
         </p:style>
         <p:txBody>
-          <a:bodyPr tIns="91440" bIns="91440" anchor="t">
+          <a:bodyPr lIns="90000" rIns="90000" tIns="91440" bIns="91440" anchor="t">
             <a:noAutofit/>
           </a:bodyPr>
           <a:p>
@@ -2304,14 +2184,14 @@
               </a:tabLst>
             </a:pPr>
             <a:r>
-              <a:rPr b="0" lang="en-GB" sz="2100" spc="-1" strike="noStrike">
+              <a:rPr b="1" lang="en-GB" sz="2100" spc="-1" strike="noStrike">
                 <a:solidFill>
                   <a:srgbClr val="000000"/>
                 </a:solidFill>
                 <a:latin typeface="Google Sans Flex SemiBold"/>
                 <a:ea typeface="Google Sans Flex SemiBold"/>
               </a:rPr>
-              <a:t>Team Details</a:t>
+              <a:t>Team Details:</a:t>
             </a:r>
             <a:endParaRPr b="0" lang="en-US" sz="2100" spc="-1" strike="noStrike">
               <a:latin typeface="Arial"/>
@@ -2381,7 +2261,7 @@
                 <a:latin typeface="Google Sans Flex"/>
                 <a:ea typeface="Google Sans Flex"/>
               </a:rPr>
-              <a:t>Team leader name: Debabrata Hazra, Deepthi Konda</a:t>
+              <a:t>Team leader name: Debabrata Hazra | Team member names: Debabrata Hazra, Deepthi Konda</a:t>
             </a:r>
             <a:endParaRPr b="0" lang="en-US" sz="1800" spc="-1" strike="noStrike">
               <a:latin typeface="Arial"/>
@@ -2444,7 +2324,7 @@
         <p:spPr>
           <a:xfrm>
             <a:off x="0" y="0"/>
-            <a:ext cx="9143640" cy="2715120"/>
+            <a:ext cx="9142920" cy="2714400"/>
           </a:xfrm>
           <a:prstGeom prst="rect">
             <a:avLst/>
@@ -2462,13 +2342,13 @@
         </p:nvPicPr>
         <p:blipFill>
           <a:blip r:embed="rId2"/>
-          <a:srcRect l="0" t="0" r="0" b="98010"/>
+          <a:srcRect l="0" t="0" r="0" b="98031"/>
           <a:stretch/>
         </p:blipFill>
         <p:spPr>
           <a:xfrm>
             <a:off x="0" y="5093640"/>
-            <a:ext cx="9143640" cy="54000"/>
+            <a:ext cx="9142920" cy="53280"/>
           </a:xfrm>
           <a:prstGeom prst="rect">
             <a:avLst/>
@@ -2516,13 +2396,13 @@
         </p:nvPicPr>
         <p:blipFill>
           <a:blip r:embed="rId1"/>
-          <a:srcRect l="0" t="0" r="0" b="98010"/>
+          <a:srcRect l="0" t="0" r="0" b="98031"/>
           <a:stretch/>
         </p:blipFill>
         <p:spPr>
           <a:xfrm>
             <a:off x="0" y="5093640"/>
-            <a:ext cx="9143640" cy="54000"/>
+            <a:ext cx="9142920" cy="53280"/>
           </a:xfrm>
           <a:prstGeom prst="rect">
             <a:avLst/>
@@ -2545,7 +2425,7 @@
         <p:spPr>
           <a:xfrm>
             <a:off x="0" y="0"/>
-            <a:ext cx="9143640" cy="506880"/>
+            <a:ext cx="9142920" cy="506160"/>
           </a:xfrm>
           <a:prstGeom prst="rect">
             <a:avLst/>
@@ -2564,7 +2444,7 @@
         <p:spPr>
           <a:xfrm>
             <a:off x="-29160" y="5072040"/>
-            <a:ext cx="9173160" cy="97560"/>
+            <a:ext cx="9172440" cy="96840"/>
           </a:xfrm>
           <a:prstGeom prst="rect">
             <a:avLst/>
@@ -2592,7 +2472,7 @@
         <p:spPr>
           <a:xfrm>
             <a:off x="265320" y="663840"/>
-            <a:ext cx="8942760" cy="561600"/>
+            <a:ext cx="8942040" cy="560880"/>
           </a:xfrm>
           <a:prstGeom prst="rect">
             <a:avLst/>
@@ -2609,7 +2489,7 @@
           <a:fontRef idx="minor"/>
         </p:style>
         <p:txBody>
-          <a:bodyPr tIns="91440" bIns="91440" anchor="t">
+          <a:bodyPr lIns="90000" rIns="90000" tIns="91440" bIns="91440" anchor="t">
             <a:noAutofit/>
           </a:bodyPr>
           <a:p>
@@ -2632,7 +2512,7 @@
               </a:rPr>
               <a:t>Prototype Performance report/Benchmarking</a:t>
             </a:r>
-            <a:endParaRPr b="1" lang="en-US" sz="1600" spc="-1" strike="noStrike">
+            <a:endParaRPr b="0" lang="en-US" sz="1600" spc="-1" strike="noStrike">
               <a:latin typeface="Arial"/>
             </a:endParaRPr>
           </a:p>
@@ -2641,13 +2521,13 @@
       <p:sp>
         <p:nvSpPr>
           <p:cNvPr id="88" name=""/>
-          <p:cNvSpPr txBox="1"/>
+          <p:cNvSpPr/>
           <p:nvPr/>
         </p:nvSpPr>
         <p:spPr>
           <a:xfrm>
-            <a:off x="265320" y="1225440"/>
-            <a:ext cx="8650080" cy="3688920"/>
+            <a:off x="265320" y="1117440"/>
+            <a:ext cx="8649360" cy="3688200"/>
           </a:xfrm>
           <a:prstGeom prst="rect">
             <a:avLst/>
@@ -2657,25 +2537,51 @@
             <a:noFill/>
           </a:ln>
         </p:spPr>
+        <p:style>
+          <a:lnRef idx="0"/>
+          <a:fillRef idx="0"/>
+          <a:effectRef idx="0"/>
+          <a:fontRef idx="minor"/>
+        </p:style>
         <p:txBody>
           <a:bodyPr lIns="90000" rIns="90000" tIns="45000" bIns="45000" anchor="t">
             <a:noAutofit/>
           </a:bodyPr>
           <a:p>
+            <a:pPr>
+              <a:lnSpc>
+                <a:spcPct val="100000"/>
+              </a:lnSpc>
+              <a:buNone/>
+            </a:pPr>
             <a:r>
               <a:rPr b="0" lang="en-US" sz="1500" spc="-1" strike="noStrike">
-                <a:latin typeface="Arial"/>
-              </a:rPr>
-              <a:t>Latency — 21.6 s for the container-terminal coordinate, 12.6s for the park, 17.2s for an uploaded image. Coordinates also fetch and render satellite imagery. Cold start is now close to warm.</a:t>
+                <a:solidFill>
+                  <a:srgbClr val="000000"/>
+                </a:solidFill>
+                <a:latin typeface="Arial"/>
+                <a:ea typeface="DejaVu Sans"/>
+              </a:rPr>
+              <a:t>Latency — 21.6 s for the container-terminal coordinate, 12.6 s for the park, 17.2 s for an uploaded image. Coordinates also fetch and render satellite imagery. Cold start is now close to warm.</a:t>
             </a:r>
             <a:endParaRPr b="0" lang="en-US" sz="1500" spc="-1" strike="noStrike">
               <a:latin typeface="Arial"/>
             </a:endParaRPr>
           </a:p>
           <a:p>
+            <a:pPr>
+              <a:lnSpc>
+                <a:spcPct val="100000"/>
+              </a:lnSpc>
+              <a:buNone/>
+            </a:pPr>
             <a:r>
               <a:rPr b="0" lang="en-US" sz="1500" spc="-1" strike="noStrike">
-                <a:latin typeface="Arial"/>
+                <a:solidFill>
+                  <a:srgbClr val="000000"/>
+                </a:solidFill>
+                <a:latin typeface="Arial"/>
+                <a:ea typeface="DejaVu Sans"/>
               </a:rPr>
               <a:t>- Representative results, each reproduced on three consecutive runs:</a:t>
             </a:r>
@@ -2684,15 +2590,29 @@
             </a:endParaRPr>
           </a:p>
           <a:p>
+            <a:pPr>
+              <a:lnSpc>
+                <a:spcPct val="100000"/>
+              </a:lnSpc>
+              <a:buNone/>
+            </a:pPr>
             <a:r>
               <a:rPr b="0" lang="en-US" sz="1500" spc="-1" strike="noStrike">
-                <a:latin typeface="Arial"/>
+                <a:solidFill>
+                  <a:srgbClr val="000000"/>
+                </a:solidFill>
+                <a:latin typeface="Arial"/>
+                <a:ea typeface="DejaVu Sans"/>
               </a:rPr>
               <a:t>  </a:t>
             </a:r>
             <a:r>
               <a:rPr b="0" lang="en-US" sz="1500" spc="-1" strike="noStrike">
-                <a:latin typeface="Arial"/>
+                <a:solidFill>
+                  <a:srgbClr val="000000"/>
+                </a:solidFill>
+                <a:latin typeface="Arial"/>
+                <a:ea typeface="DejaVu Sans"/>
               </a:rPr>
               <a:t>- Pasir Panjang Terminal, Singapore — HVI 8.6 CRITICAL, 0% canopy, alert published</a:t>
             </a:r>
@@ -2701,15 +2621,29 @@
             </a:endParaRPr>
           </a:p>
           <a:p>
+            <a:pPr>
+              <a:lnSpc>
+                <a:spcPct val="100000"/>
+              </a:lnSpc>
+              <a:buNone/>
+            </a:pPr>
             <a:r>
               <a:rPr b="0" lang="en-US" sz="1500" spc="-1" strike="noStrike">
-                <a:latin typeface="Arial"/>
+                <a:solidFill>
+                  <a:srgbClr val="000000"/>
+                </a:solidFill>
+                <a:latin typeface="Arial"/>
+                <a:ea typeface="DejaVu Sans"/>
               </a:rPr>
               <a:t>  </a:t>
             </a:r>
             <a:r>
               <a:rPr b="0" lang="en-US" sz="1500" spc="-1" strike="noStrike">
-                <a:latin typeface="Arial"/>
+                <a:solidFill>
+                  <a:srgbClr val="000000"/>
+                </a:solidFill>
+                <a:latin typeface="Arial"/>
+                <a:ea typeface="DejaVu Sans"/>
               </a:rPr>
               <a:t>- Old Dhaka — HVI 8.5 CRITICAL, 0% canopy · Kolkata — 8.2 · Manila — 8.1</a:t>
             </a:r>
@@ -2718,15 +2652,29 @@
             </a:endParaRPr>
           </a:p>
           <a:p>
+            <a:pPr>
+              <a:lnSpc>
+                <a:spcPct val="100000"/>
+              </a:lnSpc>
+              <a:buNone/>
+            </a:pPr>
             <a:r>
               <a:rPr b="0" lang="en-US" sz="1500" spc="-1" strike="noStrike">
-                <a:latin typeface="Arial"/>
+                <a:solidFill>
+                  <a:srgbClr val="000000"/>
+                </a:solidFill>
+                <a:latin typeface="Arial"/>
+                <a:ea typeface="DejaVu Sans"/>
               </a:rPr>
               <a:t>  </a:t>
             </a:r>
             <a:r>
               <a:rPr b="0" lang="en-US" sz="1500" spc="-1" strike="noStrike">
-                <a:latin typeface="Arial"/>
+                <a:solidFill>
+                  <a:srgbClr val="000000"/>
+                </a:solidFill>
+                <a:latin typeface="Arial"/>
+                <a:ea typeface="DejaVu Sans"/>
               </a:rPr>
               <a:t>- Singapore Botanic Gardens — HVI 1.5 LOW, 100% canopy, no alert</a:t>
             </a:r>
@@ -2735,9 +2683,19 @@
             </a:endParaRPr>
           </a:p>
           <a:p>
+            <a:pPr>
+              <a:lnSpc>
+                <a:spcPct val="100000"/>
+              </a:lnSpc>
+              <a:buNone/>
+            </a:pPr>
             <a:r>
               <a:rPr b="0" lang="en-US" sz="1500" spc="-1" strike="noStrike">
-                <a:latin typeface="Arial"/>
+                <a:solidFill>
+                  <a:srgbClr val="000000"/>
+                </a:solidFill>
+                <a:latin typeface="Arial"/>
+                <a:ea typeface="DejaVu Sans"/>
               </a:rPr>
               <a:t>- Climate grounding — live NOAA GSOD telemetry at 31.0 °C via BigQuery</a:t>
             </a:r>
@@ -2746,9 +2704,19 @@
             </a:endParaRPr>
           </a:p>
           <a:p>
+            <a:pPr>
+              <a:lnSpc>
+                <a:spcPct val="100000"/>
+              </a:lnSpc>
+              <a:buNone/>
+            </a:pPr>
             <a:r>
               <a:rPr b="0" lang="en-US" sz="1500" spc="-1" strike="noStrike">
-                <a:latin typeface="Arial"/>
+                <a:solidFill>
+                  <a:srgbClr val="000000"/>
+                </a:solidFill>
+                <a:latin typeface="Arial"/>
+                <a:ea typeface="DejaVu Sans"/>
               </a:rPr>
               <a:t>- Quality — 815 automated tests, all offline; 96% backend coverage with no file below a 70% floor; 0 open P0 defects</a:t>
             </a:r>
@@ -2757,9 +2725,19 @@
             </a:endParaRPr>
           </a:p>
           <a:p>
+            <a:pPr>
+              <a:lnSpc>
+                <a:spcPct val="100000"/>
+              </a:lnSpc>
+              <a:buNone/>
+            </a:pPr>
             <a:r>
               <a:rPr b="0" lang="en-US" sz="1500" spc="-1" strike="noStrike">
-                <a:latin typeface="Arial"/>
+                <a:solidFill>
+                  <a:srgbClr val="000000"/>
+                </a:solidFill>
+                <a:latin typeface="Arial"/>
+                <a:ea typeface="DejaVu Sans"/>
               </a:rPr>
               <a:t>- Reliability — /api/health reports gemini, Firestore, Pub/Sub and BigQuery independently; all four ready in production</a:t>
             </a:r>
@@ -2768,9 +2746,19 @@
             </a:endParaRPr>
           </a:p>
           <a:p>
+            <a:pPr>
+              <a:lnSpc>
+                <a:spcPct val="100000"/>
+              </a:lnSpc>
+              <a:buNone/>
+            </a:pPr>
             <a:r>
               <a:rPr b="0" lang="en-US" sz="1500" spc="-1" strike="noStrike">
-                <a:latin typeface="Arial"/>
+                <a:solidFill>
+                  <a:srgbClr val="000000"/>
+                </a:solidFill>
+                <a:latin typeface="Arial"/>
+                <a:ea typeface="DejaVu Sans"/>
               </a:rPr>
               <a:t>- Safety — uploads that are not JPEG or PNG are rejected 415, including files disguised with an image content type; oversized uploads are rejected 413 before any model spend</a:t>
             </a:r>
@@ -2779,20 +2767,40 @@
             </a:endParaRPr>
           </a:p>
           <a:p>
+            <a:pPr>
+              <a:lnSpc>
+                <a:spcPct val="100000"/>
+              </a:lnSpc>
+              <a:buNone/>
+            </a:pPr>
             <a:r>
               <a:rPr b="0" lang="en-US" sz="1500" spc="-1" strike="noStrike">
-                <a:latin typeface="Arial"/>
-              </a:rPr>
-              <a:t>- Security — no service-account key files anywhere; the Maps key is mounted from Secret Manager, never an environment variable; git leaks scans every push</a:t>
+                <a:solidFill>
+                  <a:srgbClr val="000000"/>
+                </a:solidFill>
+                <a:latin typeface="Arial"/>
+                <a:ea typeface="DejaVu Sans"/>
+              </a:rPr>
+              <a:t>- Security — no service-account key files anywhere; the Maps key is mounted from Secret Manager, never an environment variable; gitleaks scans every push</a:t>
             </a:r>
             <a:endParaRPr b="0" lang="en-US" sz="1500" spc="-1" strike="noStrike">
               <a:latin typeface="Arial"/>
             </a:endParaRPr>
           </a:p>
           <a:p>
+            <a:pPr>
+              <a:lnSpc>
+                <a:spcPct val="100000"/>
+              </a:lnSpc>
+              <a:buNone/>
+            </a:pPr>
             <a:r>
               <a:rPr b="0" lang="en-US" sz="1500" spc="-1" strike="noStrike">
-                <a:latin typeface="Arial"/>
+                <a:solidFill>
+                  <a:srgbClr val="000000"/>
+                </a:solidFill>
+                <a:latin typeface="Arial"/>
+                <a:ea typeface="DejaVu Sans"/>
               </a:rPr>
               <a:t>- Delivery — five required CI checks gate every merge; a version tag deploys both services keylessly and verifies each separately</a:t>
             </a:r>
@@ -2840,13 +2848,13 @@
         </p:nvPicPr>
         <p:blipFill>
           <a:blip r:embed="rId1"/>
-          <a:srcRect l="0" t="0" r="0" b="98010"/>
+          <a:srcRect l="0" t="0" r="0" b="98031"/>
           <a:stretch/>
         </p:blipFill>
         <p:spPr>
           <a:xfrm>
             <a:off x="0" y="5093640"/>
-            <a:ext cx="9143640" cy="54000"/>
+            <a:ext cx="9142920" cy="53280"/>
           </a:xfrm>
           <a:prstGeom prst="rect">
             <a:avLst/>
@@ -2869,7 +2877,7 @@
         <p:spPr>
           <a:xfrm>
             <a:off x="0" y="0"/>
-            <a:ext cx="9143640" cy="506880"/>
+            <a:ext cx="9142920" cy="506160"/>
           </a:xfrm>
           <a:prstGeom prst="rect">
             <a:avLst/>
@@ -2888,7 +2896,7 @@
         <p:spPr>
           <a:xfrm>
             <a:off x="-29160" y="5072040"/>
-            <a:ext cx="9173160" cy="97560"/>
+            <a:ext cx="9172440" cy="96840"/>
           </a:xfrm>
           <a:prstGeom prst="rect">
             <a:avLst/>
@@ -2916,7 +2924,7 @@
         <p:spPr>
           <a:xfrm>
             <a:off x="265320" y="663840"/>
-            <a:ext cx="8942760" cy="561600"/>
+            <a:ext cx="8942040" cy="560880"/>
           </a:xfrm>
           <a:prstGeom prst="rect">
             <a:avLst/>
@@ -2933,7 +2941,7 @@
           <a:fontRef idx="minor"/>
         </p:style>
         <p:txBody>
-          <a:bodyPr tIns="91440" bIns="91440" anchor="t">
+          <a:bodyPr lIns="90000" rIns="90000" tIns="91440" bIns="91440" anchor="t">
             <a:noAutofit/>
           </a:bodyPr>
           <a:p>
@@ -2956,7 +2964,7 @@
               </a:rPr>
               <a:t>Additional Details/Future Development</a:t>
             </a:r>
-            <a:endParaRPr b="1" lang="en-US" sz="1600" spc="-1" strike="noStrike">
+            <a:endParaRPr b="0" lang="en-US" sz="1600" spc="-1" strike="noStrike">
               <a:latin typeface="Arial"/>
             </a:endParaRPr>
           </a:p>
@@ -2965,13 +2973,13 @@
       <p:sp>
         <p:nvSpPr>
           <p:cNvPr id="93" name=""/>
-          <p:cNvSpPr txBox="1"/>
+          <p:cNvSpPr/>
           <p:nvPr/>
         </p:nvSpPr>
         <p:spPr>
           <a:xfrm>
-            <a:off x="265320" y="1225440"/>
-            <a:ext cx="8650080" cy="3728880"/>
+            <a:off x="265320" y="1081440"/>
+            <a:ext cx="8649360" cy="3728160"/>
           </a:xfrm>
           <a:prstGeom prst="rect">
             <a:avLst/>
@@ -2981,14 +2989,30 @@
             <a:noFill/>
           </a:ln>
         </p:spPr>
+        <p:style>
+          <a:lnRef idx="0"/>
+          <a:fillRef idx="0"/>
+          <a:effectRef idx="0"/>
+          <a:fontRef idx="minor"/>
+        </p:style>
         <p:txBody>
           <a:bodyPr lIns="90000" rIns="90000" tIns="45000" bIns="45000" anchor="t">
             <a:noAutofit/>
           </a:bodyPr>
           <a:p>
+            <a:pPr>
+              <a:lnSpc>
+                <a:spcPct val="100000"/>
+              </a:lnSpc>
+              <a:buNone/>
+            </a:pPr>
             <a:r>
               <a:rPr b="1" lang="en-US" sz="1200" spc="-1" strike="noStrike">
-                <a:latin typeface="Arial"/>
+                <a:solidFill>
+                  <a:srgbClr val="000000"/>
+                </a:solidFill>
+                <a:latin typeface="Arial"/>
+                <a:ea typeface="DejaVu Sans"/>
               </a:rPr>
               <a:t>Engineering challenges met</a:t>
             </a:r>
@@ -2997,210 +3021,302 @@
             </a:endParaRPr>
           </a:p>
           <a:p>
+            <a:pPr>
+              <a:lnSpc>
+                <a:spcPct val="100000"/>
+              </a:lnSpc>
+              <a:buNone/>
+            </a:pPr>
             <a:endParaRPr b="0" lang="en-US" sz="1100" spc="-1" strike="noStrike">
               <a:latin typeface="Arial"/>
             </a:endParaRPr>
           </a:p>
           <a:p>
+            <a:pPr>
+              <a:lnSpc>
+                <a:spcPct val="100000"/>
+              </a:lnSpc>
+              <a:buNone/>
+            </a:pPr>
             <a:r>
               <a:rPr b="0" lang="en-US" sz="1200" spc="-1" strike="noStrike">
-                <a:latin typeface="Arial"/>
+                <a:solidFill>
+                  <a:srgbClr val="000000"/>
+                </a:solidFill>
+                <a:latin typeface="Arial"/>
+                <a:ea typeface="DejaVu Sans"/>
               </a:rPr>
               <a:t>  </a:t>
             </a:r>
             <a:r>
               <a:rPr b="0" lang="en-US" sz="1200" spc="-1" strike="noStrike">
-                <a:latin typeface="Arial"/>
-              </a:rPr>
-              <a:t>- A generative model will not reliably return parseable JSON on its own. The analyzer pins a response schema and the </a:t>
-            </a:r>
+                <a:solidFill>
+                  <a:srgbClr val="000000"/>
+                </a:solidFill>
+                <a:latin typeface="Arial"/>
+                <a:ea typeface="DejaVu Sans"/>
+              </a:rPr>
+              <a:t>- A generative model will not reliably return parseable JSON on its own. The analyzer pins a response schema and the backend refuses a non-conforming payload rather than showing a malformed report.</a:t>
+            </a:r>
+            <a:endParaRPr b="0" lang="en-US" sz="1200" spc="-1" strike="noStrike">
+              <a:latin typeface="Arial"/>
+            </a:endParaRPr>
+          </a:p>
+          <a:p>
+            <a:pPr>
+              <a:lnSpc>
+                <a:spcPct val="100000"/>
+              </a:lnSpc>
+              <a:buNone/>
+            </a:pPr>
             <a:r>
               <a:rPr b="0" lang="en-US" sz="1200" spc="-1" strike="noStrike">
-                <a:latin typeface="Arial"/>
-              </a:rPr>
-              <a:t>backend refuses a non-conforming payload rather than showing a malformed report.</a:t>
+                <a:solidFill>
+                  <a:srgbClr val="000000"/>
+                </a:solidFill>
+                <a:latin typeface="Arial"/>
+                <a:ea typeface="DejaVu Sans"/>
+              </a:rPr>
+              <a:t>  </a:t>
+            </a:r>
+            <a:r>
+              <a:rPr b="0" lang="en-US" sz="1200" spc="-1" strike="noStrike">
+                <a:solidFill>
+                  <a:srgbClr val="000000"/>
+                </a:solidFill>
+                <a:latin typeface="Arial"/>
+                <a:ea typeface="DejaVu Sans"/>
+              </a:rPr>
+              <a:t>- Cloud Run scales to zero, so an in-process imagery cache died with the container. Moving it to Cloud Storage made imagery survive scale-to-zero and be shared across instances.</a:t>
             </a:r>
             <a:endParaRPr b="0" lang="en-US" sz="1200" spc="-1" strike="noStrike">
               <a:latin typeface="Arial"/>
             </a:endParaRPr>
           </a:p>
           <a:p>
+            <a:pPr>
+              <a:lnSpc>
+                <a:spcPct val="100000"/>
+              </a:lnSpc>
+              <a:buNone/>
+            </a:pPr>
             <a:r>
               <a:rPr b="0" lang="en-US" sz="1200" spc="-1" strike="noStrike">
-                <a:latin typeface="Arial"/>
+                <a:solidFill>
+                  <a:srgbClr val="000000"/>
+                </a:solidFill>
+                <a:latin typeface="Arial"/>
+                <a:ea typeface="DejaVu Sans"/>
               </a:rPr>
               <a:t>  </a:t>
             </a:r>
             <a:r>
               <a:rPr b="0" lang="en-US" sz="1200" spc="-1" strike="noStrike">
-                <a:latin typeface="Arial"/>
-              </a:rPr>
-              <a:t>- Cloud Run scales to zero, so an in-process imagery cache died with the container. Moving it to Cloud Storage made </a:t>
-            </a:r>
+                <a:solidFill>
+                  <a:srgbClr val="000000"/>
+                </a:solidFill>
+                <a:latin typeface="Arial"/>
+                <a:ea typeface="DejaVu Sans"/>
+              </a:rPr>
+              <a:t>- A map click could not write the coordinate inputs, because Streamlit forbids writing a widget key after that widget exists. The click is deferred and applied on the next run, before any widget is created.</a:t>
+            </a:r>
+            <a:endParaRPr b="0" lang="en-US" sz="1200" spc="-1" strike="noStrike">
+              <a:latin typeface="Arial"/>
+            </a:endParaRPr>
+          </a:p>
+          <a:p>
+            <a:pPr>
+              <a:lnSpc>
+                <a:spcPct val="100000"/>
+              </a:lnSpc>
+              <a:buNone/>
+            </a:pPr>
             <a:r>
               <a:rPr b="0" lang="en-US" sz="1200" spc="-1" strike="noStrike">
-                <a:latin typeface="Arial"/>
-              </a:rPr>
-              <a:t>imagery survive scale-to-zero and be shared across instances.</a:t>
+                <a:solidFill>
+                  <a:srgbClr val="000000"/>
+                </a:solidFill>
+                <a:latin typeface="Arial"/>
+                <a:ea typeface="DejaVu Sans"/>
+              </a:rPr>
+              <a:t>  </a:t>
+            </a:r>
+            <a:r>
+              <a:rPr b="0" lang="en-US" sz="1200" spc="-1" strike="noStrike">
+                <a:solidFill>
+                  <a:srgbClr val="000000"/>
+                </a:solidFill>
+                <a:latin typeface="Arial"/>
+                <a:ea typeface="DejaVu Sans"/>
+              </a:rPr>
+              <a:t>- Google answers 200 with a Plus Code and no country over open water, not ZERO_RESULTS. That absent country became the signal for naming a point at sea.</a:t>
             </a:r>
             <a:endParaRPr b="0" lang="en-US" sz="1200" spc="-1" strike="noStrike">
               <a:latin typeface="Arial"/>
             </a:endParaRPr>
           </a:p>
           <a:p>
+            <a:pPr>
+              <a:lnSpc>
+                <a:spcPct val="100000"/>
+              </a:lnSpc>
+              <a:buNone/>
+            </a:pPr>
+            <a:endParaRPr b="0" lang="en-US" sz="1800" spc="-1" strike="noStrike">
+              <a:latin typeface="Arial"/>
+            </a:endParaRPr>
+          </a:p>
+          <a:p>
+            <a:pPr>
+              <a:lnSpc>
+                <a:spcPct val="100000"/>
+              </a:lnSpc>
+              <a:buNone/>
+            </a:pPr>
+            <a:r>
+              <a:rPr b="1" lang="en-US" sz="1200" spc="-1" strike="noStrike">
+                <a:solidFill>
+                  <a:srgbClr val="000000"/>
+                </a:solidFill>
+                <a:latin typeface="Arial"/>
+                <a:ea typeface="DejaVu Sans"/>
+              </a:rPr>
+              <a:t>Known limitations, stated plainly</a:t>
+            </a:r>
+            <a:endParaRPr b="0" lang="en-US" sz="1200" spc="-1" strike="noStrike">
+              <a:latin typeface="Arial"/>
+            </a:endParaRPr>
+          </a:p>
+          <a:p>
+            <a:pPr>
+              <a:lnSpc>
+                <a:spcPct val="100000"/>
+              </a:lnSpc>
+              <a:buNone/>
+            </a:pPr>
+            <a:endParaRPr b="0" lang="en-US" sz="1100" spc="-1" strike="noStrike">
+              <a:latin typeface="Arial"/>
+            </a:endParaRPr>
+          </a:p>
+          <a:p>
+            <a:pPr>
+              <a:lnSpc>
+                <a:spcPct val="100000"/>
+              </a:lnSpc>
+              <a:buNone/>
+            </a:pPr>
             <a:r>
               <a:rPr b="0" lang="en-US" sz="1200" spc="-1" strike="noStrike">
-                <a:latin typeface="Arial"/>
+                <a:solidFill>
+                  <a:srgbClr val="000000"/>
+                </a:solidFill>
+                <a:latin typeface="Arial"/>
+                <a:ea typeface="DejaVu Sans"/>
               </a:rPr>
               <a:t>  </a:t>
             </a:r>
             <a:r>
               <a:rPr b="0" lang="en-US" sz="1200" spc="-1" strike="noStrike">
-                <a:latin typeface="Arial"/>
-              </a:rPr>
-              <a:t>- A map click could not write the coordinate inputs, because Streamlit forbids writing a widget key after that widget exists. </a:t>
-            </a:r>
+                <a:solidFill>
+                  <a:srgbClr val="000000"/>
+                </a:solidFill>
+                <a:latin typeface="Arial"/>
+                <a:ea typeface="DejaVu Sans"/>
+              </a:rPr>
+              <a:t>- The model has no concept of water. Pointed at open sea it reads the dark surface as asphalt and scores it CRITICAL. Found by fetching the imagery for a shipping lane and looking at it; the shipped presets are now all verified land, but a user can still click the ocean. A water check is the next thing to build.</a:t>
+            </a:r>
+            <a:endParaRPr b="0" lang="en-US" sz="1200" spc="-1" strike="noStrike">
+              <a:latin typeface="Arial"/>
+            </a:endParaRPr>
+          </a:p>
+          <a:p>
+            <a:pPr>
+              <a:lnSpc>
+                <a:spcPct val="100000"/>
+              </a:lnSpc>
+              <a:buNone/>
+            </a:pPr>
             <a:r>
               <a:rPr b="0" lang="en-US" sz="1200" spc="-1" strike="noStrike">
-                <a:latin typeface="Arial"/>
-              </a:rPr>
-              <a:t>The click is deferred and applied on the next run, before any widget is created.</a:t>
+                <a:solidFill>
+                  <a:srgbClr val="000000"/>
+                </a:solidFill>
+                <a:latin typeface="Arial"/>
+                <a:ea typeface="DejaVu Sans"/>
+              </a:rPr>
+              <a:t>  </a:t>
+            </a:r>
+            <a:r>
+              <a:rPr b="0" lang="en-US" sz="1200" spc="-1" strike="noStrike">
+                <a:solidFill>
+                  <a:srgbClr val="000000"/>
+                </a:solidFill>
+                <a:latin typeface="Arial"/>
+                <a:ea typeface="DejaVu Sans"/>
+              </a:rPr>
+              <a:t>- HVI is model-inferred, so scores vary slightly between runs. It is a triage tool that says where to survey first; it does not replace the survey.</a:t>
             </a:r>
             <a:endParaRPr b="0" lang="en-US" sz="1200" spc="-1" strike="noStrike">
               <a:latin typeface="Arial"/>
             </a:endParaRPr>
           </a:p>
           <a:p>
+            <a:pPr>
+              <a:lnSpc>
+                <a:spcPct val="100000"/>
+              </a:lnSpc>
+              <a:buNone/>
+            </a:pPr>
             <a:r>
               <a:rPr b="0" lang="en-US" sz="1200" spc="-1" strike="noStrike">
-                <a:latin typeface="Arial"/>
+                <a:solidFill>
+                  <a:srgbClr val="000000"/>
+                </a:solidFill>
+                <a:latin typeface="Arial"/>
+                <a:ea typeface="DejaVu Sans"/>
               </a:rPr>
               <a:t>  </a:t>
             </a:r>
             <a:r>
               <a:rPr b="0" lang="en-US" sz="1200" spc="-1" strike="noStrike">
-                <a:latin typeface="Arial"/>
-              </a:rPr>
-              <a:t>- Google answers 200 with a Plus Code and no country over open water, not ZERO_RESULTS. That absent country </a:t>
-            </a:r>
+                <a:solidFill>
+                  <a:srgbClr val="000000"/>
+                </a:solidFill>
+                <a:latin typeface="Arial"/>
+                <a:ea typeface="DejaVu Sans"/>
+              </a:rPr>
+              <a:t>- Given an image with no location metadata the model guesses coordinates, and can guess wrong. The report labels those fields inferred rather than presenting them as fact.</a:t>
+            </a:r>
+            <a:endParaRPr b="0" lang="en-US" sz="1200" spc="-1" strike="noStrike">
+              <a:latin typeface="Arial"/>
+            </a:endParaRPr>
+          </a:p>
+          <a:p>
+            <a:pPr>
+              <a:lnSpc>
+                <a:spcPct val="100000"/>
+              </a:lnSpc>
+              <a:buNone/>
+            </a:pPr>
             <a:r>
               <a:rPr b="0" lang="en-US" sz="1200" spc="-1" strike="noStrike">
-                <a:latin typeface="Arial"/>
-              </a:rPr>
-              <a:t>became the signal for naming a point at sea.</a:t>
-            </a:r>
-            <a:endParaRPr b="0" lang="en-US" sz="1200" spc="-1" strike="noStrike">
-              <a:latin typeface="Arial"/>
-            </a:endParaRPr>
-          </a:p>
-          <a:p>
-            <a:endParaRPr b="0" lang="en-US" sz="1800" spc="-1" strike="noStrike">
-              <a:latin typeface="Arial"/>
-            </a:endParaRPr>
-          </a:p>
-          <a:p>
-            <a:r>
-              <a:rPr b="1" lang="en-US" sz="1200" spc="-1" strike="noStrike">
-                <a:latin typeface="Arial"/>
-              </a:rPr>
-              <a:t>Known limitations, stated plainly</a:t>
-            </a:r>
-            <a:endParaRPr b="0" lang="en-US" sz="1200" spc="-1" strike="noStrike">
-              <a:latin typeface="Arial"/>
-            </a:endParaRPr>
-          </a:p>
-          <a:p>
-            <a:endParaRPr b="0" lang="en-US" sz="1100" spc="-1" strike="noStrike">
-              <a:latin typeface="Arial"/>
-            </a:endParaRPr>
-          </a:p>
-          <a:p>
+                <a:solidFill>
+                  <a:srgbClr val="000000"/>
+                </a:solidFill>
+                <a:latin typeface="Arial"/>
+                <a:ea typeface="DejaVu Sans"/>
+              </a:rPr>
+              <a:t>  </a:t>
+            </a:r>
             <a:r>
               <a:rPr b="0" lang="en-US" sz="1200" spc="-1" strike="noStrike">
-                <a:latin typeface="Arial"/>
-              </a:rPr>
-              <a:t>  </a:t>
-            </a:r>
-            <a:r>
-              <a:rPr b="0" lang="en-US" sz="1200" spc="-1" strike="noStrike">
-                <a:latin typeface="Arial"/>
-              </a:rPr>
-              <a:t>- The model has no concept of water. Pointed at open sea it reads the dark surface as asphalt and scores it CRITICAL. </a:t>
-            </a:r>
-            <a:r>
-              <a:rPr b="0" lang="en-US" sz="1200" spc="-1" strike="noStrike">
-                <a:latin typeface="Arial"/>
-              </a:rPr>
-              <a:t>Found by fetching the imagery for a shipping lane and looking at it; the shipped presets are now all verified land, but a user </a:t>
-            </a:r>
-            <a:r>
-              <a:rPr b="0" lang="en-US" sz="1200" spc="-1" strike="noStrike">
-                <a:latin typeface="Arial"/>
-              </a:rPr>
-              <a:t>can still click the ocean. A water check is the next thing to build.</a:t>
-            </a:r>
-            <a:endParaRPr b="0" lang="en-US" sz="1200" spc="-1" strike="noStrike">
-              <a:latin typeface="Arial"/>
-            </a:endParaRPr>
-          </a:p>
-          <a:p>
-            <a:r>
-              <a:rPr b="0" lang="en-US" sz="1200" spc="-1" strike="noStrike">
-                <a:latin typeface="Arial"/>
-              </a:rPr>
-              <a:t>  </a:t>
-            </a:r>
-            <a:r>
-              <a:rPr b="0" lang="en-US" sz="1200" spc="-1" strike="noStrike">
-                <a:latin typeface="Arial"/>
-              </a:rPr>
-              <a:t>- HVI is model-inferred, so scores vary slightly between runs. It is a triage tool that says where to survey first; it does not </a:t>
-            </a:r>
-            <a:r>
-              <a:rPr b="0" lang="en-US" sz="1200" spc="-1" strike="noStrike">
-                <a:latin typeface="Arial"/>
-              </a:rPr>
-              <a:t>replace the survey.</a:t>
-            </a:r>
-            <a:endParaRPr b="0" lang="en-US" sz="1200" spc="-1" strike="noStrike">
-              <a:latin typeface="Arial"/>
-            </a:endParaRPr>
-          </a:p>
-          <a:p>
-            <a:r>
-              <a:rPr b="0" lang="en-US" sz="1200" spc="-1" strike="noStrike">
-                <a:latin typeface="Arial"/>
-              </a:rPr>
-              <a:t>  </a:t>
-            </a:r>
-            <a:r>
-              <a:rPr b="0" lang="en-US" sz="1200" spc="-1" strike="noStrike">
-                <a:latin typeface="Arial"/>
-              </a:rPr>
-              <a:t>- Given an image with no location metadata the model guesses coordinates, and can guess wrong. The report labels those </a:t>
-            </a:r>
-            <a:r>
-              <a:rPr b="0" lang="en-US" sz="1200" spc="-1" strike="noStrike">
-                <a:latin typeface="Arial"/>
-              </a:rPr>
-              <a:t>fields inferred rather than presenting them as fact.</a:t>
-            </a:r>
-            <a:endParaRPr b="0" lang="en-US" sz="1200" spc="-1" strike="noStrike">
-              <a:latin typeface="Arial"/>
-            </a:endParaRPr>
-          </a:p>
-          <a:p>
-            <a:r>
-              <a:rPr b="0" lang="en-US" sz="1200" spc="-1" strike="noStrike">
-                <a:latin typeface="Arial"/>
-              </a:rPr>
-              <a:t>  </a:t>
-            </a:r>
-            <a:r>
-              <a:rPr b="0" lang="en-US" sz="1200" spc="-1" strike="noStrike">
-                <a:latin typeface="Arial"/>
-              </a:rPr>
-              <a:t>- A scan does not yet store the object URI of the exact image it analyzed</a:t>
+                <a:solidFill>
+                  <a:srgbClr val="000000"/>
+                </a:solidFill>
+                <a:latin typeface="Arial"/>
+                <a:ea typeface="DejaVu Sans"/>
+              </a:rPr>
+              <a:t>- A scan does not yet store the object URI of the exact image it analyzed.</a:t>
             </a:r>
             <a:endParaRPr b="0" lang="en-US" sz="1200" spc="-1" strike="noStrike">
               <a:latin typeface="Arial"/>
@@ -3246,13 +3362,13 @@
         </p:nvPicPr>
         <p:blipFill>
           <a:blip r:embed="rId1"/>
-          <a:srcRect l="0" t="0" r="0" b="98010"/>
+          <a:srcRect l="0" t="0" r="0" b="98031"/>
           <a:stretch/>
         </p:blipFill>
         <p:spPr>
           <a:xfrm>
             <a:off x="0" y="5093640"/>
-            <a:ext cx="9143640" cy="54000"/>
+            <a:ext cx="9142920" cy="53280"/>
           </a:xfrm>
           <a:prstGeom prst="rect">
             <a:avLst/>
@@ -3275,7 +3391,7 @@
         <p:spPr>
           <a:xfrm>
             <a:off x="0" y="0"/>
-            <a:ext cx="9143640" cy="506880"/>
+            <a:ext cx="9142920" cy="506160"/>
           </a:xfrm>
           <a:prstGeom prst="rect">
             <a:avLst/>
@@ -3294,7 +3410,7 @@
         <p:spPr>
           <a:xfrm>
             <a:off x="-29160" y="5072040"/>
-            <a:ext cx="9173160" cy="97560"/>
+            <a:ext cx="9172440" cy="96840"/>
           </a:xfrm>
           <a:prstGeom prst="rect">
             <a:avLst/>
@@ -3322,7 +3438,7 @@
         <p:spPr>
           <a:xfrm>
             <a:off x="265320" y="663840"/>
-            <a:ext cx="8942760" cy="561600"/>
+            <a:ext cx="8942040" cy="560880"/>
           </a:xfrm>
           <a:prstGeom prst="rect">
             <a:avLst/>
@@ -3339,7 +3455,7 @@
           <a:fontRef idx="minor"/>
         </p:style>
         <p:txBody>
-          <a:bodyPr tIns="91440" bIns="91440" anchor="t">
+          <a:bodyPr lIns="90000" rIns="90000" tIns="91440" bIns="91440" anchor="t">
             <a:noAutofit/>
           </a:bodyPr>
           <a:p>
@@ -3362,7 +3478,7 @@
               </a:rPr>
               <a:t>Additional Details/Future Development (continued)</a:t>
             </a:r>
-            <a:endParaRPr b="1" lang="en-US" sz="1600" spc="-1" strike="noStrike">
+            <a:endParaRPr b="0" lang="en-US" sz="1600" spc="-1" strike="noStrike">
               <a:latin typeface="Arial"/>
             </a:endParaRPr>
           </a:p>
@@ -3371,13 +3487,13 @@
       <p:sp>
         <p:nvSpPr>
           <p:cNvPr id="98" name=""/>
-          <p:cNvSpPr txBox="1"/>
+          <p:cNvSpPr/>
           <p:nvPr/>
         </p:nvSpPr>
         <p:spPr>
           <a:xfrm>
             <a:off x="265320" y="1225440"/>
-            <a:ext cx="8650080" cy="1252800"/>
+            <a:ext cx="8649360" cy="1252080"/>
           </a:xfrm>
           <a:prstGeom prst="rect">
             <a:avLst/>
@@ -3387,14 +3503,30 @@
             <a:noFill/>
           </a:ln>
         </p:spPr>
+        <p:style>
+          <a:lnRef idx="0"/>
+          <a:fillRef idx="0"/>
+          <a:effectRef idx="0"/>
+          <a:fontRef idx="minor"/>
+        </p:style>
         <p:txBody>
           <a:bodyPr lIns="90000" rIns="90000" tIns="45000" bIns="45000" anchor="t">
             <a:noAutofit/>
           </a:bodyPr>
           <a:p>
+            <a:pPr>
+              <a:lnSpc>
+                <a:spcPct val="100000"/>
+              </a:lnSpc>
+              <a:buNone/>
+            </a:pPr>
             <a:r>
               <a:rPr b="1" lang="en-US" sz="1400" spc="-1" strike="noStrike">
-                <a:latin typeface="Arial"/>
+                <a:solidFill>
+                  <a:srgbClr val="000000"/>
+                </a:solidFill>
+                <a:latin typeface="Arial"/>
+                <a:ea typeface="DejaVu Sans"/>
               </a:rPr>
               <a:t>Future development</a:t>
             </a:r>
@@ -3403,20 +3535,40 @@
             </a:endParaRPr>
           </a:p>
           <a:p>
+            <a:pPr>
+              <a:lnSpc>
+                <a:spcPct val="100000"/>
+              </a:lnSpc>
+              <a:buNone/>
+            </a:pPr>
             <a:endParaRPr b="0" lang="en-US" sz="1200" spc="-1" strike="noStrike">
               <a:latin typeface="Arial"/>
             </a:endParaRPr>
           </a:p>
           <a:p>
+            <a:pPr>
+              <a:lnSpc>
+                <a:spcPct val="100000"/>
+              </a:lnSpc>
+              <a:buNone/>
+            </a:pPr>
             <a:r>
               <a:rPr b="0" lang="en-US" sz="1400" spc="-1" strike="noStrike">
-                <a:latin typeface="Arial"/>
+                <a:solidFill>
+                  <a:srgbClr val="000000"/>
+                </a:solidFill>
+                <a:latin typeface="Arial"/>
+                <a:ea typeface="DejaVu Sans"/>
               </a:rPr>
               <a:t>  </a:t>
             </a:r>
             <a:r>
               <a:rPr b="0" lang="en-US" sz="1400" spc="-1" strike="noStrike">
-                <a:latin typeface="Arial"/>
+                <a:solidFill>
+                  <a:srgbClr val="000000"/>
+                </a:solidFill>
+                <a:latin typeface="Arial"/>
+                <a:ea typeface="DejaVu Sans"/>
               </a:rPr>
               <a:t>- Time-series tracking per zone, to measure whether an intervention actually worked</a:t>
             </a:r>
@@ -3425,15 +3577,29 @@
             </a:endParaRPr>
           </a:p>
           <a:p>
+            <a:pPr>
+              <a:lnSpc>
+                <a:spcPct val="100000"/>
+              </a:lnSpc>
+              <a:buNone/>
+            </a:pPr>
             <a:r>
               <a:rPr b="0" lang="en-US" sz="1400" spc="-1" strike="noStrike">
-                <a:latin typeface="Arial"/>
+                <a:solidFill>
+                  <a:srgbClr val="000000"/>
+                </a:solidFill>
+                <a:latin typeface="Arial"/>
+                <a:ea typeface="DejaVu Sans"/>
               </a:rPr>
               <a:t>  </a:t>
             </a:r>
             <a:r>
               <a:rPr b="0" lang="en-US" sz="1400" spc="-1" strike="noStrike">
-                <a:latin typeface="Arial"/>
+                <a:solidFill>
+                  <a:srgbClr val="000000"/>
+                </a:solidFill>
+                <a:latin typeface="Arial"/>
+                <a:ea typeface="DejaVu Sans"/>
               </a:rPr>
               <a:t>- Batch analysis across a whole city grid, ranked by cooling impact per dollar</a:t>
             </a:r>
@@ -3442,15 +3608,29 @@
             </a:endParaRPr>
           </a:p>
           <a:p>
+            <a:pPr>
+              <a:lnSpc>
+                <a:spcPct val="100000"/>
+              </a:lnSpc>
+              <a:buNone/>
+            </a:pPr>
             <a:r>
               <a:rPr b="0" lang="en-US" sz="1400" spc="-1" strike="noStrike">
-                <a:latin typeface="Arial"/>
+                <a:solidFill>
+                  <a:srgbClr val="000000"/>
+                </a:solidFill>
+                <a:latin typeface="Arial"/>
+                <a:ea typeface="DejaVu Sans"/>
               </a:rPr>
               <a:t>  </a:t>
             </a:r>
             <a:r>
               <a:rPr b="0" lang="en-US" sz="1400" spc="-1" strike="noStrike">
-                <a:latin typeface="Arial"/>
+                <a:solidFill>
+                  <a:srgbClr val="000000"/>
+                </a:solidFill>
+                <a:latin typeface="Arial"/>
+                <a:ea typeface="DejaVu Sans"/>
               </a:rPr>
               <a:t>- Cost modeling attached to the blueprint for direct procurement use</a:t>
             </a:r>
@@ -3459,15 +3639,29 @@
             </a:endParaRPr>
           </a:p>
           <a:p>
+            <a:pPr>
+              <a:lnSpc>
+                <a:spcPct val="100000"/>
+              </a:lnSpc>
+              <a:buNone/>
+            </a:pPr>
             <a:r>
               <a:rPr b="0" lang="en-US" sz="1400" spc="-1" strike="noStrike">
-                <a:latin typeface="Arial"/>
+                <a:solidFill>
+                  <a:srgbClr val="000000"/>
+                </a:solidFill>
+                <a:latin typeface="Arial"/>
+                <a:ea typeface="DejaVu Sans"/>
               </a:rPr>
               <a:t>  </a:t>
             </a:r>
             <a:r>
               <a:rPr b="0" lang="en-US" sz="1400" spc="-1" strike="noStrike">
-                <a:latin typeface="Arial"/>
+                <a:solidFill>
+                  <a:srgbClr val="000000"/>
+                </a:solidFill>
+                <a:latin typeface="Arial"/>
+                <a:ea typeface="DejaVu Sans"/>
               </a:rPr>
               <a:t>- Local-language citizen alerts, and routing to heat shelters during a heatwave</a:t>
             </a:r>
@@ -3515,13 +3709,13 @@
         </p:nvPicPr>
         <p:blipFill>
           <a:blip r:embed="rId1"/>
-          <a:srcRect l="0" t="0" r="0" b="98010"/>
+          <a:srcRect l="0" t="0" r="0" b="98031"/>
           <a:stretch/>
         </p:blipFill>
         <p:spPr>
           <a:xfrm>
             <a:off x="0" y="5093640"/>
-            <a:ext cx="9143640" cy="54000"/>
+            <a:ext cx="9142920" cy="53280"/>
           </a:xfrm>
           <a:prstGeom prst="rect">
             <a:avLst/>
@@ -3544,7 +3738,7 @@
         <p:spPr>
           <a:xfrm>
             <a:off x="0" y="0"/>
-            <a:ext cx="9143640" cy="506880"/>
+            <a:ext cx="9142920" cy="506160"/>
           </a:xfrm>
           <a:prstGeom prst="rect">
             <a:avLst/>
@@ -3563,7 +3757,7 @@
         <p:spPr>
           <a:xfrm>
             <a:off x="-29160" y="5072040"/>
-            <a:ext cx="9173160" cy="97560"/>
+            <a:ext cx="9172440" cy="96840"/>
           </a:xfrm>
           <a:prstGeom prst="rect">
             <a:avLst/>
@@ -3591,7 +3785,7 @@
         <p:spPr>
           <a:xfrm>
             <a:off x="265320" y="663840"/>
-            <a:ext cx="8942760" cy="1333440"/>
+            <a:ext cx="8942040" cy="1332720"/>
           </a:xfrm>
           <a:prstGeom prst="rect">
             <a:avLst/>
@@ -3608,7 +3802,7 @@
           <a:fontRef idx="minor"/>
         </p:style>
         <p:txBody>
-          <a:bodyPr tIns="91440" bIns="91440" anchor="t">
+          <a:bodyPr lIns="90000" rIns="90000" tIns="91440" bIns="91440" anchor="t">
             <a:noAutofit/>
           </a:bodyPr>
           <a:p>
@@ -3654,13 +3848,13 @@
       <p:sp>
         <p:nvSpPr>
           <p:cNvPr id="103" name=""/>
-          <p:cNvSpPr txBox="1"/>
+          <p:cNvSpPr/>
           <p:nvPr/>
         </p:nvSpPr>
         <p:spPr>
           <a:xfrm>
             <a:off x="457200" y="1191600"/>
-            <a:ext cx="8458200" cy="3340800"/>
+            <a:ext cx="8457480" cy="3340080"/>
           </a:xfrm>
           <a:prstGeom prst="rect">
             <a:avLst/>
@@ -3670,14 +3864,30 @@
             <a:noFill/>
           </a:ln>
         </p:spPr>
+        <p:style>
+          <a:lnRef idx="0"/>
+          <a:fillRef idx="0"/>
+          <a:effectRef idx="0"/>
+          <a:fontRef idx="minor"/>
+        </p:style>
         <p:txBody>
           <a:bodyPr lIns="90000" rIns="90000" tIns="45000" bIns="45000" anchor="t">
             <a:noAutofit/>
           </a:bodyPr>
           <a:p>
+            <a:pPr>
+              <a:lnSpc>
+                <a:spcPct val="100000"/>
+              </a:lnSpc>
+              <a:buNone/>
+            </a:pPr>
             <a:r>
               <a:rPr b="1" lang="en-US" sz="1600" spc="-1" strike="noStrike">
-                <a:latin typeface="Arial"/>
+                <a:solidFill>
+                  <a:srgbClr val="000000"/>
+                </a:solidFill>
+                <a:latin typeface="Arial"/>
+                <a:ea typeface="DejaVu Sans"/>
               </a:rPr>
               <a:t>GitHub Public Repository</a:t>
             </a:r>
@@ -3686,171 +3896,335 @@
             </a:endParaRPr>
           </a:p>
           <a:p>
+            <a:pPr>
+              <a:lnSpc>
+                <a:spcPct val="100000"/>
+              </a:lnSpc>
+              <a:buNone/>
+            </a:pPr>
             <a:r>
               <a:rPr b="0" lang="en-US" sz="1600" spc="-1" strike="noStrike">
-                <a:latin typeface="Arial"/>
+                <a:solidFill>
+                  <a:srgbClr val="000000"/>
+                </a:solidFill>
+                <a:latin typeface="Arial"/>
+                <a:ea typeface="DejaVu Sans"/>
               </a:rPr>
               <a:t>  </a:t>
             </a:r>
             <a:r>
               <a:rPr b="0" lang="en-US" sz="1600" spc="-1" strike="noStrike">
-                <a:latin typeface="Arial"/>
+                <a:solidFill>
+                  <a:srgbClr val="000000"/>
+                </a:solidFill>
+                <a:latin typeface="Arial"/>
+                <a:ea typeface="DejaVu Sans"/>
               </a:rPr>
               <a:t>- </a:t>
             </a:r>
             <a:r>
+              <a:rPr b="0" lang="en-US" sz="1600" spc="-1" strike="noStrike" u="sng">
+                <a:solidFill>
+                  <a:srgbClr val="0097a7"/>
+                </a:solidFill>
+                <a:uFillTx/>
+                <a:latin typeface="Arial"/>
+                <a:ea typeface="DejaVu Sans"/>
+                <a:hlinkClick r:id="rId3"/>
+              </a:rPr>
+              <a:t>https://github.com/debabratahazra/hotspot-sentinels</a:t>
+            </a:r>
+            <a:endParaRPr b="0" lang="en-US" sz="1600" spc="-1" strike="noStrike">
+              <a:latin typeface="Arial"/>
+            </a:endParaRPr>
+          </a:p>
+          <a:p>
+            <a:pPr>
+              <a:lnSpc>
+                <a:spcPct val="100000"/>
+              </a:lnSpc>
+              <a:buNone/>
+            </a:pPr>
+            <a:endParaRPr b="0" lang="en-US" sz="1800" spc="-1" strike="noStrike">
+              <a:latin typeface="Arial"/>
+            </a:endParaRPr>
+          </a:p>
+          <a:p>
+            <a:pPr>
+              <a:lnSpc>
+                <a:spcPct val="100000"/>
+              </a:lnSpc>
+              <a:buNone/>
+            </a:pPr>
+            <a:r>
+              <a:rPr b="1" lang="en-US" sz="1600" spc="-1" strike="noStrike">
+                <a:solidFill>
+                  <a:srgbClr val="000000"/>
+                </a:solidFill>
+                <a:latin typeface="Arial"/>
+                <a:ea typeface="DejaVu Sans"/>
+              </a:rPr>
+              <a:t>Demo Video Link:</a:t>
+            </a:r>
+            <a:endParaRPr b="0" lang="en-US" sz="1600" spc="-1" strike="noStrike">
+              <a:latin typeface="Arial"/>
+            </a:endParaRPr>
+          </a:p>
+          <a:p>
+            <a:pPr>
+              <a:lnSpc>
+                <a:spcPct val="100000"/>
+              </a:lnSpc>
+              <a:buNone/>
+            </a:pPr>
+            <a:r>
               <a:rPr b="0" lang="en-US" sz="1600" spc="-1" strike="noStrike">
-                <a:latin typeface="Arial"/>
-                <a:hlinkClick r:id="rId3"/>
-              </a:rPr>
-              <a:t>https://github.com/debabratahazra/hotspot-sentinels</a:t>
+                <a:solidFill>
+                  <a:srgbClr val="000000"/>
+                </a:solidFill>
+                <a:latin typeface="Arial"/>
+                <a:ea typeface="DejaVu Sans"/>
+              </a:rPr>
+              <a:t>  </a:t>
+            </a:r>
+            <a:r>
+              <a:rPr b="0" lang="en-US" sz="1600" spc="-1" strike="noStrike">
+                <a:solidFill>
+                  <a:srgbClr val="000000"/>
+                </a:solidFill>
+                <a:latin typeface="Arial"/>
+                <a:ea typeface="DejaVu Sans"/>
+              </a:rPr>
+              <a:t>- </a:t>
+            </a:r>
+            <a:r>
+              <a:rPr b="0" lang="en-US" sz="1600" spc="-1" strike="noStrike" u="sng">
+                <a:solidFill>
+                  <a:srgbClr val="0097a7"/>
+                </a:solidFill>
+                <a:uFillTx/>
+                <a:latin typeface="Arial"/>
+                <a:ea typeface="DejaVu Sans"/>
+                <a:hlinkClick r:id="rId4"/>
+              </a:rPr>
+              <a:t>https://www.youtube.com/watch?v=6styvZ6DFQE</a:t>
             </a:r>
             <a:endParaRPr b="0" lang="en-US" sz="1600" spc="-1" strike="noStrike">
               <a:latin typeface="Arial"/>
             </a:endParaRPr>
           </a:p>
           <a:p>
-            <a:endParaRPr b="0" lang="en-US" sz="1800" spc="-1" strike="noStrike">
-              <a:latin typeface="Arial"/>
-            </a:endParaRPr>
-          </a:p>
-          <a:p>
+            <a:pPr>
+              <a:lnSpc>
+                <a:spcPct val="100000"/>
+              </a:lnSpc>
+              <a:buNone/>
+            </a:pPr>
+            <a:endParaRPr b="0" lang="en-US" sz="1600" spc="-1" strike="noStrike">
+              <a:latin typeface="Arial"/>
+            </a:endParaRPr>
+          </a:p>
+          <a:p>
+            <a:pPr>
+              <a:lnSpc>
+                <a:spcPct val="100000"/>
+              </a:lnSpc>
+              <a:buNone/>
+            </a:pPr>
             <a:r>
               <a:rPr b="1" lang="en-US" sz="1600" spc="-1" strike="noStrike">
-                <a:latin typeface="Arial"/>
-              </a:rPr>
-              <a:t>Demo Video Link:</a:t>
+                <a:solidFill>
+                  <a:srgbClr val="000000"/>
+                </a:solidFill>
+                <a:latin typeface="Arial"/>
+                <a:ea typeface="DejaVu Sans"/>
+              </a:rPr>
+              <a:t>Final Product Link (deployed prototype):</a:t>
             </a:r>
             <a:endParaRPr b="0" lang="en-US" sz="1600" spc="-1" strike="noStrike">
               <a:latin typeface="Arial"/>
             </a:endParaRPr>
           </a:p>
           <a:p>
+            <a:pPr>
+              <a:lnSpc>
+                <a:spcPct val="100000"/>
+              </a:lnSpc>
+              <a:buNone/>
+            </a:pPr>
             <a:r>
               <a:rPr b="0" lang="en-US" sz="1600" spc="-1" strike="noStrike">
-                <a:latin typeface="Arial"/>
+                <a:solidFill>
+                  <a:srgbClr val="000000"/>
+                </a:solidFill>
+                <a:latin typeface="Arial"/>
+                <a:ea typeface="DejaVu Sans"/>
+              </a:rPr>
+              <a:t>- </a:t>
+            </a:r>
+            <a:r>
+              <a:rPr b="0" lang="en-US" sz="1600" spc="-1" strike="noStrike" u="sng">
+                <a:solidFill>
+                  <a:srgbClr val="0097a7"/>
+                </a:solidFill>
+                <a:uFillTx/>
+                <a:latin typeface="Arial"/>
+                <a:ea typeface="DejaVu Sans"/>
+                <a:hlinkClick r:id="rId5"/>
+              </a:rPr>
+              <a:t>https://hotspot-frontend-153692178986.asia-southeast1.run.app</a:t>
+            </a:r>
+            <a:endParaRPr b="0" lang="en-US" sz="1600" spc="-1" strike="noStrike">
+              <a:latin typeface="Arial"/>
+            </a:endParaRPr>
+          </a:p>
+          <a:p>
+            <a:pPr>
+              <a:lnSpc>
+                <a:spcPct val="100000"/>
+              </a:lnSpc>
+              <a:buNone/>
+            </a:pPr>
+            <a:endParaRPr b="0" lang="en-US" sz="1300" spc="-1" strike="noStrike">
+              <a:latin typeface="Arial"/>
+            </a:endParaRPr>
+          </a:p>
+          <a:p>
+            <a:pPr>
+              <a:lnSpc>
+                <a:spcPct val="100000"/>
+              </a:lnSpc>
+              <a:buNone/>
+            </a:pPr>
+            <a:r>
+              <a:rPr b="1" lang="en-US" sz="1600" spc="-1" strike="noStrike">
+                <a:solidFill>
+                  <a:srgbClr val="000000"/>
+                </a:solidFill>
+                <a:latin typeface="Arial"/>
+                <a:ea typeface="DejaVu Sans"/>
+              </a:rPr>
+              <a:t>Public alert wall (live, no sign-in):</a:t>
+            </a:r>
+            <a:endParaRPr b="0" lang="en-US" sz="1600" spc="-1" strike="noStrike">
+              <a:latin typeface="Arial"/>
+            </a:endParaRPr>
+          </a:p>
+          <a:p>
+            <a:pPr>
+              <a:lnSpc>
+                <a:spcPct val="100000"/>
+              </a:lnSpc>
+              <a:buNone/>
+            </a:pPr>
+            <a:r>
+              <a:rPr b="0" lang="en-US" sz="1600" spc="-1" strike="noStrike">
+                <a:solidFill>
+                  <a:srgbClr val="000000"/>
+                </a:solidFill>
+                <a:latin typeface="Arial"/>
+                <a:ea typeface="DejaVu Sans"/>
+              </a:rPr>
+              <a:t>- </a:t>
+            </a:r>
+            <a:r>
+              <a:rPr b="0" lang="en-US" sz="1600" spc="-1" strike="noStrike" u="sng">
+                <a:solidFill>
+                  <a:srgbClr val="0097a7"/>
+                </a:solidFill>
+                <a:uFillTx/>
+                <a:latin typeface="Arial"/>
+                <a:ea typeface="DejaVu Sans"/>
+                <a:hlinkClick r:id="rId6"/>
+              </a:rPr>
+              <a:t>https://hotspot-sentinels-7364.web.app</a:t>
+            </a:r>
+            <a:endParaRPr b="0" lang="en-US" sz="1600" spc="-1" strike="noStrike">
+              <a:latin typeface="Arial"/>
+            </a:endParaRPr>
+          </a:p>
+          <a:p>
+            <a:pPr>
+              <a:lnSpc>
+                <a:spcPct val="100000"/>
+              </a:lnSpc>
+              <a:buNone/>
+            </a:pPr>
+            <a:endParaRPr b="0" lang="en-US" sz="1300" spc="-1" strike="noStrike">
+              <a:latin typeface="Arial"/>
+            </a:endParaRPr>
+          </a:p>
+          <a:p>
+            <a:pPr>
+              <a:lnSpc>
+                <a:spcPct val="100000"/>
+              </a:lnSpc>
+              <a:buNone/>
+            </a:pPr>
+            <a:r>
+              <a:rPr b="1" lang="en-US" sz="1600" spc="-1" strike="noStrike">
+                <a:solidFill>
+                  <a:srgbClr val="000000"/>
+                </a:solidFill>
+                <a:latin typeface="Arial"/>
+                <a:ea typeface="DejaVu Sans"/>
+              </a:rPr>
+              <a:t>Backend API (health check):</a:t>
+            </a:r>
+            <a:endParaRPr b="0" lang="en-US" sz="1600" spc="-1" strike="noStrike">
+              <a:latin typeface="Arial"/>
+            </a:endParaRPr>
+          </a:p>
+          <a:p>
+            <a:pPr>
+              <a:lnSpc>
+                <a:spcPct val="100000"/>
+              </a:lnSpc>
+              <a:buNone/>
+            </a:pPr>
+            <a:r>
+              <a:rPr b="0" lang="en-US" sz="1600" spc="-1" strike="noStrike">
+                <a:solidFill>
+                  <a:srgbClr val="000000"/>
+                </a:solidFill>
+                <a:latin typeface="Arial"/>
+                <a:ea typeface="DejaVu Sans"/>
               </a:rPr>
               <a:t>  </a:t>
             </a:r>
             <a:r>
               <a:rPr b="0" lang="en-US" sz="1600" spc="-1" strike="noStrike">
-                <a:latin typeface="Arial"/>
-              </a:rPr>
-              <a:t>- [INSERT VIDEO URL — 3 to 4 minutes, publicly accessible]</a:t>
+                <a:solidFill>
+                  <a:srgbClr val="000000"/>
+                </a:solidFill>
+                <a:latin typeface="Arial"/>
+                <a:ea typeface="DejaVu Sans"/>
+              </a:rPr>
+              <a:t>- </a:t>
+            </a:r>
+            <a:r>
+              <a:rPr b="0" lang="en-US" sz="1600" spc="-1" strike="noStrike" u="sng">
+                <a:solidFill>
+                  <a:srgbClr val="0097a7"/>
+                </a:solidFill>
+                <a:uFillTx/>
+                <a:latin typeface="Arial"/>
+                <a:ea typeface="DejaVu Sans"/>
+                <a:hlinkClick r:id="rId7"/>
+              </a:rPr>
+              <a:t>https://hotspot-backend-153692178986.asia-southeast1.run.app/api/health</a:t>
             </a:r>
             <a:endParaRPr b="0" lang="en-US" sz="1600" spc="-1" strike="noStrike">
               <a:latin typeface="Arial"/>
             </a:endParaRPr>
           </a:p>
           <a:p>
-            <a:endParaRPr b="0" lang="en-US" sz="1300" spc="-1" strike="noStrike">
-              <a:latin typeface="Arial"/>
-            </a:endParaRPr>
-          </a:p>
-          <a:p>
-            <a:r>
-              <a:rPr b="1" lang="en-US" sz="1600" spc="-1" strike="noStrike">
-                <a:latin typeface="Arial"/>
-              </a:rPr>
-              <a:t>Final Product Link (deployed prototype):</a:t>
-            </a:r>
-            <a:endParaRPr b="0" lang="en-US" sz="1600" spc="-1" strike="noStrike">
-              <a:latin typeface="Arial"/>
-            </a:endParaRPr>
-          </a:p>
-          <a:p>
-            <a:r>
-              <a:rPr b="0" lang="en-US" sz="1600" spc="-1" strike="noStrike">
-                <a:latin typeface="Arial"/>
-              </a:rPr>
-              <a:t>- </a:t>
-            </a:r>
-            <a:r>
-              <a:rPr b="0" lang="en-US" sz="1600" spc="-1" strike="noStrike">
-                <a:latin typeface="Arial"/>
-                <a:hlinkClick r:id="rId4"/>
-              </a:rPr>
-              <a:t>https://hotspot-frontend-153692178986.asia-southeast1.run.app</a:t>
-            </a:r>
-            <a:endParaRPr b="0" lang="en-US" sz="1600" spc="-1" strike="noStrike">
-              <a:latin typeface="Arial"/>
-            </a:endParaRPr>
-          </a:p>
-          <a:p>
-            <a:endParaRPr b="0" lang="en-US" sz="1300" spc="-1" strike="noStrike">
-              <a:latin typeface="Arial"/>
-            </a:endParaRPr>
-          </a:p>
-          <a:p>
-            <a:r>
-              <a:rPr b="1" lang="en-US" sz="1600" spc="-1" strike="noStrike">
-                <a:latin typeface="Arial"/>
-              </a:rPr>
-              <a:t>Public alert wall (live, no sign-in):</a:t>
-            </a:r>
-            <a:endParaRPr b="0" lang="en-US" sz="1600" spc="-1" strike="noStrike">
-              <a:latin typeface="Arial"/>
-            </a:endParaRPr>
-          </a:p>
-          <a:p>
-            <a:r>
-              <a:rPr b="0" lang="en-US" sz="1600" spc="-1" strike="noStrike">
-                <a:latin typeface="Arial"/>
-              </a:rPr>
-              <a:t>- </a:t>
-            </a:r>
-            <a:r>
-              <a:rPr b="0" lang="en-US" sz="1600" spc="-1" strike="noStrike">
-                <a:latin typeface="Arial"/>
-                <a:hlinkClick r:id="rId5"/>
-              </a:rPr>
-              <a:t>https://hotspot-sentinels-7364.web.app</a:t>
-            </a:r>
-            <a:endParaRPr b="0" lang="en-US" sz="1600" spc="-1" strike="noStrike">
-              <a:latin typeface="Arial"/>
-            </a:endParaRPr>
-          </a:p>
-          <a:p>
-            <a:endParaRPr b="0" lang="en-US" sz="1300" spc="-1" strike="noStrike">
-              <a:latin typeface="Arial"/>
-            </a:endParaRPr>
-          </a:p>
-          <a:p>
-            <a:r>
-              <a:rPr b="1" lang="en-US" sz="1600" spc="-1" strike="noStrike">
-                <a:latin typeface="Arial"/>
-              </a:rPr>
-              <a:t>Backend API (health check):</a:t>
-            </a:r>
-            <a:endParaRPr b="0" lang="en-US" sz="1600" spc="-1" strike="noStrike">
-              <a:latin typeface="Arial"/>
-            </a:endParaRPr>
-          </a:p>
-          <a:p>
-            <a:r>
-              <a:rPr b="0" lang="en-US" sz="1600" spc="-1" strike="noStrike">
-                <a:latin typeface="Arial"/>
-              </a:rPr>
-              <a:t>  </a:t>
-            </a:r>
-            <a:r>
-              <a:rPr b="0" lang="en-US" sz="1600" spc="-1" strike="noStrike">
-                <a:latin typeface="Arial"/>
-              </a:rPr>
-              <a:t>- </a:t>
-            </a:r>
-            <a:r>
-              <a:rPr b="0" lang="en-US" sz="1600" spc="-1" strike="noStrike">
-                <a:latin typeface="Arial"/>
-                <a:hlinkClick r:id="rId6"/>
-              </a:rPr>
-              <a:t>https://hotspot-backend-153692178986.asia-southeast1.run.app/api/health</a:t>
-            </a:r>
-            <a:endParaRPr b="0" lang="en-US" sz="1600" spc="-1" strike="noStrike">
-              <a:latin typeface="Arial"/>
-            </a:endParaRPr>
-          </a:p>
-          <a:p>
+            <a:pPr>
+              <a:lnSpc>
+                <a:spcPct val="100000"/>
+              </a:lnSpc>
+              <a:buNone/>
+            </a:pPr>
             <a:endParaRPr b="0" lang="en-US" sz="1300" spc="-1" strike="noStrike">
               <a:latin typeface="Arial"/>
             </a:endParaRPr>
@@ -3895,13 +4269,13 @@
         </p:nvPicPr>
         <p:blipFill>
           <a:blip r:embed="rId1"/>
-          <a:srcRect l="0" t="0" r="0" b="98010"/>
+          <a:srcRect l="0" t="0" r="0" b="98031"/>
           <a:stretch/>
         </p:blipFill>
         <p:spPr>
           <a:xfrm>
             <a:off x="0" y="5093640"/>
-            <a:ext cx="9143640" cy="54000"/>
+            <a:ext cx="9142920" cy="53280"/>
           </a:xfrm>
           <a:prstGeom prst="rect">
             <a:avLst/>
@@ -3924,7 +4298,7 @@
         <p:spPr>
           <a:xfrm>
             <a:off x="0" y="0"/>
-            <a:ext cx="9143640" cy="5143320"/>
+            <a:ext cx="9142920" cy="5142600"/>
           </a:xfrm>
           <a:prstGeom prst="rect">
             <a:avLst/>
@@ -3977,7 +4351,7 @@
         <p:spPr>
           <a:xfrm>
             <a:off x="0" y="0"/>
-            <a:ext cx="9143640" cy="506880"/>
+            <a:ext cx="9142920" cy="506160"/>
           </a:xfrm>
           <a:prstGeom prst="rect">
             <a:avLst/>
@@ -3996,7 +4370,7 @@
         <p:spPr>
           <a:xfrm>
             <a:off x="-29160" y="5072040"/>
-            <a:ext cx="9173160" cy="97560"/>
+            <a:ext cx="9172440" cy="96840"/>
           </a:xfrm>
           <a:prstGeom prst="rect">
             <a:avLst/>
@@ -4024,7 +4398,7 @@
         <p:spPr>
           <a:xfrm>
             <a:off x="265320" y="663840"/>
-            <a:ext cx="8942760" cy="561600"/>
+            <a:ext cx="8942040" cy="560880"/>
           </a:xfrm>
           <a:prstGeom prst="rect">
             <a:avLst/>
@@ -4041,7 +4415,7 @@
           <a:fontRef idx="minor"/>
         </p:style>
         <p:txBody>
-          <a:bodyPr tIns="91440" bIns="91440" anchor="t">
+          <a:bodyPr lIns="90000" rIns="90000" tIns="91440" bIns="91440" anchor="t">
             <a:noAutofit/>
           </a:bodyPr>
           <a:p>
@@ -4064,7 +4438,7 @@
               </a:rPr>
               <a:t>Brief about the idea</a:t>
             </a:r>
-            <a:endParaRPr b="1" lang="en-US" sz="1600" spc="-1" strike="noStrike">
+            <a:endParaRPr b="0" lang="en-US" sz="1600" spc="-1" strike="noStrike">
               <a:latin typeface="Arial"/>
             </a:endParaRPr>
           </a:p>
@@ -4073,13 +4447,13 @@
       <p:sp>
         <p:nvSpPr>
           <p:cNvPr id="45" name=""/>
-          <p:cNvSpPr txBox="1"/>
+          <p:cNvSpPr/>
           <p:nvPr/>
         </p:nvSpPr>
         <p:spPr>
           <a:xfrm>
-            <a:off x="265320" y="1263600"/>
-            <a:ext cx="8835480" cy="3565800"/>
+            <a:off x="265320" y="1155600"/>
+            <a:ext cx="8834760" cy="3565080"/>
           </a:xfrm>
           <a:prstGeom prst="rect">
             <a:avLst/>
@@ -4089,17 +4463,30 @@
             <a:noFill/>
           </a:ln>
         </p:spPr>
+        <p:style>
+          <a:lnRef idx="0"/>
+          <a:fillRef idx="0"/>
+          <a:effectRef idx="0"/>
+          <a:fontRef idx="minor"/>
+        </p:style>
         <p:txBody>
           <a:bodyPr lIns="90000" rIns="90000" tIns="45000" bIns="45000" anchor="t">
             <a:noAutofit/>
           </a:bodyPr>
           <a:p>
             <a:pPr algn="just">
+              <a:lnSpc>
+                <a:spcPct val="100000"/>
+              </a:lnSpc>
               <a:buNone/>
             </a:pPr>
             <a:r>
               <a:rPr b="0" lang="en-US" sz="1500" spc="-1" strike="noStrike">
-                <a:latin typeface="Arial"/>
+                <a:solidFill>
+                  <a:srgbClr val="000000"/>
+                </a:solidFill>
+                <a:latin typeface="Arial"/>
+                <a:ea typeface="DejaVu Sans"/>
               </a:rPr>
               <a:t>Heat is the deadliest weather there is, and cities make it worse. Dark roofs and asphalt turn a neighborhood into an oven several degrees hotter than the land around it.</a:t>
             </a:r>
@@ -4109,6 +4496,9 @@
           </a:p>
           <a:p>
             <a:pPr algn="just">
+              <a:lnSpc>
+                <a:spcPct val="100000"/>
+              </a:lnSpc>
               <a:buNone/>
             </a:pPr>
             <a:endParaRPr b="0" lang="en-US" sz="1800" spc="-1" strike="noStrike">
@@ -4117,11 +4507,18 @@
           </a:p>
           <a:p>
             <a:pPr algn="just">
+              <a:lnSpc>
+                <a:spcPct val="100000"/>
+              </a:lnSpc>
               <a:buNone/>
             </a:pPr>
             <a:r>
               <a:rPr b="0" lang="en-US" sz="1500" spc="-1" strike="noStrike">
-                <a:latin typeface="Arial"/>
+                <a:solidFill>
+                  <a:srgbClr val="000000"/>
+                </a:solidFill>
+                <a:latin typeface="Arial"/>
+                <a:ea typeface="DejaVu Sans"/>
               </a:rPr>
               <a:t>- That heat kills the elderly and the outdoor poor, pushes street animals and urban wildlife out of their range, and forces air-conditioning demand that burns more carbon — which makes the next summer hotter still.</a:t>
             </a:r>
@@ -4131,11 +4528,18 @@
           </a:p>
           <a:p>
             <a:pPr algn="just">
+              <a:lnSpc>
+                <a:spcPct val="100000"/>
+              </a:lnSpc>
               <a:buNone/>
             </a:pPr>
             <a:r>
               <a:rPr b="0" lang="en-US" sz="1500" spc="-1" strike="noStrike">
-                <a:latin typeface="Arial"/>
+                <a:solidFill>
+                  <a:srgbClr val="000000"/>
+                </a:solidFill>
+                <a:latin typeface="Arial"/>
+                <a:ea typeface="DejaVu Sans"/>
               </a:rPr>
               <a:t>- The barrier is not willingness. It is that nobody can point at one city block and say how bad this one is, and what exactly to do about it.</a:t>
             </a:r>
@@ -4145,6 +4549,9 @@
           </a:p>
           <a:p>
             <a:pPr algn="just">
+              <a:lnSpc>
+                <a:spcPct val="100000"/>
+              </a:lnSpc>
               <a:buNone/>
             </a:pPr>
             <a:endParaRPr b="0" lang="en-US" sz="1800" spc="-1" strike="noStrike">
@@ -4153,11 +4560,18 @@
           </a:p>
           <a:p>
             <a:pPr algn="just">
+              <a:lnSpc>
+                <a:spcPct val="100000"/>
+              </a:lnSpc>
               <a:buNone/>
             </a:pPr>
             <a:r>
               <a:rPr b="1" lang="en-US" sz="1500" spc="-1" strike="noStrike">
-                <a:latin typeface="Arial"/>
+                <a:solidFill>
+                  <a:srgbClr val="000000"/>
+                </a:solidFill>
+                <a:latin typeface="Arial"/>
+                <a:ea typeface="DejaVu Sans"/>
               </a:rPr>
               <a:t>HotSpot Sentinels answers both in about fifteen seconds:</a:t>
             </a:r>
@@ -4167,17 +4581,28 @@
           </a:p>
           <a:p>
             <a:pPr algn="just">
+              <a:lnSpc>
+                <a:spcPct val="100000"/>
+              </a:lnSpc>
               <a:buNone/>
             </a:pPr>
             <a:r>
               <a:rPr b="0" lang="en-US" sz="1500" spc="-1" strike="noStrike">
-                <a:latin typeface="Arial"/>
+                <a:solidFill>
+                  <a:srgbClr val="000000"/>
+                </a:solidFill>
+                <a:latin typeface="Arial"/>
+                <a:ea typeface="DejaVu Sans"/>
               </a:rPr>
               <a:t>  </a:t>
             </a:r>
             <a:r>
               <a:rPr b="0" lang="en-US" sz="1500" spc="-1" strike="noStrike">
-                <a:latin typeface="Arial"/>
+                <a:solidFill>
+                  <a:srgbClr val="000000"/>
+                </a:solidFill>
+                <a:latin typeface="Arial"/>
+                <a:ea typeface="DejaVu Sans"/>
               </a:rPr>
               <a:t>- A 0–10 Heat Vulnerability Index with a risk band</a:t>
             </a:r>
@@ -4187,17 +4612,28 @@
           </a:p>
           <a:p>
             <a:pPr algn="just">
+              <a:lnSpc>
+                <a:spcPct val="100000"/>
+              </a:lnSpc>
               <a:buNone/>
             </a:pPr>
             <a:r>
               <a:rPr b="0" lang="en-US" sz="1500" spc="-1" strike="noStrike">
-                <a:latin typeface="Arial"/>
+                <a:solidFill>
+                  <a:srgbClr val="000000"/>
+                </a:solidFill>
+                <a:latin typeface="Arial"/>
+                <a:ea typeface="DejaVu Sans"/>
               </a:rPr>
               <a:t>  </a:t>
             </a:r>
             <a:r>
               <a:rPr b="0" lang="en-US" sz="1500" spc="-1" strike="noStrike">
-                <a:latin typeface="Arial"/>
+                <a:solidFill>
+                  <a:srgbClr val="000000"/>
+                </a:solidFill>
+                <a:latin typeface="Arial"/>
+                <a:ea typeface="DejaVu Sans"/>
               </a:rPr>
               <a:t>- The surface materials driving that score — asphalt, dark roof, concrete, canopy</a:t>
             </a:r>
@@ -4207,17 +4643,28 @@
           </a:p>
           <a:p>
             <a:pPr algn="just">
+              <a:lnSpc>
+                <a:spcPct val="100000"/>
+              </a:lnSpc>
               <a:buNone/>
             </a:pPr>
             <a:r>
               <a:rPr b="0" lang="en-US" sz="1500" spc="-1" strike="noStrike">
-                <a:latin typeface="Arial"/>
+                <a:solidFill>
+                  <a:srgbClr val="000000"/>
+                </a:solidFill>
+                <a:latin typeface="Arial"/>
+                <a:ea typeface="DejaVu Sans"/>
               </a:rPr>
               <a:t> </a:t>
             </a:r>
             <a:r>
               <a:rPr b="0" lang="en-US" sz="1500" spc="-1" strike="noStrike">
-                <a:latin typeface="Arial"/>
+                <a:solidFill>
+                  <a:srgbClr val="000000"/>
+                </a:solidFill>
+                <a:latin typeface="Arial"/>
+                <a:ea typeface="DejaVu Sans"/>
               </a:rPr>
               <a:t>- A passive-cooling blueprint with quantities: corridor orientation, retroreflective coating in m², projected temperature drop in °C</a:t>
             </a:r>
@@ -4227,11 +4674,18 @@
           </a:p>
           <a:p>
             <a:pPr algn="just">
+              <a:lnSpc>
+                <a:spcPct val="100000"/>
+              </a:lnSpc>
               <a:buNone/>
             </a:pPr>
             <a:r>
               <a:rPr b="0" lang="en-US" sz="1500" spc="-1" strike="noStrike">
-                <a:latin typeface="Arial"/>
+                <a:solidFill>
+                  <a:srgbClr val="000000"/>
+                </a:solidFill>
+                <a:latin typeface="Arial"/>
+                <a:ea typeface="DejaVu Sans"/>
               </a:rPr>
               <a:t>- When a zone scores CRITICAL it publishes a public alert automatically, so residents learn their street is dangerous without needing access to a planning dashboard.</a:t>
             </a:r>
@@ -4279,13 +4733,13 @@
         </p:nvPicPr>
         <p:blipFill>
           <a:blip r:embed="rId1"/>
-          <a:srcRect l="0" t="0" r="0" b="98010"/>
+          <a:srcRect l="0" t="0" r="0" b="98031"/>
           <a:stretch/>
         </p:blipFill>
         <p:spPr>
           <a:xfrm>
             <a:off x="0" y="5093640"/>
-            <a:ext cx="9143640" cy="54000"/>
+            <a:ext cx="9142920" cy="53280"/>
           </a:xfrm>
           <a:prstGeom prst="rect">
             <a:avLst/>
@@ -4308,7 +4762,7 @@
         <p:spPr>
           <a:xfrm>
             <a:off x="0" y="0"/>
-            <a:ext cx="9143640" cy="506880"/>
+            <a:ext cx="9142920" cy="506160"/>
           </a:xfrm>
           <a:prstGeom prst="rect">
             <a:avLst/>
@@ -4327,7 +4781,7 @@
         <p:spPr>
           <a:xfrm>
             <a:off x="-29160" y="5072040"/>
-            <a:ext cx="9173160" cy="97560"/>
+            <a:ext cx="9172440" cy="96840"/>
           </a:xfrm>
           <a:prstGeom prst="rect">
             <a:avLst/>
@@ -4355,7 +4809,7 @@
         <p:spPr>
           <a:xfrm rot="4200">
             <a:off x="264960" y="669240"/>
-            <a:ext cx="8942760" cy="473760"/>
+            <a:ext cx="8942040" cy="473040"/>
           </a:xfrm>
           <a:prstGeom prst="rect">
             <a:avLst/>
@@ -4372,7 +4826,7 @@
           <a:fontRef idx="minor"/>
         </p:style>
         <p:txBody>
-          <a:bodyPr tIns="91440" bIns="91440" anchor="t">
+          <a:bodyPr lIns="90000" rIns="90000" tIns="91440" bIns="91440" anchor="t">
             <a:noAutofit/>
           </a:bodyPr>
           <a:p>
@@ -4445,7 +4899,7 @@
         <p:spPr>
           <a:xfrm>
             <a:off x="228600" y="1086840"/>
-            <a:ext cx="8686800" cy="3713760"/>
+            <a:ext cx="8686080" cy="3713040"/>
           </a:xfrm>
           <a:prstGeom prst="rect">
             <a:avLst/>
@@ -4545,7 +4999,7 @@
                 <a:latin typeface="Google Sans Flex Medium"/>
                 <a:ea typeface="Google Sans Flex Medium"/>
               </a:rPr>
-              <a:t>- The blueprint for one CRITICAL zone projects an 8–10 °C surface temperature drop — the difference between a heatwave that is survivable and one that is not, and a direct cut in cooling energy demand.</a:t>
+              <a:t>- The blueprint for one CRITICAL zone projects an 7–8 °C surface temperature drop — the difference between a heatwave that is survivable and one that is not, and a direct cut in cooling energy demand.</a:t>
             </a:r>
             <a:endParaRPr b="0" lang="en-US" sz="1300" spc="-1" strike="noStrike">
               <a:latin typeface="Arial"/>
@@ -4803,13 +5257,13 @@
         </p:nvPicPr>
         <p:blipFill>
           <a:blip r:embed="rId1"/>
-          <a:srcRect l="0" t="0" r="0" b="98010"/>
+          <a:srcRect l="0" t="0" r="0" b="98031"/>
           <a:stretch/>
         </p:blipFill>
         <p:spPr>
           <a:xfrm>
             <a:off x="0" y="5093640"/>
-            <a:ext cx="9143640" cy="54000"/>
+            <a:ext cx="9142920" cy="53280"/>
           </a:xfrm>
           <a:prstGeom prst="rect">
             <a:avLst/>
@@ -4832,7 +5286,7 @@
         <p:spPr>
           <a:xfrm>
             <a:off x="0" y="0"/>
-            <a:ext cx="9143640" cy="506880"/>
+            <a:ext cx="9142920" cy="506160"/>
           </a:xfrm>
           <a:prstGeom prst="rect">
             <a:avLst/>
@@ -4851,7 +5305,7 @@
         <p:spPr>
           <a:xfrm>
             <a:off x="-29160" y="5072040"/>
-            <a:ext cx="9173160" cy="97560"/>
+            <a:ext cx="9172440" cy="96840"/>
           </a:xfrm>
           <a:prstGeom prst="rect">
             <a:avLst/>
@@ -4879,7 +5333,7 @@
         <p:spPr>
           <a:xfrm>
             <a:off x="265320" y="663840"/>
-            <a:ext cx="8942760" cy="561600"/>
+            <a:ext cx="8942040" cy="560880"/>
           </a:xfrm>
           <a:prstGeom prst="rect">
             <a:avLst/>
@@ -4896,7 +5350,7 @@
           <a:fontRef idx="minor"/>
         </p:style>
         <p:txBody>
-          <a:bodyPr tIns="91440" bIns="91440" anchor="t">
+          <a:bodyPr lIns="90000" rIns="90000" tIns="91440" bIns="91440" anchor="t">
             <a:noAutofit/>
           </a:bodyPr>
           <a:p>
@@ -4919,7 +5373,7 @@
               </a:rPr>
               <a:t>List of features offered by the solution</a:t>
             </a:r>
-            <a:endParaRPr b="1" lang="en-US" sz="1600" spc="-1" strike="noStrike">
+            <a:endParaRPr b="0" lang="en-US" sz="1600" spc="-1" strike="noStrike">
               <a:latin typeface="Arial"/>
             </a:endParaRPr>
           </a:p>
@@ -4938,7 +5392,7 @@
         <p:spPr>
           <a:xfrm>
             <a:off x="228600" y="1186200"/>
-            <a:ext cx="8686800" cy="3597120"/>
+            <a:ext cx="8686080" cy="3596400"/>
           </a:xfrm>
           <a:prstGeom prst="rect">
             <a:avLst/>
@@ -4954,6 +5408,9 @@
           </a:bodyPr>
           <a:p>
             <a:pPr algn="just">
+              <a:lnSpc>
+                <a:spcPct val="100000"/>
+              </a:lnSpc>
               <a:buNone/>
             </a:pPr>
             <a:endParaRPr b="0" lang="en-US" sz="1300" spc="-1" strike="noStrike">
@@ -4962,6 +5419,9 @@
           </a:p>
           <a:p>
             <a:pPr algn="just">
+              <a:lnSpc>
+                <a:spcPct val="100000"/>
+              </a:lnSpc>
               <a:buNone/>
             </a:pPr>
             <a:r>
@@ -4976,6 +5436,9 @@
           </a:p>
           <a:p>
             <a:pPr algn="just">
+              <a:lnSpc>
+                <a:spcPct val="100000"/>
+              </a:lnSpc>
               <a:buNone/>
             </a:pPr>
             <a:endParaRPr b="0" lang="en-US" sz="1300" spc="-1" strike="noStrike">
@@ -4984,6 +5447,9 @@
           </a:p>
           <a:p>
             <a:pPr algn="just">
+              <a:lnSpc>
+                <a:spcPct val="100000"/>
+              </a:lnSpc>
               <a:buNone/>
             </a:pPr>
             <a:r>
@@ -5004,6 +5470,9 @@
           </a:p>
           <a:p>
             <a:pPr algn="just">
+              <a:lnSpc>
+                <a:spcPct val="100000"/>
+              </a:lnSpc>
               <a:buNone/>
             </a:pPr>
             <a:r>
@@ -5024,6 +5493,9 @@
           </a:p>
           <a:p>
             <a:pPr algn="just">
+              <a:lnSpc>
+                <a:spcPct val="100000"/>
+              </a:lnSpc>
               <a:buNone/>
             </a:pPr>
             <a:r>
@@ -5044,6 +5516,9 @@
           </a:p>
           <a:p>
             <a:pPr algn="just">
+              <a:lnSpc>
+                <a:spcPct val="100000"/>
+              </a:lnSpc>
               <a:buNone/>
             </a:pPr>
             <a:r>
@@ -5064,6 +5539,9 @@
           </a:p>
           <a:p>
             <a:pPr algn="just">
+              <a:lnSpc>
+                <a:spcPct val="100000"/>
+              </a:lnSpc>
               <a:buNone/>
             </a:pPr>
             <a:endParaRPr b="0" lang="en-US" sz="3200" spc="-1" strike="noStrike">
@@ -5072,6 +5550,9 @@
           </a:p>
           <a:p>
             <a:pPr algn="just">
+              <a:lnSpc>
+                <a:spcPct val="100000"/>
+              </a:lnSpc>
               <a:buNone/>
             </a:pPr>
             <a:r>
@@ -5086,6 +5567,9 @@
           </a:p>
           <a:p>
             <a:pPr algn="just">
+              <a:lnSpc>
+                <a:spcPct val="100000"/>
+              </a:lnSpc>
               <a:buNone/>
             </a:pPr>
             <a:endParaRPr b="0" lang="en-US" sz="1300" spc="-1" strike="noStrike">
@@ -5094,6 +5578,9 @@
           </a:p>
           <a:p>
             <a:pPr algn="just">
+              <a:lnSpc>
+                <a:spcPct val="100000"/>
+              </a:lnSpc>
               <a:buNone/>
             </a:pPr>
             <a:r>
@@ -5114,6 +5601,9 @@
           </a:p>
           <a:p>
             <a:pPr algn="just">
+              <a:lnSpc>
+                <a:spcPct val="100000"/>
+              </a:lnSpc>
               <a:buNone/>
             </a:pPr>
             <a:r>
@@ -5134,6 +5624,9 @@
           </a:p>
           <a:p>
             <a:pPr algn="just">
+              <a:lnSpc>
+                <a:spcPct val="100000"/>
+              </a:lnSpc>
               <a:buNone/>
             </a:pPr>
             <a:r>
@@ -5154,6 +5647,9 @@
           </a:p>
           <a:p>
             <a:pPr algn="just">
+              <a:lnSpc>
+                <a:spcPct val="100000"/>
+              </a:lnSpc>
               <a:buNone/>
             </a:pPr>
             <a:r>
@@ -5174,6 +5670,9 @@
           </a:p>
           <a:p>
             <a:pPr algn="just">
+              <a:lnSpc>
+                <a:spcPct val="100000"/>
+              </a:lnSpc>
               <a:buNone/>
             </a:pPr>
             <a:r>
@@ -5232,13 +5731,13 @@
         </p:nvPicPr>
         <p:blipFill>
           <a:blip r:embed="rId1"/>
-          <a:srcRect l="0" t="0" r="0" b="98010"/>
+          <a:srcRect l="0" t="0" r="0" b="98031"/>
           <a:stretch/>
         </p:blipFill>
         <p:spPr>
           <a:xfrm>
             <a:off x="0" y="5093640"/>
-            <a:ext cx="9143640" cy="54000"/>
+            <a:ext cx="9142920" cy="53280"/>
           </a:xfrm>
           <a:prstGeom prst="rect">
             <a:avLst/>
@@ -5261,7 +5760,7 @@
         <p:spPr>
           <a:xfrm>
             <a:off x="0" y="0"/>
-            <a:ext cx="9143640" cy="506880"/>
+            <a:ext cx="9142920" cy="506160"/>
           </a:xfrm>
           <a:prstGeom prst="rect">
             <a:avLst/>
@@ -5280,7 +5779,7 @@
         <p:spPr>
           <a:xfrm>
             <a:off x="-29160" y="5072040"/>
-            <a:ext cx="9173160" cy="97560"/>
+            <a:ext cx="9172440" cy="96840"/>
           </a:xfrm>
           <a:prstGeom prst="rect">
             <a:avLst/>
@@ -5308,7 +5807,7 @@
         <p:spPr>
           <a:xfrm>
             <a:off x="265320" y="663840"/>
-            <a:ext cx="8942760" cy="561600"/>
+            <a:ext cx="8942040" cy="560880"/>
           </a:xfrm>
           <a:prstGeom prst="rect">
             <a:avLst/>
@@ -5325,7 +5824,7 @@
           <a:fontRef idx="minor"/>
         </p:style>
         <p:txBody>
-          <a:bodyPr tIns="91440" bIns="91440" anchor="t">
+          <a:bodyPr lIns="90000" rIns="90000" tIns="91440" bIns="91440" anchor="t">
             <a:noAutofit/>
           </a:bodyPr>
           <a:p>
@@ -5348,7 +5847,7 @@
               </a:rPr>
               <a:t>List of features offered by the solution (continued)</a:t>
             </a:r>
-            <a:endParaRPr b="1" lang="en-US" sz="1600" spc="-1" strike="noStrike">
+            <a:endParaRPr b="0" lang="en-US" sz="1600" spc="-1" strike="noStrike">
               <a:latin typeface="Arial"/>
             </a:endParaRPr>
           </a:p>
@@ -5367,7 +5866,7 @@
         <p:spPr>
           <a:xfrm>
             <a:off x="228600" y="1180800"/>
-            <a:ext cx="8686800" cy="3597120"/>
+            <a:ext cx="8686080" cy="3596400"/>
           </a:xfrm>
           <a:prstGeom prst="rect">
             <a:avLst/>
@@ -5383,97 +5882,124 @@
           </a:bodyPr>
           <a:p>
             <a:pPr algn="just">
+              <a:lnSpc>
+                <a:spcPct val="100000"/>
+              </a:lnSpc>
               <a:buNone/>
             </a:pPr>
             <a:r>
               <a:rPr b="1" lang="en-US" sz="1600" spc="-1" strike="noStrike">
                 <a:latin typeface="Arial"/>
               </a:rPr>
-              <a:t>R</a:t>
-            </a:r>
+              <a:t>Reaching people</a:t>
+            </a:r>
+            <a:endParaRPr b="0" lang="en-US" sz="1600" spc="-1" strike="noStrike">
+              <a:latin typeface="Arial"/>
+            </a:endParaRPr>
+          </a:p>
+          <a:p>
+            <a:pPr algn="just">
+              <a:lnSpc>
+                <a:spcPct val="100000"/>
+              </a:lnSpc>
+              <a:buNone/>
+            </a:pPr>
+            <a:endParaRPr b="0" lang="en-US" sz="1600" spc="-1" strike="noStrike">
+              <a:latin typeface="Arial"/>
+            </a:endParaRPr>
+          </a:p>
+          <a:p>
+            <a:pPr algn="just">
+              <a:lnSpc>
+                <a:spcPct val="100000"/>
+              </a:lnSpc>
+              <a:buNone/>
+            </a:pPr>
+            <a:r>
+              <a:rPr b="0" lang="en-US" sz="1600" spc="-1" strike="noStrike">
+                <a:latin typeface="Arial"/>
+              </a:rPr>
+              <a:t>  </a:t>
+            </a:r>
+            <a:r>
+              <a:rPr b="0" lang="en-US" sz="1600" spc="-1" strike="noStrike">
+                <a:latin typeface="Arial"/>
+              </a:rPr>
+              <a:t>- Automatic Pub/Sub alert the moment a zone is CRITICAL</a:t>
+            </a:r>
+            <a:endParaRPr b="0" lang="en-US" sz="1600" spc="-1" strike="noStrike">
+              <a:latin typeface="Arial"/>
+            </a:endParaRPr>
+          </a:p>
+          <a:p>
+            <a:pPr algn="just">
+              <a:lnSpc>
+                <a:spcPct val="100000"/>
+              </a:lnSpc>
+              <a:buNone/>
+            </a:pPr>
+            <a:r>
+              <a:rPr b="0" lang="en-US" sz="1600" spc="-1" strike="noStrike">
+                <a:latin typeface="Arial"/>
+              </a:rPr>
+              <a:t>  </a:t>
+            </a:r>
+            <a:r>
+              <a:rPr b="0" lang="en-US" sz="1600" spc="-1" strike="noStrike">
+                <a:latin typeface="Arial"/>
+              </a:rPr>
+              <a:t>- Public alert wall on Firebase Hosting — citizens see critical zones appear live, while operator scan data stays private</a:t>
+            </a:r>
+            <a:endParaRPr b="0" lang="en-US" sz="1600" spc="-1" strike="noStrike">
+              <a:latin typeface="Arial"/>
+            </a:endParaRPr>
+          </a:p>
+          <a:p>
+            <a:pPr algn="just">
+              <a:lnSpc>
+                <a:spcPct val="100000"/>
+              </a:lnSpc>
+              <a:buNone/>
+            </a:pPr>
+            <a:r>
+              <a:rPr b="0" lang="en-US" sz="1600" spc="-1" strike="noStrike">
+                <a:latin typeface="Arial"/>
+              </a:rPr>
+              <a:t>  </a:t>
+            </a:r>
+            <a:r>
+              <a:rPr b="0" lang="en-US" sz="1600" spc="-1" strike="noStrike">
+                <a:latin typeface="Arial"/>
+              </a:rPr>
+              <a:t>- City-wide map of every analyzed zone colored by risk: a retrofit queue ordered worst-first</a:t>
+            </a:r>
+            <a:endParaRPr b="0" lang="en-US" sz="1600" spc="-1" strike="noStrike">
+              <a:latin typeface="Arial"/>
+            </a:endParaRPr>
+          </a:p>
+          <a:p>
+            <a:pPr algn="just">
+              <a:lnSpc>
+                <a:spcPct val="100000"/>
+              </a:lnSpc>
+              <a:buNone/>
+            </a:pPr>
+            <a:endParaRPr b="0" lang="en-US" sz="3200" spc="-1" strike="noStrike">
+              <a:latin typeface="Arial"/>
+            </a:endParaRPr>
+          </a:p>
+          <a:p>
+            <a:pPr algn="just">
+              <a:lnSpc>
+                <a:spcPct val="100000"/>
+              </a:lnSpc>
+              <a:buNone/>
+            </a:pPr>
             <a:r>
               <a:rPr b="1" lang="en-US" sz="1600" spc="-1" strike="noStrike">
                 <a:latin typeface="Arial"/>
               </a:rPr>
-              <a:t>e</a:t>
-            </a:r>
-            <a:r>
-              <a:rPr b="1" lang="en-US" sz="1600" spc="-1" strike="noStrike">
-                <a:latin typeface="Arial"/>
-              </a:rPr>
-              <a:t>a</a:t>
-            </a:r>
-            <a:r>
-              <a:rPr b="1" lang="en-US" sz="1600" spc="-1" strike="noStrike">
-                <a:latin typeface="Arial"/>
-              </a:rPr>
-              <a:t>c</a:t>
-            </a:r>
-            <a:r>
-              <a:rPr b="1" lang="en-US" sz="1600" spc="-1" strike="noStrike">
-                <a:latin typeface="Arial"/>
-              </a:rPr>
-              <a:t>h</a:t>
-            </a:r>
-            <a:r>
-              <a:rPr b="1" lang="en-US" sz="1600" spc="-1" strike="noStrike">
-                <a:latin typeface="Arial"/>
-              </a:rPr>
-              <a:t>i</a:t>
-            </a:r>
-            <a:r>
-              <a:rPr b="1" lang="en-US" sz="1600" spc="-1" strike="noStrike">
-                <a:latin typeface="Arial"/>
-              </a:rPr>
-              <a:t>n</a:t>
-            </a:r>
-            <a:r>
-              <a:rPr b="1" lang="en-US" sz="1600" spc="-1" strike="noStrike">
-                <a:latin typeface="Arial"/>
-              </a:rPr>
-              <a:t>g</a:t>
-            </a:r>
-            <a:r>
-              <a:rPr b="1" lang="en-US" sz="1600" spc="-1" strike="noStrike">
-                <a:latin typeface="Arial"/>
-              </a:rPr>
-              <a:t> </a:t>
-            </a:r>
-            <a:r>
-              <a:rPr b="1" lang="en-US" sz="1600" spc="-1" strike="noStrike">
-                <a:latin typeface="Arial"/>
-              </a:rPr>
-              <a:t>p</a:t>
-            </a:r>
-            <a:r>
-              <a:rPr b="1" lang="en-US" sz="1600" spc="-1" strike="noStrike">
-                <a:latin typeface="Arial"/>
-              </a:rPr>
-              <a:t>e</a:t>
-            </a:r>
-            <a:r>
-              <a:rPr b="1" lang="en-US" sz="1600" spc="-1" strike="noStrike">
-                <a:latin typeface="Arial"/>
-              </a:rPr>
-              <a:t>o</a:t>
-            </a:r>
-            <a:r>
-              <a:rPr b="1" lang="en-US" sz="1600" spc="-1" strike="noStrike">
-                <a:latin typeface="Arial"/>
-              </a:rPr>
-              <a:t>p</a:t>
-            </a:r>
-            <a:r>
-              <a:rPr b="1" lang="en-US" sz="1600" spc="-1" strike="noStrike">
-                <a:latin typeface="Arial"/>
-              </a:rPr>
-              <a:t>l</a:t>
-            </a:r>
-            <a:r>
-              <a:rPr b="1" lang="en-US" sz="1600" spc="-1" strike="noStrike">
-                <a:latin typeface="Arial"/>
-              </a:rPr>
-              <a:t>e</a:t>
+              <a:t>Trustworthiness</a:t>
             </a:r>
             <a:endParaRPr b="0" lang="en-US" sz="1600" spc="-1" strike="noStrike">
               <a:latin typeface="Arial"/>
@@ -5481,6 +6007,9 @@
           </a:p>
           <a:p>
             <a:pPr algn="just">
+              <a:lnSpc>
+                <a:spcPct val="100000"/>
+              </a:lnSpc>
               <a:buNone/>
             </a:pPr>
             <a:endParaRPr b="0" lang="en-US" sz="1600" spc="-1" strike="noStrike">
@@ -5489,2949 +6018,45 @@
           </a:p>
           <a:p>
             <a:pPr algn="just">
+              <a:lnSpc>
+                <a:spcPct val="100000"/>
+              </a:lnSpc>
               <a:buNone/>
             </a:pPr>
             <a:r>
               <a:rPr b="0" lang="en-US" sz="1600" spc="-1" strike="noStrike">
                 <a:latin typeface="Arial"/>
               </a:rPr>
-              <a:t> </a:t>
+              <a:t>  </a:t>
             </a:r>
             <a:r>
               <a:rPr b="0" lang="en-US" sz="1600" spc="-1" strike="noStrike">
                 <a:latin typeface="Arial"/>
               </a:rPr>
-              <a:t> </a:t>
-            </a:r>
+              <a:t>- Every identity field is labelled supplied or inferred, so a planner knows which numbers the model guessed</a:t>
+            </a:r>
+            <a:endParaRPr b="0" lang="en-US" sz="1600" spc="-1" strike="noStrike">
+              <a:latin typeface="Arial"/>
+            </a:endParaRPr>
+          </a:p>
+          <a:p>
+            <a:pPr algn="just">
+              <a:lnSpc>
+                <a:spcPct val="100000"/>
+              </a:lnSpc>
+              <a:buNone/>
+            </a:pPr>
             <a:r>
               <a:rPr b="0" lang="en-US" sz="1600" spc="-1" strike="noStrike">
                 <a:latin typeface="Arial"/>
               </a:rPr>
-              <a:t>-</a:t>
+              <a:t>  </a:t>
             </a:r>
             <a:r>
               <a:rPr b="0" lang="en-US" sz="1600" spc="-1" strike="noStrike">
                 <a:latin typeface="Arial"/>
               </a:rPr>
-              <a:t> </a:t>
-            </a:r>
-            <a:r>
-              <a:rPr b="0" lang="en-US" sz="1600" spc="-1" strike="noStrike">
-                <a:latin typeface="Arial"/>
-              </a:rPr>
-              <a:t>A</a:t>
-            </a:r>
-            <a:r>
-              <a:rPr b="0" lang="en-US" sz="1600" spc="-1" strike="noStrike">
-                <a:latin typeface="Arial"/>
-              </a:rPr>
-              <a:t>u</a:t>
-            </a:r>
-            <a:r>
-              <a:rPr b="0" lang="en-US" sz="1600" spc="-1" strike="noStrike">
-                <a:latin typeface="Arial"/>
-              </a:rPr>
-              <a:t>t</a:t>
-            </a:r>
-            <a:r>
-              <a:rPr b="0" lang="en-US" sz="1600" spc="-1" strike="noStrike">
-                <a:latin typeface="Arial"/>
-              </a:rPr>
-              <a:t>o</a:t>
-            </a:r>
-            <a:r>
-              <a:rPr b="0" lang="en-US" sz="1600" spc="-1" strike="noStrike">
-                <a:latin typeface="Arial"/>
-              </a:rPr>
-              <a:t>m</a:t>
-            </a:r>
-            <a:r>
-              <a:rPr b="0" lang="en-US" sz="1600" spc="-1" strike="noStrike">
-                <a:latin typeface="Arial"/>
-              </a:rPr>
-              <a:t>a</a:t>
-            </a:r>
-            <a:r>
-              <a:rPr b="0" lang="en-US" sz="1600" spc="-1" strike="noStrike">
-                <a:latin typeface="Arial"/>
-              </a:rPr>
-              <a:t>t</a:t>
-            </a:r>
-            <a:r>
-              <a:rPr b="0" lang="en-US" sz="1600" spc="-1" strike="noStrike">
-                <a:latin typeface="Arial"/>
-              </a:rPr>
-              <a:t>i</a:t>
-            </a:r>
-            <a:r>
-              <a:rPr b="0" lang="en-US" sz="1600" spc="-1" strike="noStrike">
-                <a:latin typeface="Arial"/>
-              </a:rPr>
-              <a:t>c</a:t>
-            </a:r>
-            <a:r>
-              <a:rPr b="0" lang="en-US" sz="1600" spc="-1" strike="noStrike">
-                <a:latin typeface="Arial"/>
-              </a:rPr>
-              <a:t> </a:t>
-            </a:r>
-            <a:r>
-              <a:rPr b="0" lang="en-US" sz="1600" spc="-1" strike="noStrike">
-                <a:latin typeface="Arial"/>
-              </a:rPr>
-              <a:t>P</a:t>
-            </a:r>
-            <a:r>
-              <a:rPr b="0" lang="en-US" sz="1600" spc="-1" strike="noStrike">
-                <a:latin typeface="Arial"/>
-              </a:rPr>
-              <a:t>u</a:t>
-            </a:r>
-            <a:r>
-              <a:rPr b="0" lang="en-US" sz="1600" spc="-1" strike="noStrike">
-                <a:latin typeface="Arial"/>
-              </a:rPr>
-              <a:t>b</a:t>
-            </a:r>
-            <a:r>
-              <a:rPr b="0" lang="en-US" sz="1600" spc="-1" strike="noStrike">
-                <a:latin typeface="Arial"/>
-              </a:rPr>
-              <a:t>/</a:t>
-            </a:r>
-            <a:r>
-              <a:rPr b="0" lang="en-US" sz="1600" spc="-1" strike="noStrike">
-                <a:latin typeface="Arial"/>
-              </a:rPr>
-              <a:t>S</a:t>
-            </a:r>
-            <a:r>
-              <a:rPr b="0" lang="en-US" sz="1600" spc="-1" strike="noStrike">
-                <a:latin typeface="Arial"/>
-              </a:rPr>
-              <a:t>u</a:t>
-            </a:r>
-            <a:r>
-              <a:rPr b="0" lang="en-US" sz="1600" spc="-1" strike="noStrike">
-                <a:latin typeface="Arial"/>
-              </a:rPr>
-              <a:t>b</a:t>
-            </a:r>
-            <a:r>
-              <a:rPr b="0" lang="en-US" sz="1600" spc="-1" strike="noStrike">
-                <a:latin typeface="Arial"/>
-              </a:rPr>
-              <a:t> </a:t>
-            </a:r>
-            <a:r>
-              <a:rPr b="0" lang="en-US" sz="1600" spc="-1" strike="noStrike">
-                <a:latin typeface="Arial"/>
-              </a:rPr>
-              <a:t>a</a:t>
-            </a:r>
-            <a:r>
-              <a:rPr b="0" lang="en-US" sz="1600" spc="-1" strike="noStrike">
-                <a:latin typeface="Arial"/>
-              </a:rPr>
-              <a:t>l</a:t>
-            </a:r>
-            <a:r>
-              <a:rPr b="0" lang="en-US" sz="1600" spc="-1" strike="noStrike">
-                <a:latin typeface="Arial"/>
-              </a:rPr>
-              <a:t>e</a:t>
-            </a:r>
-            <a:r>
-              <a:rPr b="0" lang="en-US" sz="1600" spc="-1" strike="noStrike">
-                <a:latin typeface="Arial"/>
-              </a:rPr>
-              <a:t>r</a:t>
-            </a:r>
-            <a:r>
-              <a:rPr b="0" lang="en-US" sz="1600" spc="-1" strike="noStrike">
-                <a:latin typeface="Arial"/>
-              </a:rPr>
-              <a:t>t</a:t>
-            </a:r>
-            <a:r>
-              <a:rPr b="0" lang="en-US" sz="1600" spc="-1" strike="noStrike">
-                <a:latin typeface="Arial"/>
-              </a:rPr>
-              <a:t> </a:t>
-            </a:r>
-            <a:r>
-              <a:rPr b="0" lang="en-US" sz="1600" spc="-1" strike="noStrike">
-                <a:latin typeface="Arial"/>
-              </a:rPr>
-              <a:t>t</a:t>
-            </a:r>
-            <a:r>
-              <a:rPr b="0" lang="en-US" sz="1600" spc="-1" strike="noStrike">
-                <a:latin typeface="Arial"/>
-              </a:rPr>
-              <a:t>h</a:t>
-            </a:r>
-            <a:r>
-              <a:rPr b="0" lang="en-US" sz="1600" spc="-1" strike="noStrike">
-                <a:latin typeface="Arial"/>
-              </a:rPr>
-              <a:t>e</a:t>
-            </a:r>
-            <a:r>
-              <a:rPr b="0" lang="en-US" sz="1600" spc="-1" strike="noStrike">
-                <a:latin typeface="Arial"/>
-              </a:rPr>
-              <a:t> </a:t>
-            </a:r>
-            <a:r>
-              <a:rPr b="0" lang="en-US" sz="1600" spc="-1" strike="noStrike">
-                <a:latin typeface="Arial"/>
-              </a:rPr>
-              <a:t>m</a:t>
-            </a:r>
-            <a:r>
-              <a:rPr b="0" lang="en-US" sz="1600" spc="-1" strike="noStrike">
-                <a:latin typeface="Arial"/>
-              </a:rPr>
-              <a:t>o</a:t>
-            </a:r>
-            <a:r>
-              <a:rPr b="0" lang="en-US" sz="1600" spc="-1" strike="noStrike">
-                <a:latin typeface="Arial"/>
-              </a:rPr>
-              <a:t>m</a:t>
-            </a:r>
-            <a:r>
-              <a:rPr b="0" lang="en-US" sz="1600" spc="-1" strike="noStrike">
-                <a:latin typeface="Arial"/>
-              </a:rPr>
-              <a:t>e</a:t>
-            </a:r>
-            <a:r>
-              <a:rPr b="0" lang="en-US" sz="1600" spc="-1" strike="noStrike">
-                <a:latin typeface="Arial"/>
-              </a:rPr>
-              <a:t>n</a:t>
-            </a:r>
-            <a:r>
-              <a:rPr b="0" lang="en-US" sz="1600" spc="-1" strike="noStrike">
-                <a:latin typeface="Arial"/>
-              </a:rPr>
-              <a:t>t</a:t>
-            </a:r>
-            <a:r>
-              <a:rPr b="0" lang="en-US" sz="1600" spc="-1" strike="noStrike">
-                <a:latin typeface="Arial"/>
-              </a:rPr>
-              <a:t> </a:t>
-            </a:r>
-            <a:r>
-              <a:rPr b="0" lang="en-US" sz="1600" spc="-1" strike="noStrike">
-                <a:latin typeface="Arial"/>
-              </a:rPr>
-              <a:t>a</a:t>
-            </a:r>
-            <a:r>
-              <a:rPr b="0" lang="en-US" sz="1600" spc="-1" strike="noStrike">
-                <a:latin typeface="Arial"/>
-              </a:rPr>
-              <a:t> </a:t>
-            </a:r>
-            <a:r>
-              <a:rPr b="0" lang="en-US" sz="1600" spc="-1" strike="noStrike">
-                <a:latin typeface="Arial"/>
-              </a:rPr>
-              <a:t>z</a:t>
-            </a:r>
-            <a:r>
-              <a:rPr b="0" lang="en-US" sz="1600" spc="-1" strike="noStrike">
-                <a:latin typeface="Arial"/>
-              </a:rPr>
-              <a:t>o</a:t>
-            </a:r>
-            <a:r>
-              <a:rPr b="0" lang="en-US" sz="1600" spc="-1" strike="noStrike">
-                <a:latin typeface="Arial"/>
-              </a:rPr>
-              <a:t>n</a:t>
-            </a:r>
-            <a:r>
-              <a:rPr b="0" lang="en-US" sz="1600" spc="-1" strike="noStrike">
-                <a:latin typeface="Arial"/>
-              </a:rPr>
-              <a:t>e</a:t>
-            </a:r>
-            <a:r>
-              <a:rPr b="0" lang="en-US" sz="1600" spc="-1" strike="noStrike">
-                <a:latin typeface="Arial"/>
-              </a:rPr>
-              <a:t> </a:t>
-            </a:r>
-            <a:r>
-              <a:rPr b="0" lang="en-US" sz="1600" spc="-1" strike="noStrike">
-                <a:latin typeface="Arial"/>
-              </a:rPr>
-              <a:t>i</a:t>
-            </a:r>
-            <a:r>
-              <a:rPr b="0" lang="en-US" sz="1600" spc="-1" strike="noStrike">
-                <a:latin typeface="Arial"/>
-              </a:rPr>
-              <a:t>s</a:t>
-            </a:r>
-            <a:r>
-              <a:rPr b="0" lang="en-US" sz="1600" spc="-1" strike="noStrike">
-                <a:latin typeface="Arial"/>
-              </a:rPr>
-              <a:t> </a:t>
-            </a:r>
-            <a:r>
-              <a:rPr b="0" lang="en-US" sz="1600" spc="-1" strike="noStrike">
-                <a:latin typeface="Arial"/>
-              </a:rPr>
-              <a:t>C</a:t>
-            </a:r>
-            <a:r>
-              <a:rPr b="0" lang="en-US" sz="1600" spc="-1" strike="noStrike">
-                <a:latin typeface="Arial"/>
-              </a:rPr>
-              <a:t>R</a:t>
-            </a:r>
-            <a:r>
-              <a:rPr b="0" lang="en-US" sz="1600" spc="-1" strike="noStrike">
-                <a:latin typeface="Arial"/>
-              </a:rPr>
-              <a:t>I</a:t>
-            </a:r>
-            <a:r>
-              <a:rPr b="0" lang="en-US" sz="1600" spc="-1" strike="noStrike">
-                <a:latin typeface="Arial"/>
-              </a:rPr>
-              <a:t>T</a:t>
-            </a:r>
-            <a:r>
-              <a:rPr b="0" lang="en-US" sz="1600" spc="-1" strike="noStrike">
-                <a:latin typeface="Arial"/>
-              </a:rPr>
-              <a:t>I</a:t>
-            </a:r>
-            <a:r>
-              <a:rPr b="0" lang="en-US" sz="1600" spc="-1" strike="noStrike">
-                <a:latin typeface="Arial"/>
-              </a:rPr>
-              <a:t>C</a:t>
-            </a:r>
-            <a:r>
-              <a:rPr b="0" lang="en-US" sz="1600" spc="-1" strike="noStrike">
-                <a:latin typeface="Arial"/>
-              </a:rPr>
-              <a:t>A</a:t>
-            </a:r>
-            <a:r>
-              <a:rPr b="0" lang="en-US" sz="1600" spc="-1" strike="noStrike">
-                <a:latin typeface="Arial"/>
-              </a:rPr>
-              <a:t>L</a:t>
-            </a:r>
-            <a:endParaRPr b="0" lang="en-US" sz="1600" spc="-1" strike="noStrike">
-              <a:latin typeface="Arial"/>
-            </a:endParaRPr>
-          </a:p>
-          <a:p>
-            <a:pPr algn="just">
-              <a:buNone/>
-            </a:pPr>
-            <a:r>
-              <a:rPr b="0" lang="en-US" sz="1600" spc="-1" strike="noStrike">
-                <a:latin typeface="Arial"/>
-              </a:rPr>
-              <a:t> </a:t>
-            </a:r>
-            <a:r>
-              <a:rPr b="0" lang="en-US" sz="1600" spc="-1" strike="noStrike">
-                <a:latin typeface="Arial"/>
-              </a:rPr>
-              <a:t> </a:t>
-            </a:r>
-            <a:r>
-              <a:rPr b="0" lang="en-US" sz="1600" spc="-1" strike="noStrike">
-                <a:latin typeface="Arial"/>
-              </a:rPr>
-              <a:t>-</a:t>
-            </a:r>
-            <a:r>
-              <a:rPr b="0" lang="en-US" sz="1600" spc="-1" strike="noStrike">
-                <a:latin typeface="Arial"/>
-              </a:rPr>
-              <a:t> </a:t>
-            </a:r>
-            <a:r>
-              <a:rPr b="0" lang="en-US" sz="1600" spc="-1" strike="noStrike">
-                <a:latin typeface="Arial"/>
-              </a:rPr>
-              <a:t>P</a:t>
-            </a:r>
-            <a:r>
-              <a:rPr b="0" lang="en-US" sz="1600" spc="-1" strike="noStrike">
-                <a:latin typeface="Arial"/>
-              </a:rPr>
-              <a:t>u</a:t>
-            </a:r>
-            <a:r>
-              <a:rPr b="0" lang="en-US" sz="1600" spc="-1" strike="noStrike">
-                <a:latin typeface="Arial"/>
-              </a:rPr>
-              <a:t>b</a:t>
-            </a:r>
-            <a:r>
-              <a:rPr b="0" lang="en-US" sz="1600" spc="-1" strike="noStrike">
-                <a:latin typeface="Arial"/>
-              </a:rPr>
-              <a:t>l</a:t>
-            </a:r>
-            <a:r>
-              <a:rPr b="0" lang="en-US" sz="1600" spc="-1" strike="noStrike">
-                <a:latin typeface="Arial"/>
-              </a:rPr>
-              <a:t>i</a:t>
-            </a:r>
-            <a:r>
-              <a:rPr b="0" lang="en-US" sz="1600" spc="-1" strike="noStrike">
-                <a:latin typeface="Arial"/>
-              </a:rPr>
-              <a:t>c</a:t>
-            </a:r>
-            <a:r>
-              <a:rPr b="0" lang="en-US" sz="1600" spc="-1" strike="noStrike">
-                <a:latin typeface="Arial"/>
-              </a:rPr>
-              <a:t> </a:t>
-            </a:r>
-            <a:r>
-              <a:rPr b="0" lang="en-US" sz="1600" spc="-1" strike="noStrike">
-                <a:latin typeface="Arial"/>
-              </a:rPr>
-              <a:t>a</a:t>
-            </a:r>
-            <a:r>
-              <a:rPr b="0" lang="en-US" sz="1600" spc="-1" strike="noStrike">
-                <a:latin typeface="Arial"/>
-              </a:rPr>
-              <a:t>l</a:t>
-            </a:r>
-            <a:r>
-              <a:rPr b="0" lang="en-US" sz="1600" spc="-1" strike="noStrike">
-                <a:latin typeface="Arial"/>
-              </a:rPr>
-              <a:t>e</a:t>
-            </a:r>
-            <a:r>
-              <a:rPr b="0" lang="en-US" sz="1600" spc="-1" strike="noStrike">
-                <a:latin typeface="Arial"/>
-              </a:rPr>
-              <a:t>r</a:t>
-            </a:r>
-            <a:r>
-              <a:rPr b="0" lang="en-US" sz="1600" spc="-1" strike="noStrike">
-                <a:latin typeface="Arial"/>
-              </a:rPr>
-              <a:t>t</a:t>
-            </a:r>
-            <a:r>
-              <a:rPr b="0" lang="en-US" sz="1600" spc="-1" strike="noStrike">
-                <a:latin typeface="Arial"/>
-              </a:rPr>
-              <a:t> </a:t>
-            </a:r>
-            <a:r>
-              <a:rPr b="0" lang="en-US" sz="1600" spc="-1" strike="noStrike">
-                <a:latin typeface="Arial"/>
-              </a:rPr>
-              <a:t>w</a:t>
-            </a:r>
-            <a:r>
-              <a:rPr b="0" lang="en-US" sz="1600" spc="-1" strike="noStrike">
-                <a:latin typeface="Arial"/>
-              </a:rPr>
-              <a:t>a</a:t>
-            </a:r>
-            <a:r>
-              <a:rPr b="0" lang="en-US" sz="1600" spc="-1" strike="noStrike">
-                <a:latin typeface="Arial"/>
-              </a:rPr>
-              <a:t>l</a:t>
-            </a:r>
-            <a:r>
-              <a:rPr b="0" lang="en-US" sz="1600" spc="-1" strike="noStrike">
-                <a:latin typeface="Arial"/>
-              </a:rPr>
-              <a:t>l</a:t>
-            </a:r>
-            <a:r>
-              <a:rPr b="0" lang="en-US" sz="1600" spc="-1" strike="noStrike">
-                <a:latin typeface="Arial"/>
-              </a:rPr>
-              <a:t> </a:t>
-            </a:r>
-            <a:r>
-              <a:rPr b="0" lang="en-US" sz="1600" spc="-1" strike="noStrike">
-                <a:latin typeface="Arial"/>
-              </a:rPr>
-              <a:t>o</a:t>
-            </a:r>
-            <a:r>
-              <a:rPr b="0" lang="en-US" sz="1600" spc="-1" strike="noStrike">
-                <a:latin typeface="Arial"/>
-              </a:rPr>
-              <a:t>n</a:t>
-            </a:r>
-            <a:r>
-              <a:rPr b="0" lang="en-US" sz="1600" spc="-1" strike="noStrike">
-                <a:latin typeface="Arial"/>
-              </a:rPr>
-              <a:t> </a:t>
-            </a:r>
-            <a:r>
-              <a:rPr b="0" lang="en-US" sz="1600" spc="-1" strike="noStrike">
-                <a:latin typeface="Arial"/>
-              </a:rPr>
-              <a:t>F</a:t>
-            </a:r>
-            <a:r>
-              <a:rPr b="0" lang="en-US" sz="1600" spc="-1" strike="noStrike">
-                <a:latin typeface="Arial"/>
-              </a:rPr>
-              <a:t>i</a:t>
-            </a:r>
-            <a:r>
-              <a:rPr b="0" lang="en-US" sz="1600" spc="-1" strike="noStrike">
-                <a:latin typeface="Arial"/>
-              </a:rPr>
-              <a:t>r</a:t>
-            </a:r>
-            <a:r>
-              <a:rPr b="0" lang="en-US" sz="1600" spc="-1" strike="noStrike">
-                <a:latin typeface="Arial"/>
-              </a:rPr>
-              <a:t>e</a:t>
-            </a:r>
-            <a:r>
-              <a:rPr b="0" lang="en-US" sz="1600" spc="-1" strike="noStrike">
-                <a:latin typeface="Arial"/>
-              </a:rPr>
-              <a:t>b</a:t>
-            </a:r>
-            <a:r>
-              <a:rPr b="0" lang="en-US" sz="1600" spc="-1" strike="noStrike">
-                <a:latin typeface="Arial"/>
-              </a:rPr>
-              <a:t>a</a:t>
-            </a:r>
-            <a:r>
-              <a:rPr b="0" lang="en-US" sz="1600" spc="-1" strike="noStrike">
-                <a:latin typeface="Arial"/>
-              </a:rPr>
-              <a:t>s</a:t>
-            </a:r>
-            <a:r>
-              <a:rPr b="0" lang="en-US" sz="1600" spc="-1" strike="noStrike">
-                <a:latin typeface="Arial"/>
-              </a:rPr>
-              <a:t>e</a:t>
-            </a:r>
-            <a:r>
-              <a:rPr b="0" lang="en-US" sz="1600" spc="-1" strike="noStrike">
-                <a:latin typeface="Arial"/>
-              </a:rPr>
-              <a:t> </a:t>
-            </a:r>
-            <a:r>
-              <a:rPr b="0" lang="en-US" sz="1600" spc="-1" strike="noStrike">
-                <a:latin typeface="Arial"/>
-              </a:rPr>
-              <a:t>H</a:t>
-            </a:r>
-            <a:r>
-              <a:rPr b="0" lang="en-US" sz="1600" spc="-1" strike="noStrike">
-                <a:latin typeface="Arial"/>
-              </a:rPr>
-              <a:t>o</a:t>
-            </a:r>
-            <a:r>
-              <a:rPr b="0" lang="en-US" sz="1600" spc="-1" strike="noStrike">
-                <a:latin typeface="Arial"/>
-              </a:rPr>
-              <a:t>s</a:t>
-            </a:r>
-            <a:r>
-              <a:rPr b="0" lang="en-US" sz="1600" spc="-1" strike="noStrike">
-                <a:latin typeface="Arial"/>
-              </a:rPr>
-              <a:t>t</a:t>
-            </a:r>
-            <a:r>
-              <a:rPr b="0" lang="en-US" sz="1600" spc="-1" strike="noStrike">
-                <a:latin typeface="Arial"/>
-              </a:rPr>
-              <a:t>i</a:t>
-            </a:r>
-            <a:r>
-              <a:rPr b="0" lang="en-US" sz="1600" spc="-1" strike="noStrike">
-                <a:latin typeface="Arial"/>
-              </a:rPr>
-              <a:t>n</a:t>
-            </a:r>
-            <a:r>
-              <a:rPr b="0" lang="en-US" sz="1600" spc="-1" strike="noStrike">
-                <a:latin typeface="Arial"/>
-              </a:rPr>
-              <a:t>g</a:t>
-            </a:r>
-            <a:r>
-              <a:rPr b="0" lang="en-US" sz="1600" spc="-1" strike="noStrike">
-                <a:latin typeface="Arial"/>
-              </a:rPr>
-              <a:t> </a:t>
-            </a:r>
-            <a:r>
-              <a:rPr b="0" lang="en-US" sz="1600" spc="-1" strike="noStrike">
-                <a:latin typeface="Arial"/>
-              </a:rPr>
-              <a:t>—</a:t>
-            </a:r>
-            <a:r>
-              <a:rPr b="0" lang="en-US" sz="1600" spc="-1" strike="noStrike">
-                <a:latin typeface="Arial"/>
-              </a:rPr>
-              <a:t> </a:t>
-            </a:r>
-            <a:r>
-              <a:rPr b="0" lang="en-US" sz="1600" spc="-1" strike="noStrike">
-                <a:latin typeface="Arial"/>
-              </a:rPr>
-              <a:t>c</a:t>
-            </a:r>
-            <a:r>
-              <a:rPr b="0" lang="en-US" sz="1600" spc="-1" strike="noStrike">
-                <a:latin typeface="Arial"/>
-              </a:rPr>
-              <a:t>i</a:t>
-            </a:r>
-            <a:r>
-              <a:rPr b="0" lang="en-US" sz="1600" spc="-1" strike="noStrike">
-                <a:latin typeface="Arial"/>
-              </a:rPr>
-              <a:t>t</a:t>
-            </a:r>
-            <a:r>
-              <a:rPr b="0" lang="en-US" sz="1600" spc="-1" strike="noStrike">
-                <a:latin typeface="Arial"/>
-              </a:rPr>
-              <a:t>i</a:t>
-            </a:r>
-            <a:r>
-              <a:rPr b="0" lang="en-US" sz="1600" spc="-1" strike="noStrike">
-                <a:latin typeface="Arial"/>
-              </a:rPr>
-              <a:t>z</a:t>
-            </a:r>
-            <a:r>
-              <a:rPr b="0" lang="en-US" sz="1600" spc="-1" strike="noStrike">
-                <a:latin typeface="Arial"/>
-              </a:rPr>
-              <a:t>e</a:t>
-            </a:r>
-            <a:r>
-              <a:rPr b="0" lang="en-US" sz="1600" spc="-1" strike="noStrike">
-                <a:latin typeface="Arial"/>
-              </a:rPr>
-              <a:t>n</a:t>
-            </a:r>
-            <a:r>
-              <a:rPr b="0" lang="en-US" sz="1600" spc="-1" strike="noStrike">
-                <a:latin typeface="Arial"/>
-              </a:rPr>
-              <a:t>s</a:t>
-            </a:r>
-            <a:r>
-              <a:rPr b="0" lang="en-US" sz="1600" spc="-1" strike="noStrike">
-                <a:latin typeface="Arial"/>
-              </a:rPr>
-              <a:t> </a:t>
-            </a:r>
-            <a:r>
-              <a:rPr b="0" lang="en-US" sz="1600" spc="-1" strike="noStrike">
-                <a:latin typeface="Arial"/>
-              </a:rPr>
-              <a:t>s</a:t>
-            </a:r>
-            <a:r>
-              <a:rPr b="0" lang="en-US" sz="1600" spc="-1" strike="noStrike">
-                <a:latin typeface="Arial"/>
-              </a:rPr>
-              <a:t>e</a:t>
-            </a:r>
-            <a:r>
-              <a:rPr b="0" lang="en-US" sz="1600" spc="-1" strike="noStrike">
-                <a:latin typeface="Arial"/>
-              </a:rPr>
-              <a:t>e</a:t>
-            </a:r>
-            <a:r>
-              <a:rPr b="0" lang="en-US" sz="1600" spc="-1" strike="noStrike">
-                <a:latin typeface="Arial"/>
-              </a:rPr>
-              <a:t> </a:t>
-            </a:r>
-            <a:r>
-              <a:rPr b="0" lang="en-US" sz="1600" spc="-1" strike="noStrike">
-                <a:latin typeface="Arial"/>
-              </a:rPr>
-              <a:t>c</a:t>
-            </a:r>
-            <a:r>
-              <a:rPr b="0" lang="en-US" sz="1600" spc="-1" strike="noStrike">
-                <a:latin typeface="Arial"/>
-              </a:rPr>
-              <a:t>r</a:t>
-            </a:r>
-            <a:r>
-              <a:rPr b="0" lang="en-US" sz="1600" spc="-1" strike="noStrike">
-                <a:latin typeface="Arial"/>
-              </a:rPr>
-              <a:t>i</a:t>
-            </a:r>
-            <a:r>
-              <a:rPr b="0" lang="en-US" sz="1600" spc="-1" strike="noStrike">
-                <a:latin typeface="Arial"/>
-              </a:rPr>
-              <a:t>t</a:t>
-            </a:r>
-            <a:r>
-              <a:rPr b="0" lang="en-US" sz="1600" spc="-1" strike="noStrike">
-                <a:latin typeface="Arial"/>
-              </a:rPr>
-              <a:t>i</a:t>
-            </a:r>
-            <a:r>
-              <a:rPr b="0" lang="en-US" sz="1600" spc="-1" strike="noStrike">
-                <a:latin typeface="Arial"/>
-              </a:rPr>
-              <a:t>c</a:t>
-            </a:r>
-            <a:r>
-              <a:rPr b="0" lang="en-US" sz="1600" spc="-1" strike="noStrike">
-                <a:latin typeface="Arial"/>
-              </a:rPr>
-              <a:t>a</a:t>
-            </a:r>
-            <a:r>
-              <a:rPr b="0" lang="en-US" sz="1600" spc="-1" strike="noStrike">
-                <a:latin typeface="Arial"/>
-              </a:rPr>
-              <a:t>l</a:t>
-            </a:r>
-            <a:r>
-              <a:rPr b="0" lang="en-US" sz="1600" spc="-1" strike="noStrike">
-                <a:latin typeface="Arial"/>
-              </a:rPr>
-              <a:t> </a:t>
-            </a:r>
-            <a:r>
-              <a:rPr b="0" lang="en-US" sz="1600" spc="-1" strike="noStrike">
-                <a:latin typeface="Arial"/>
-              </a:rPr>
-              <a:t>z</a:t>
-            </a:r>
-            <a:r>
-              <a:rPr b="0" lang="en-US" sz="1600" spc="-1" strike="noStrike">
-                <a:latin typeface="Arial"/>
-              </a:rPr>
-              <a:t>o</a:t>
-            </a:r>
-            <a:r>
-              <a:rPr b="0" lang="en-US" sz="1600" spc="-1" strike="noStrike">
-                <a:latin typeface="Arial"/>
-              </a:rPr>
-              <a:t>n</a:t>
-            </a:r>
-            <a:r>
-              <a:rPr b="0" lang="en-US" sz="1600" spc="-1" strike="noStrike">
-                <a:latin typeface="Arial"/>
-              </a:rPr>
-              <a:t>e</a:t>
-            </a:r>
-            <a:r>
-              <a:rPr b="0" lang="en-US" sz="1600" spc="-1" strike="noStrike">
-                <a:latin typeface="Arial"/>
-              </a:rPr>
-              <a:t>s</a:t>
-            </a:r>
-            <a:r>
-              <a:rPr b="0" lang="en-US" sz="1600" spc="-1" strike="noStrike">
-                <a:latin typeface="Arial"/>
-              </a:rPr>
-              <a:t> </a:t>
-            </a:r>
-            <a:r>
-              <a:rPr b="0" lang="en-US" sz="1600" spc="-1" strike="noStrike">
-                <a:latin typeface="Arial"/>
-              </a:rPr>
-              <a:t>a</a:t>
-            </a:r>
-            <a:r>
-              <a:rPr b="0" lang="en-US" sz="1600" spc="-1" strike="noStrike">
-                <a:latin typeface="Arial"/>
-              </a:rPr>
-              <a:t>p</a:t>
-            </a:r>
-            <a:r>
-              <a:rPr b="0" lang="en-US" sz="1600" spc="-1" strike="noStrike">
-                <a:latin typeface="Arial"/>
-              </a:rPr>
-              <a:t>p</a:t>
-            </a:r>
-            <a:r>
-              <a:rPr b="0" lang="en-US" sz="1600" spc="-1" strike="noStrike">
-                <a:latin typeface="Arial"/>
-              </a:rPr>
-              <a:t>e</a:t>
-            </a:r>
-            <a:r>
-              <a:rPr b="0" lang="en-US" sz="1600" spc="-1" strike="noStrike">
-                <a:latin typeface="Arial"/>
-              </a:rPr>
-              <a:t>a</a:t>
-            </a:r>
-            <a:r>
-              <a:rPr b="0" lang="en-US" sz="1600" spc="-1" strike="noStrike">
-                <a:latin typeface="Arial"/>
-              </a:rPr>
-              <a:t>r</a:t>
-            </a:r>
-            <a:r>
-              <a:rPr b="0" lang="en-US" sz="1600" spc="-1" strike="noStrike">
-                <a:latin typeface="Arial"/>
-              </a:rPr>
-              <a:t> </a:t>
-            </a:r>
-            <a:r>
-              <a:rPr b="0" lang="en-US" sz="1600" spc="-1" strike="noStrike">
-                <a:latin typeface="Arial"/>
-              </a:rPr>
-              <a:t>l</a:t>
-            </a:r>
-            <a:r>
-              <a:rPr b="0" lang="en-US" sz="1600" spc="-1" strike="noStrike">
-                <a:latin typeface="Arial"/>
-              </a:rPr>
-              <a:t>i</a:t>
-            </a:r>
-            <a:r>
-              <a:rPr b="0" lang="en-US" sz="1600" spc="-1" strike="noStrike">
-                <a:latin typeface="Arial"/>
-              </a:rPr>
-              <a:t>v</a:t>
-            </a:r>
-            <a:r>
-              <a:rPr b="0" lang="en-US" sz="1600" spc="-1" strike="noStrike">
-                <a:latin typeface="Arial"/>
-              </a:rPr>
-              <a:t>e</a:t>
-            </a:r>
-            <a:r>
-              <a:rPr b="0" lang="en-US" sz="1600" spc="-1" strike="noStrike">
-                <a:latin typeface="Arial"/>
-              </a:rPr>
-              <a:t>,</a:t>
-            </a:r>
-            <a:r>
-              <a:rPr b="0" lang="en-US" sz="1600" spc="-1" strike="noStrike">
-                <a:latin typeface="Arial"/>
-              </a:rPr>
-              <a:t> </a:t>
-            </a:r>
-            <a:r>
-              <a:rPr b="0" lang="en-US" sz="1600" spc="-1" strike="noStrike">
-                <a:latin typeface="Arial"/>
-              </a:rPr>
-              <a:t>w</a:t>
-            </a:r>
-            <a:r>
-              <a:rPr b="0" lang="en-US" sz="1600" spc="-1" strike="noStrike">
-                <a:latin typeface="Arial"/>
-              </a:rPr>
-              <a:t>h</a:t>
-            </a:r>
-            <a:r>
-              <a:rPr b="0" lang="en-US" sz="1600" spc="-1" strike="noStrike">
-                <a:latin typeface="Arial"/>
-              </a:rPr>
-              <a:t>i</a:t>
-            </a:r>
-            <a:r>
-              <a:rPr b="0" lang="en-US" sz="1600" spc="-1" strike="noStrike">
-                <a:latin typeface="Arial"/>
-              </a:rPr>
-              <a:t>l</a:t>
-            </a:r>
-            <a:r>
-              <a:rPr b="0" lang="en-US" sz="1600" spc="-1" strike="noStrike">
-                <a:latin typeface="Arial"/>
-              </a:rPr>
-              <a:t>e</a:t>
-            </a:r>
-            <a:r>
-              <a:rPr b="0" lang="en-US" sz="1600" spc="-1" strike="noStrike">
-                <a:latin typeface="Arial"/>
-              </a:rPr>
-              <a:t> </a:t>
-            </a:r>
-            <a:r>
-              <a:rPr b="0" lang="en-US" sz="1600" spc="-1" strike="noStrike">
-                <a:latin typeface="Arial"/>
-              </a:rPr>
-              <a:t>o</a:t>
-            </a:r>
-            <a:r>
-              <a:rPr b="0" lang="en-US" sz="1600" spc="-1" strike="noStrike">
-                <a:latin typeface="Arial"/>
-              </a:rPr>
-              <a:t>p</a:t>
-            </a:r>
-            <a:r>
-              <a:rPr b="0" lang="en-US" sz="1600" spc="-1" strike="noStrike">
-                <a:latin typeface="Arial"/>
-              </a:rPr>
-              <a:t>e</a:t>
-            </a:r>
-            <a:r>
-              <a:rPr b="0" lang="en-US" sz="1600" spc="-1" strike="noStrike">
-                <a:latin typeface="Arial"/>
-              </a:rPr>
-              <a:t>r</a:t>
-            </a:r>
-            <a:r>
-              <a:rPr b="0" lang="en-US" sz="1600" spc="-1" strike="noStrike">
-                <a:latin typeface="Arial"/>
-              </a:rPr>
-              <a:t>a</a:t>
-            </a:r>
-            <a:r>
-              <a:rPr b="0" lang="en-US" sz="1600" spc="-1" strike="noStrike">
-                <a:latin typeface="Arial"/>
-              </a:rPr>
-              <a:t>t</a:t>
-            </a:r>
-            <a:r>
-              <a:rPr b="0" lang="en-US" sz="1600" spc="-1" strike="noStrike">
-                <a:latin typeface="Arial"/>
-              </a:rPr>
-              <a:t>o</a:t>
-            </a:r>
-            <a:r>
-              <a:rPr b="0" lang="en-US" sz="1600" spc="-1" strike="noStrike">
-                <a:latin typeface="Arial"/>
-              </a:rPr>
-              <a:t>r</a:t>
-            </a:r>
-            <a:r>
-              <a:rPr b="0" lang="en-US" sz="1600" spc="-1" strike="noStrike">
-                <a:latin typeface="Arial"/>
-              </a:rPr>
-              <a:t> </a:t>
-            </a:r>
-            <a:r>
-              <a:rPr b="0" lang="en-US" sz="1600" spc="-1" strike="noStrike">
-                <a:latin typeface="Arial"/>
-              </a:rPr>
-              <a:t>s</a:t>
-            </a:r>
-            <a:r>
-              <a:rPr b="0" lang="en-US" sz="1600" spc="-1" strike="noStrike">
-                <a:latin typeface="Arial"/>
-              </a:rPr>
-              <a:t>c</a:t>
-            </a:r>
-            <a:r>
-              <a:rPr b="0" lang="en-US" sz="1600" spc="-1" strike="noStrike">
-                <a:latin typeface="Arial"/>
-              </a:rPr>
-              <a:t>a</a:t>
-            </a:r>
-            <a:r>
-              <a:rPr b="0" lang="en-US" sz="1600" spc="-1" strike="noStrike">
-                <a:latin typeface="Arial"/>
-              </a:rPr>
-              <a:t>n</a:t>
-            </a:r>
-            <a:r>
-              <a:rPr b="0" lang="en-US" sz="1600" spc="-1" strike="noStrike">
-                <a:latin typeface="Arial"/>
-              </a:rPr>
-              <a:t> </a:t>
-            </a:r>
-            <a:r>
-              <a:rPr b="0" lang="en-US" sz="1600" spc="-1" strike="noStrike">
-                <a:latin typeface="Arial"/>
-              </a:rPr>
-              <a:t>d</a:t>
-            </a:r>
-            <a:r>
-              <a:rPr b="0" lang="en-US" sz="1600" spc="-1" strike="noStrike">
-                <a:latin typeface="Arial"/>
-              </a:rPr>
-              <a:t>a</a:t>
-            </a:r>
-            <a:r>
-              <a:rPr b="0" lang="en-US" sz="1600" spc="-1" strike="noStrike">
-                <a:latin typeface="Arial"/>
-              </a:rPr>
-              <a:t>t</a:t>
-            </a:r>
-            <a:r>
-              <a:rPr b="0" lang="en-US" sz="1600" spc="-1" strike="noStrike">
-                <a:latin typeface="Arial"/>
-              </a:rPr>
-              <a:t>a</a:t>
-            </a:r>
-            <a:r>
-              <a:rPr b="0" lang="en-US" sz="1600" spc="-1" strike="noStrike">
-                <a:latin typeface="Arial"/>
-              </a:rPr>
-              <a:t> </a:t>
-            </a:r>
-            <a:r>
-              <a:rPr b="0" lang="en-US" sz="1600" spc="-1" strike="noStrike">
-                <a:latin typeface="Arial"/>
-              </a:rPr>
-              <a:t>s</a:t>
-            </a:r>
-            <a:r>
-              <a:rPr b="0" lang="en-US" sz="1600" spc="-1" strike="noStrike">
-                <a:latin typeface="Arial"/>
-              </a:rPr>
-              <a:t>t</a:t>
-            </a:r>
-            <a:r>
-              <a:rPr b="0" lang="en-US" sz="1600" spc="-1" strike="noStrike">
-                <a:latin typeface="Arial"/>
-              </a:rPr>
-              <a:t>a</a:t>
-            </a:r>
-            <a:r>
-              <a:rPr b="0" lang="en-US" sz="1600" spc="-1" strike="noStrike">
-                <a:latin typeface="Arial"/>
-              </a:rPr>
-              <a:t>y</a:t>
-            </a:r>
-            <a:r>
-              <a:rPr b="0" lang="en-US" sz="1600" spc="-1" strike="noStrike">
-                <a:latin typeface="Arial"/>
-              </a:rPr>
-              <a:t>s</a:t>
-            </a:r>
-            <a:r>
-              <a:rPr b="0" lang="en-US" sz="1600" spc="-1" strike="noStrike">
-                <a:latin typeface="Arial"/>
-              </a:rPr>
-              <a:t> </a:t>
-            </a:r>
-            <a:r>
-              <a:rPr b="0" lang="en-US" sz="1600" spc="-1" strike="noStrike">
-                <a:latin typeface="Arial"/>
-              </a:rPr>
-              <a:t>p</a:t>
-            </a:r>
-            <a:r>
-              <a:rPr b="0" lang="en-US" sz="1600" spc="-1" strike="noStrike">
-                <a:latin typeface="Arial"/>
-              </a:rPr>
-              <a:t>r</a:t>
-            </a:r>
-            <a:r>
-              <a:rPr b="0" lang="en-US" sz="1600" spc="-1" strike="noStrike">
-                <a:latin typeface="Arial"/>
-              </a:rPr>
-              <a:t>i</a:t>
-            </a:r>
-            <a:r>
-              <a:rPr b="0" lang="en-US" sz="1600" spc="-1" strike="noStrike">
-                <a:latin typeface="Arial"/>
-              </a:rPr>
-              <a:t>v</a:t>
-            </a:r>
-            <a:r>
-              <a:rPr b="0" lang="en-US" sz="1600" spc="-1" strike="noStrike">
-                <a:latin typeface="Arial"/>
-              </a:rPr>
-              <a:t>a</a:t>
-            </a:r>
-            <a:r>
-              <a:rPr b="0" lang="en-US" sz="1600" spc="-1" strike="noStrike">
-                <a:latin typeface="Arial"/>
-              </a:rPr>
-              <a:t>t</a:t>
-            </a:r>
-            <a:r>
-              <a:rPr b="0" lang="en-US" sz="1600" spc="-1" strike="noStrike">
-                <a:latin typeface="Arial"/>
-              </a:rPr>
-              <a:t>e</a:t>
-            </a:r>
-            <a:endParaRPr b="0" lang="en-US" sz="1600" spc="-1" strike="noStrike">
-              <a:latin typeface="Arial"/>
-            </a:endParaRPr>
-          </a:p>
-          <a:p>
-            <a:pPr algn="just">
-              <a:buNone/>
-            </a:pPr>
-            <a:r>
-              <a:rPr b="0" lang="en-US" sz="1600" spc="-1" strike="noStrike">
-                <a:latin typeface="Arial"/>
-              </a:rPr>
-              <a:t> </a:t>
-            </a:r>
-            <a:r>
-              <a:rPr b="0" lang="en-US" sz="1600" spc="-1" strike="noStrike">
-                <a:latin typeface="Arial"/>
-              </a:rPr>
-              <a:t> </a:t>
-            </a:r>
-            <a:r>
-              <a:rPr b="0" lang="en-US" sz="1600" spc="-1" strike="noStrike">
-                <a:latin typeface="Arial"/>
-              </a:rPr>
-              <a:t>-</a:t>
-            </a:r>
-            <a:r>
-              <a:rPr b="0" lang="en-US" sz="1600" spc="-1" strike="noStrike">
-                <a:latin typeface="Arial"/>
-              </a:rPr>
-              <a:t> </a:t>
-            </a:r>
-            <a:r>
-              <a:rPr b="0" lang="en-US" sz="1600" spc="-1" strike="noStrike">
-                <a:latin typeface="Arial"/>
-              </a:rPr>
-              <a:t>C</a:t>
-            </a:r>
-            <a:r>
-              <a:rPr b="0" lang="en-US" sz="1600" spc="-1" strike="noStrike">
-                <a:latin typeface="Arial"/>
-              </a:rPr>
-              <a:t>i</a:t>
-            </a:r>
-            <a:r>
-              <a:rPr b="0" lang="en-US" sz="1600" spc="-1" strike="noStrike">
-                <a:latin typeface="Arial"/>
-              </a:rPr>
-              <a:t>t</a:t>
-            </a:r>
-            <a:r>
-              <a:rPr b="0" lang="en-US" sz="1600" spc="-1" strike="noStrike">
-                <a:latin typeface="Arial"/>
-              </a:rPr>
-              <a:t>y</a:t>
-            </a:r>
-            <a:r>
-              <a:rPr b="0" lang="en-US" sz="1600" spc="-1" strike="noStrike">
-                <a:latin typeface="Arial"/>
-              </a:rPr>
-              <a:t>-</a:t>
-            </a:r>
-            <a:r>
-              <a:rPr b="0" lang="en-US" sz="1600" spc="-1" strike="noStrike">
-                <a:latin typeface="Arial"/>
-              </a:rPr>
-              <a:t>w</a:t>
-            </a:r>
-            <a:r>
-              <a:rPr b="0" lang="en-US" sz="1600" spc="-1" strike="noStrike">
-                <a:latin typeface="Arial"/>
-              </a:rPr>
-              <a:t>i</a:t>
-            </a:r>
-            <a:r>
-              <a:rPr b="0" lang="en-US" sz="1600" spc="-1" strike="noStrike">
-                <a:latin typeface="Arial"/>
-              </a:rPr>
-              <a:t>d</a:t>
-            </a:r>
-            <a:r>
-              <a:rPr b="0" lang="en-US" sz="1600" spc="-1" strike="noStrike">
-                <a:latin typeface="Arial"/>
-              </a:rPr>
-              <a:t>e</a:t>
-            </a:r>
-            <a:r>
-              <a:rPr b="0" lang="en-US" sz="1600" spc="-1" strike="noStrike">
-                <a:latin typeface="Arial"/>
-              </a:rPr>
-              <a:t> </a:t>
-            </a:r>
-            <a:r>
-              <a:rPr b="0" lang="en-US" sz="1600" spc="-1" strike="noStrike">
-                <a:latin typeface="Arial"/>
-              </a:rPr>
-              <a:t>m</a:t>
-            </a:r>
-            <a:r>
-              <a:rPr b="0" lang="en-US" sz="1600" spc="-1" strike="noStrike">
-                <a:latin typeface="Arial"/>
-              </a:rPr>
-              <a:t>a</a:t>
-            </a:r>
-            <a:r>
-              <a:rPr b="0" lang="en-US" sz="1600" spc="-1" strike="noStrike">
-                <a:latin typeface="Arial"/>
-              </a:rPr>
-              <a:t>p</a:t>
-            </a:r>
-            <a:r>
-              <a:rPr b="0" lang="en-US" sz="1600" spc="-1" strike="noStrike">
-                <a:latin typeface="Arial"/>
-              </a:rPr>
-              <a:t> </a:t>
-            </a:r>
-            <a:r>
-              <a:rPr b="0" lang="en-US" sz="1600" spc="-1" strike="noStrike">
-                <a:latin typeface="Arial"/>
-              </a:rPr>
-              <a:t>o</a:t>
-            </a:r>
-            <a:r>
-              <a:rPr b="0" lang="en-US" sz="1600" spc="-1" strike="noStrike">
-                <a:latin typeface="Arial"/>
-              </a:rPr>
-              <a:t>f</a:t>
-            </a:r>
-            <a:r>
-              <a:rPr b="0" lang="en-US" sz="1600" spc="-1" strike="noStrike">
-                <a:latin typeface="Arial"/>
-              </a:rPr>
-              <a:t> </a:t>
-            </a:r>
-            <a:r>
-              <a:rPr b="0" lang="en-US" sz="1600" spc="-1" strike="noStrike">
-                <a:latin typeface="Arial"/>
-              </a:rPr>
-              <a:t>e</a:t>
-            </a:r>
-            <a:r>
-              <a:rPr b="0" lang="en-US" sz="1600" spc="-1" strike="noStrike">
-                <a:latin typeface="Arial"/>
-              </a:rPr>
-              <a:t>v</a:t>
-            </a:r>
-            <a:r>
-              <a:rPr b="0" lang="en-US" sz="1600" spc="-1" strike="noStrike">
-                <a:latin typeface="Arial"/>
-              </a:rPr>
-              <a:t>e</a:t>
-            </a:r>
-            <a:r>
-              <a:rPr b="0" lang="en-US" sz="1600" spc="-1" strike="noStrike">
-                <a:latin typeface="Arial"/>
-              </a:rPr>
-              <a:t>r</a:t>
-            </a:r>
-            <a:r>
-              <a:rPr b="0" lang="en-US" sz="1600" spc="-1" strike="noStrike">
-                <a:latin typeface="Arial"/>
-              </a:rPr>
-              <a:t>y</a:t>
-            </a:r>
-            <a:r>
-              <a:rPr b="0" lang="en-US" sz="1600" spc="-1" strike="noStrike">
-                <a:latin typeface="Arial"/>
-              </a:rPr>
-              <a:t> </a:t>
-            </a:r>
-            <a:r>
-              <a:rPr b="0" lang="en-US" sz="1600" spc="-1" strike="noStrike">
-                <a:latin typeface="Arial"/>
-              </a:rPr>
-              <a:t>a</a:t>
-            </a:r>
-            <a:r>
-              <a:rPr b="0" lang="en-US" sz="1600" spc="-1" strike="noStrike">
-                <a:latin typeface="Arial"/>
-              </a:rPr>
-              <a:t>n</a:t>
-            </a:r>
-            <a:r>
-              <a:rPr b="0" lang="en-US" sz="1600" spc="-1" strike="noStrike">
-                <a:latin typeface="Arial"/>
-              </a:rPr>
-              <a:t>a</a:t>
-            </a:r>
-            <a:r>
-              <a:rPr b="0" lang="en-US" sz="1600" spc="-1" strike="noStrike">
-                <a:latin typeface="Arial"/>
-              </a:rPr>
-              <a:t>l</a:t>
-            </a:r>
-            <a:r>
-              <a:rPr b="0" lang="en-US" sz="1600" spc="-1" strike="noStrike">
-                <a:latin typeface="Arial"/>
-              </a:rPr>
-              <a:t>y</a:t>
-            </a:r>
-            <a:r>
-              <a:rPr b="0" lang="en-US" sz="1600" spc="-1" strike="noStrike">
-                <a:latin typeface="Arial"/>
-              </a:rPr>
-              <a:t>z</a:t>
-            </a:r>
-            <a:r>
-              <a:rPr b="0" lang="en-US" sz="1600" spc="-1" strike="noStrike">
-                <a:latin typeface="Arial"/>
-              </a:rPr>
-              <a:t>e</a:t>
-            </a:r>
-            <a:r>
-              <a:rPr b="0" lang="en-US" sz="1600" spc="-1" strike="noStrike">
-                <a:latin typeface="Arial"/>
-              </a:rPr>
-              <a:t>d</a:t>
-            </a:r>
-            <a:r>
-              <a:rPr b="0" lang="en-US" sz="1600" spc="-1" strike="noStrike">
-                <a:latin typeface="Arial"/>
-              </a:rPr>
-              <a:t> </a:t>
-            </a:r>
-            <a:r>
-              <a:rPr b="0" lang="en-US" sz="1600" spc="-1" strike="noStrike">
-                <a:latin typeface="Arial"/>
-              </a:rPr>
-              <a:t>z</a:t>
-            </a:r>
-            <a:r>
-              <a:rPr b="0" lang="en-US" sz="1600" spc="-1" strike="noStrike">
-                <a:latin typeface="Arial"/>
-              </a:rPr>
-              <a:t>o</a:t>
-            </a:r>
-            <a:r>
-              <a:rPr b="0" lang="en-US" sz="1600" spc="-1" strike="noStrike">
-                <a:latin typeface="Arial"/>
-              </a:rPr>
-              <a:t>n</a:t>
-            </a:r>
-            <a:r>
-              <a:rPr b="0" lang="en-US" sz="1600" spc="-1" strike="noStrike">
-                <a:latin typeface="Arial"/>
-              </a:rPr>
-              <a:t>e</a:t>
-            </a:r>
-            <a:r>
-              <a:rPr b="0" lang="en-US" sz="1600" spc="-1" strike="noStrike">
-                <a:latin typeface="Arial"/>
-              </a:rPr>
-              <a:t> </a:t>
-            </a:r>
-            <a:r>
-              <a:rPr b="0" lang="en-US" sz="1600" spc="-1" strike="noStrike">
-                <a:latin typeface="Arial"/>
-              </a:rPr>
-              <a:t>c</a:t>
-            </a:r>
-            <a:r>
-              <a:rPr b="0" lang="en-US" sz="1600" spc="-1" strike="noStrike">
-                <a:latin typeface="Arial"/>
-              </a:rPr>
-              <a:t>o</a:t>
-            </a:r>
-            <a:r>
-              <a:rPr b="0" lang="en-US" sz="1600" spc="-1" strike="noStrike">
-                <a:latin typeface="Arial"/>
-              </a:rPr>
-              <a:t>l</a:t>
-            </a:r>
-            <a:r>
-              <a:rPr b="0" lang="en-US" sz="1600" spc="-1" strike="noStrike">
-                <a:latin typeface="Arial"/>
-              </a:rPr>
-              <a:t>o</a:t>
-            </a:r>
-            <a:r>
-              <a:rPr b="0" lang="en-US" sz="1600" spc="-1" strike="noStrike">
-                <a:latin typeface="Arial"/>
-              </a:rPr>
-              <a:t>r</a:t>
-            </a:r>
-            <a:r>
-              <a:rPr b="0" lang="en-US" sz="1600" spc="-1" strike="noStrike">
-                <a:latin typeface="Arial"/>
-              </a:rPr>
-              <a:t>e</a:t>
-            </a:r>
-            <a:r>
-              <a:rPr b="0" lang="en-US" sz="1600" spc="-1" strike="noStrike">
-                <a:latin typeface="Arial"/>
-              </a:rPr>
-              <a:t>d</a:t>
-            </a:r>
-            <a:r>
-              <a:rPr b="0" lang="en-US" sz="1600" spc="-1" strike="noStrike">
-                <a:latin typeface="Arial"/>
-              </a:rPr>
-              <a:t> </a:t>
-            </a:r>
-            <a:r>
-              <a:rPr b="0" lang="en-US" sz="1600" spc="-1" strike="noStrike">
-                <a:latin typeface="Arial"/>
-              </a:rPr>
-              <a:t>b</a:t>
-            </a:r>
-            <a:r>
-              <a:rPr b="0" lang="en-US" sz="1600" spc="-1" strike="noStrike">
-                <a:latin typeface="Arial"/>
-              </a:rPr>
-              <a:t>y</a:t>
-            </a:r>
-            <a:r>
-              <a:rPr b="0" lang="en-US" sz="1600" spc="-1" strike="noStrike">
-                <a:latin typeface="Arial"/>
-              </a:rPr>
-              <a:t> </a:t>
-            </a:r>
-            <a:r>
-              <a:rPr b="0" lang="en-US" sz="1600" spc="-1" strike="noStrike">
-                <a:latin typeface="Arial"/>
-              </a:rPr>
-              <a:t>r</a:t>
-            </a:r>
-            <a:r>
-              <a:rPr b="0" lang="en-US" sz="1600" spc="-1" strike="noStrike">
-                <a:latin typeface="Arial"/>
-              </a:rPr>
-              <a:t>i</a:t>
-            </a:r>
-            <a:r>
-              <a:rPr b="0" lang="en-US" sz="1600" spc="-1" strike="noStrike">
-                <a:latin typeface="Arial"/>
-              </a:rPr>
-              <a:t>s</a:t>
-            </a:r>
-            <a:r>
-              <a:rPr b="0" lang="en-US" sz="1600" spc="-1" strike="noStrike">
-                <a:latin typeface="Arial"/>
-              </a:rPr>
-              <a:t>k</a:t>
-            </a:r>
-            <a:r>
-              <a:rPr b="0" lang="en-US" sz="1600" spc="-1" strike="noStrike">
-                <a:latin typeface="Arial"/>
-              </a:rPr>
-              <a:t>:</a:t>
-            </a:r>
-            <a:r>
-              <a:rPr b="0" lang="en-US" sz="1600" spc="-1" strike="noStrike">
-                <a:latin typeface="Arial"/>
-              </a:rPr>
-              <a:t> </a:t>
-            </a:r>
-            <a:r>
-              <a:rPr b="0" lang="en-US" sz="1600" spc="-1" strike="noStrike">
-                <a:latin typeface="Arial"/>
-              </a:rPr>
-              <a:t>a</a:t>
-            </a:r>
-            <a:r>
-              <a:rPr b="0" lang="en-US" sz="1600" spc="-1" strike="noStrike">
-                <a:latin typeface="Arial"/>
-              </a:rPr>
-              <a:t> </a:t>
-            </a:r>
-            <a:r>
-              <a:rPr b="0" lang="en-US" sz="1600" spc="-1" strike="noStrike">
-                <a:latin typeface="Arial"/>
-              </a:rPr>
-              <a:t>r</a:t>
-            </a:r>
-            <a:r>
-              <a:rPr b="0" lang="en-US" sz="1600" spc="-1" strike="noStrike">
-                <a:latin typeface="Arial"/>
-              </a:rPr>
-              <a:t>e</a:t>
-            </a:r>
-            <a:r>
-              <a:rPr b="0" lang="en-US" sz="1600" spc="-1" strike="noStrike">
-                <a:latin typeface="Arial"/>
-              </a:rPr>
-              <a:t>t</a:t>
-            </a:r>
-            <a:r>
-              <a:rPr b="0" lang="en-US" sz="1600" spc="-1" strike="noStrike">
-                <a:latin typeface="Arial"/>
-              </a:rPr>
-              <a:t>r</a:t>
-            </a:r>
-            <a:r>
-              <a:rPr b="0" lang="en-US" sz="1600" spc="-1" strike="noStrike">
-                <a:latin typeface="Arial"/>
-              </a:rPr>
-              <a:t>o</a:t>
-            </a:r>
-            <a:r>
-              <a:rPr b="0" lang="en-US" sz="1600" spc="-1" strike="noStrike">
-                <a:latin typeface="Arial"/>
-              </a:rPr>
-              <a:t>f</a:t>
-            </a:r>
-            <a:r>
-              <a:rPr b="0" lang="en-US" sz="1600" spc="-1" strike="noStrike">
-                <a:latin typeface="Arial"/>
-              </a:rPr>
-              <a:t>i</a:t>
-            </a:r>
-            <a:r>
-              <a:rPr b="0" lang="en-US" sz="1600" spc="-1" strike="noStrike">
-                <a:latin typeface="Arial"/>
-              </a:rPr>
-              <a:t>t</a:t>
-            </a:r>
-            <a:r>
-              <a:rPr b="0" lang="en-US" sz="1600" spc="-1" strike="noStrike">
-                <a:latin typeface="Arial"/>
-              </a:rPr>
-              <a:t> </a:t>
-            </a:r>
-            <a:r>
-              <a:rPr b="0" lang="en-US" sz="1600" spc="-1" strike="noStrike">
-                <a:latin typeface="Arial"/>
-              </a:rPr>
-              <a:t>q</a:t>
-            </a:r>
-            <a:r>
-              <a:rPr b="0" lang="en-US" sz="1600" spc="-1" strike="noStrike">
-                <a:latin typeface="Arial"/>
-              </a:rPr>
-              <a:t>u</a:t>
-            </a:r>
-            <a:r>
-              <a:rPr b="0" lang="en-US" sz="1600" spc="-1" strike="noStrike">
-                <a:latin typeface="Arial"/>
-              </a:rPr>
-              <a:t>e</a:t>
-            </a:r>
-            <a:r>
-              <a:rPr b="0" lang="en-US" sz="1600" spc="-1" strike="noStrike">
-                <a:latin typeface="Arial"/>
-              </a:rPr>
-              <a:t>u</a:t>
-            </a:r>
-            <a:r>
-              <a:rPr b="0" lang="en-US" sz="1600" spc="-1" strike="noStrike">
-                <a:latin typeface="Arial"/>
-              </a:rPr>
-              <a:t>e</a:t>
-            </a:r>
-            <a:r>
-              <a:rPr b="0" lang="en-US" sz="1600" spc="-1" strike="noStrike">
-                <a:latin typeface="Arial"/>
-              </a:rPr>
-              <a:t> </a:t>
-            </a:r>
-            <a:r>
-              <a:rPr b="0" lang="en-US" sz="1600" spc="-1" strike="noStrike">
-                <a:latin typeface="Arial"/>
-              </a:rPr>
-              <a:t>o</a:t>
-            </a:r>
-            <a:r>
-              <a:rPr b="0" lang="en-US" sz="1600" spc="-1" strike="noStrike">
-                <a:latin typeface="Arial"/>
-              </a:rPr>
-              <a:t>r</a:t>
-            </a:r>
-            <a:r>
-              <a:rPr b="0" lang="en-US" sz="1600" spc="-1" strike="noStrike">
-                <a:latin typeface="Arial"/>
-              </a:rPr>
-              <a:t>d</a:t>
-            </a:r>
-            <a:r>
-              <a:rPr b="0" lang="en-US" sz="1600" spc="-1" strike="noStrike">
-                <a:latin typeface="Arial"/>
-              </a:rPr>
-              <a:t>e</a:t>
-            </a:r>
-            <a:r>
-              <a:rPr b="0" lang="en-US" sz="1600" spc="-1" strike="noStrike">
-                <a:latin typeface="Arial"/>
-              </a:rPr>
-              <a:t>r</a:t>
-            </a:r>
-            <a:r>
-              <a:rPr b="0" lang="en-US" sz="1600" spc="-1" strike="noStrike">
-                <a:latin typeface="Arial"/>
-              </a:rPr>
-              <a:t>e</a:t>
-            </a:r>
-            <a:r>
-              <a:rPr b="0" lang="en-US" sz="1600" spc="-1" strike="noStrike">
-                <a:latin typeface="Arial"/>
-              </a:rPr>
-              <a:t>d</a:t>
-            </a:r>
-            <a:r>
-              <a:rPr b="0" lang="en-US" sz="1600" spc="-1" strike="noStrike">
-                <a:latin typeface="Arial"/>
-              </a:rPr>
-              <a:t> </a:t>
-            </a:r>
-            <a:r>
-              <a:rPr b="0" lang="en-US" sz="1600" spc="-1" strike="noStrike">
-                <a:latin typeface="Arial"/>
-              </a:rPr>
-              <a:t>w</a:t>
-            </a:r>
-            <a:r>
-              <a:rPr b="0" lang="en-US" sz="1600" spc="-1" strike="noStrike">
-                <a:latin typeface="Arial"/>
-              </a:rPr>
-              <a:t>o</a:t>
-            </a:r>
-            <a:r>
-              <a:rPr b="0" lang="en-US" sz="1600" spc="-1" strike="noStrike">
-                <a:latin typeface="Arial"/>
-              </a:rPr>
-              <a:t>r</a:t>
-            </a:r>
-            <a:r>
-              <a:rPr b="0" lang="en-US" sz="1600" spc="-1" strike="noStrike">
-                <a:latin typeface="Arial"/>
-              </a:rPr>
-              <a:t>s</a:t>
-            </a:r>
-            <a:r>
-              <a:rPr b="0" lang="en-US" sz="1600" spc="-1" strike="noStrike">
-                <a:latin typeface="Arial"/>
-              </a:rPr>
-              <a:t>t</a:t>
-            </a:r>
-            <a:r>
-              <a:rPr b="0" lang="en-US" sz="1600" spc="-1" strike="noStrike">
-                <a:latin typeface="Arial"/>
-              </a:rPr>
-              <a:t>-</a:t>
-            </a:r>
-            <a:r>
-              <a:rPr b="0" lang="en-US" sz="1600" spc="-1" strike="noStrike">
-                <a:latin typeface="Arial"/>
-              </a:rPr>
-              <a:t>f</a:t>
-            </a:r>
-            <a:r>
-              <a:rPr b="0" lang="en-US" sz="1600" spc="-1" strike="noStrike">
-                <a:latin typeface="Arial"/>
-              </a:rPr>
-              <a:t>i</a:t>
-            </a:r>
-            <a:r>
-              <a:rPr b="0" lang="en-US" sz="1600" spc="-1" strike="noStrike">
-                <a:latin typeface="Arial"/>
-              </a:rPr>
-              <a:t>r</a:t>
-            </a:r>
-            <a:r>
-              <a:rPr b="0" lang="en-US" sz="1600" spc="-1" strike="noStrike">
-                <a:latin typeface="Arial"/>
-              </a:rPr>
-              <a:t>s</a:t>
-            </a:r>
-            <a:r>
-              <a:rPr b="0" lang="en-US" sz="1600" spc="-1" strike="noStrike">
-                <a:latin typeface="Arial"/>
-              </a:rPr>
-              <a:t>t</a:t>
-            </a:r>
-            <a:endParaRPr b="0" lang="en-US" sz="1600" spc="-1" strike="noStrike">
-              <a:latin typeface="Arial"/>
-            </a:endParaRPr>
-          </a:p>
-          <a:p>
-            <a:pPr algn="just">
-              <a:buNone/>
-            </a:pPr>
-            <a:endParaRPr b="0" lang="en-US" sz="3200" spc="-1" strike="noStrike">
-              <a:latin typeface="Arial"/>
-            </a:endParaRPr>
-          </a:p>
-          <a:p>
-            <a:pPr algn="just">
-              <a:buNone/>
-            </a:pPr>
-            <a:r>
-              <a:rPr b="1" lang="en-US" sz="1600" spc="-1" strike="noStrike">
-                <a:latin typeface="Arial"/>
-              </a:rPr>
-              <a:t>T</a:t>
-            </a:r>
-            <a:r>
-              <a:rPr b="1" lang="en-US" sz="1600" spc="-1" strike="noStrike">
-                <a:latin typeface="Arial"/>
-              </a:rPr>
-              <a:t>r</a:t>
-            </a:r>
-            <a:r>
-              <a:rPr b="1" lang="en-US" sz="1600" spc="-1" strike="noStrike">
-                <a:latin typeface="Arial"/>
-              </a:rPr>
-              <a:t>u</a:t>
-            </a:r>
-            <a:r>
-              <a:rPr b="1" lang="en-US" sz="1600" spc="-1" strike="noStrike">
-                <a:latin typeface="Arial"/>
-              </a:rPr>
-              <a:t>s</a:t>
-            </a:r>
-            <a:r>
-              <a:rPr b="1" lang="en-US" sz="1600" spc="-1" strike="noStrike">
-                <a:latin typeface="Arial"/>
-              </a:rPr>
-              <a:t>t</a:t>
-            </a:r>
-            <a:r>
-              <a:rPr b="1" lang="en-US" sz="1600" spc="-1" strike="noStrike">
-                <a:latin typeface="Arial"/>
-              </a:rPr>
-              <a:t>w</a:t>
-            </a:r>
-            <a:r>
-              <a:rPr b="1" lang="en-US" sz="1600" spc="-1" strike="noStrike">
-                <a:latin typeface="Arial"/>
-              </a:rPr>
-              <a:t>o</a:t>
-            </a:r>
-            <a:r>
-              <a:rPr b="1" lang="en-US" sz="1600" spc="-1" strike="noStrike">
-                <a:latin typeface="Arial"/>
-              </a:rPr>
-              <a:t>r</a:t>
-            </a:r>
-            <a:r>
-              <a:rPr b="1" lang="en-US" sz="1600" spc="-1" strike="noStrike">
-                <a:latin typeface="Arial"/>
-              </a:rPr>
-              <a:t>t</a:t>
-            </a:r>
-            <a:r>
-              <a:rPr b="1" lang="en-US" sz="1600" spc="-1" strike="noStrike">
-                <a:latin typeface="Arial"/>
-              </a:rPr>
-              <a:t>h</a:t>
-            </a:r>
-            <a:r>
-              <a:rPr b="1" lang="en-US" sz="1600" spc="-1" strike="noStrike">
-                <a:latin typeface="Arial"/>
-              </a:rPr>
-              <a:t>i</a:t>
-            </a:r>
-            <a:r>
-              <a:rPr b="1" lang="en-US" sz="1600" spc="-1" strike="noStrike">
-                <a:latin typeface="Arial"/>
-              </a:rPr>
-              <a:t>n</a:t>
-            </a:r>
-            <a:r>
-              <a:rPr b="1" lang="en-US" sz="1600" spc="-1" strike="noStrike">
-                <a:latin typeface="Arial"/>
-              </a:rPr>
-              <a:t>e</a:t>
-            </a:r>
-            <a:r>
-              <a:rPr b="1" lang="en-US" sz="1600" spc="-1" strike="noStrike">
-                <a:latin typeface="Arial"/>
-              </a:rPr>
-              <a:t>s</a:t>
-            </a:r>
-            <a:r>
-              <a:rPr b="1" lang="en-US" sz="1600" spc="-1" strike="noStrike">
-                <a:latin typeface="Arial"/>
-              </a:rPr>
-              <a:t>s</a:t>
-            </a:r>
-            <a:endParaRPr b="0" lang="en-US" sz="1600" spc="-1" strike="noStrike">
-              <a:latin typeface="Arial"/>
-            </a:endParaRPr>
-          </a:p>
-          <a:p>
-            <a:pPr algn="just">
-              <a:buNone/>
-            </a:pPr>
-            <a:endParaRPr b="0" lang="en-US" sz="1600" spc="-1" strike="noStrike">
-              <a:latin typeface="Arial"/>
-            </a:endParaRPr>
-          </a:p>
-          <a:p>
-            <a:pPr algn="just">
-              <a:buNone/>
-            </a:pPr>
-            <a:r>
-              <a:rPr b="0" lang="en-US" sz="1600" spc="-1" strike="noStrike">
-                <a:latin typeface="Arial"/>
-              </a:rPr>
-              <a:t> </a:t>
-            </a:r>
-            <a:r>
-              <a:rPr b="0" lang="en-US" sz="1600" spc="-1" strike="noStrike">
-                <a:latin typeface="Arial"/>
-              </a:rPr>
-              <a:t> </a:t>
-            </a:r>
-            <a:r>
-              <a:rPr b="0" lang="en-US" sz="1600" spc="-1" strike="noStrike">
-                <a:latin typeface="Arial"/>
-              </a:rPr>
-              <a:t>-</a:t>
-            </a:r>
-            <a:r>
-              <a:rPr b="0" lang="en-US" sz="1600" spc="-1" strike="noStrike">
-                <a:latin typeface="Arial"/>
-              </a:rPr>
-              <a:t> </a:t>
-            </a:r>
-            <a:r>
-              <a:rPr b="0" lang="en-US" sz="1600" spc="-1" strike="noStrike">
-                <a:latin typeface="Arial"/>
-              </a:rPr>
-              <a:t>E</a:t>
-            </a:r>
-            <a:r>
-              <a:rPr b="0" lang="en-US" sz="1600" spc="-1" strike="noStrike">
-                <a:latin typeface="Arial"/>
-              </a:rPr>
-              <a:t>v</a:t>
-            </a:r>
-            <a:r>
-              <a:rPr b="0" lang="en-US" sz="1600" spc="-1" strike="noStrike">
-                <a:latin typeface="Arial"/>
-              </a:rPr>
-              <a:t>e</a:t>
-            </a:r>
-            <a:r>
-              <a:rPr b="0" lang="en-US" sz="1600" spc="-1" strike="noStrike">
-                <a:latin typeface="Arial"/>
-              </a:rPr>
-              <a:t>r</a:t>
-            </a:r>
-            <a:r>
-              <a:rPr b="0" lang="en-US" sz="1600" spc="-1" strike="noStrike">
-                <a:latin typeface="Arial"/>
-              </a:rPr>
-              <a:t>y</a:t>
-            </a:r>
-            <a:r>
-              <a:rPr b="0" lang="en-US" sz="1600" spc="-1" strike="noStrike">
-                <a:latin typeface="Arial"/>
-              </a:rPr>
-              <a:t> </a:t>
-            </a:r>
-            <a:r>
-              <a:rPr b="0" lang="en-US" sz="1600" spc="-1" strike="noStrike">
-                <a:latin typeface="Arial"/>
-              </a:rPr>
-              <a:t>i</a:t>
-            </a:r>
-            <a:r>
-              <a:rPr b="0" lang="en-US" sz="1600" spc="-1" strike="noStrike">
-                <a:latin typeface="Arial"/>
-              </a:rPr>
-              <a:t>d</a:t>
-            </a:r>
-            <a:r>
-              <a:rPr b="0" lang="en-US" sz="1600" spc="-1" strike="noStrike">
-                <a:latin typeface="Arial"/>
-              </a:rPr>
-              <a:t>e</a:t>
-            </a:r>
-            <a:r>
-              <a:rPr b="0" lang="en-US" sz="1600" spc="-1" strike="noStrike">
-                <a:latin typeface="Arial"/>
-              </a:rPr>
-              <a:t>n</a:t>
-            </a:r>
-            <a:r>
-              <a:rPr b="0" lang="en-US" sz="1600" spc="-1" strike="noStrike">
-                <a:latin typeface="Arial"/>
-              </a:rPr>
-              <a:t>t</a:t>
-            </a:r>
-            <a:r>
-              <a:rPr b="0" lang="en-US" sz="1600" spc="-1" strike="noStrike">
-                <a:latin typeface="Arial"/>
-              </a:rPr>
-              <a:t>i</a:t>
-            </a:r>
-            <a:r>
-              <a:rPr b="0" lang="en-US" sz="1600" spc="-1" strike="noStrike">
-                <a:latin typeface="Arial"/>
-              </a:rPr>
-              <a:t>t</a:t>
-            </a:r>
-            <a:r>
-              <a:rPr b="0" lang="en-US" sz="1600" spc="-1" strike="noStrike">
-                <a:latin typeface="Arial"/>
-              </a:rPr>
-              <a:t>y</a:t>
-            </a:r>
-            <a:r>
-              <a:rPr b="0" lang="en-US" sz="1600" spc="-1" strike="noStrike">
-                <a:latin typeface="Arial"/>
-              </a:rPr>
-              <a:t> </a:t>
-            </a:r>
-            <a:r>
-              <a:rPr b="0" lang="en-US" sz="1600" spc="-1" strike="noStrike">
-                <a:latin typeface="Arial"/>
-              </a:rPr>
-              <a:t>f</a:t>
-            </a:r>
-            <a:r>
-              <a:rPr b="0" lang="en-US" sz="1600" spc="-1" strike="noStrike">
-                <a:latin typeface="Arial"/>
-              </a:rPr>
-              <a:t>i</a:t>
-            </a:r>
-            <a:r>
-              <a:rPr b="0" lang="en-US" sz="1600" spc="-1" strike="noStrike">
-                <a:latin typeface="Arial"/>
-              </a:rPr>
-              <a:t>e</a:t>
-            </a:r>
-            <a:r>
-              <a:rPr b="0" lang="en-US" sz="1600" spc="-1" strike="noStrike">
-                <a:latin typeface="Arial"/>
-              </a:rPr>
-              <a:t>l</a:t>
-            </a:r>
-            <a:r>
-              <a:rPr b="0" lang="en-US" sz="1600" spc="-1" strike="noStrike">
-                <a:latin typeface="Arial"/>
-              </a:rPr>
-              <a:t>d</a:t>
-            </a:r>
-            <a:r>
-              <a:rPr b="0" lang="en-US" sz="1600" spc="-1" strike="noStrike">
-                <a:latin typeface="Arial"/>
-              </a:rPr>
-              <a:t> </a:t>
-            </a:r>
-            <a:r>
-              <a:rPr b="0" lang="en-US" sz="1600" spc="-1" strike="noStrike">
-                <a:latin typeface="Arial"/>
-              </a:rPr>
-              <a:t>i</a:t>
-            </a:r>
-            <a:r>
-              <a:rPr b="0" lang="en-US" sz="1600" spc="-1" strike="noStrike">
-                <a:latin typeface="Arial"/>
-              </a:rPr>
-              <a:t>s</a:t>
-            </a:r>
-            <a:r>
-              <a:rPr b="0" lang="en-US" sz="1600" spc="-1" strike="noStrike">
-                <a:latin typeface="Arial"/>
-              </a:rPr>
-              <a:t> </a:t>
-            </a:r>
-            <a:r>
-              <a:rPr b="0" lang="en-US" sz="1600" spc="-1" strike="noStrike">
-                <a:latin typeface="Arial"/>
-              </a:rPr>
-              <a:t>l</a:t>
-            </a:r>
-            <a:r>
-              <a:rPr b="0" lang="en-US" sz="1600" spc="-1" strike="noStrike">
-                <a:latin typeface="Arial"/>
-              </a:rPr>
-              <a:t>a</a:t>
-            </a:r>
-            <a:r>
-              <a:rPr b="0" lang="en-US" sz="1600" spc="-1" strike="noStrike">
-                <a:latin typeface="Arial"/>
-              </a:rPr>
-              <a:t>b</a:t>
-            </a:r>
-            <a:r>
-              <a:rPr b="0" lang="en-US" sz="1600" spc="-1" strike="noStrike">
-                <a:latin typeface="Arial"/>
-              </a:rPr>
-              <a:t>e</a:t>
-            </a:r>
-            <a:r>
-              <a:rPr b="0" lang="en-US" sz="1600" spc="-1" strike="noStrike">
-                <a:latin typeface="Arial"/>
-              </a:rPr>
-              <a:t>l</a:t>
-            </a:r>
-            <a:r>
-              <a:rPr b="0" lang="en-US" sz="1600" spc="-1" strike="noStrike">
-                <a:latin typeface="Arial"/>
-              </a:rPr>
-              <a:t>l</a:t>
-            </a:r>
-            <a:r>
-              <a:rPr b="0" lang="en-US" sz="1600" spc="-1" strike="noStrike">
-                <a:latin typeface="Arial"/>
-              </a:rPr>
-              <a:t>e</a:t>
-            </a:r>
-            <a:r>
-              <a:rPr b="0" lang="en-US" sz="1600" spc="-1" strike="noStrike">
-                <a:latin typeface="Arial"/>
-              </a:rPr>
-              <a:t>d</a:t>
-            </a:r>
-            <a:r>
-              <a:rPr b="0" lang="en-US" sz="1600" spc="-1" strike="noStrike">
-                <a:latin typeface="Arial"/>
-              </a:rPr>
-              <a:t> </a:t>
-            </a:r>
-            <a:r>
-              <a:rPr b="0" lang="en-US" sz="1600" spc="-1" strike="noStrike">
-                <a:latin typeface="Arial"/>
-              </a:rPr>
-              <a:t>s</a:t>
-            </a:r>
-            <a:r>
-              <a:rPr b="0" lang="en-US" sz="1600" spc="-1" strike="noStrike">
-                <a:latin typeface="Arial"/>
-              </a:rPr>
-              <a:t>u</a:t>
-            </a:r>
-            <a:r>
-              <a:rPr b="0" lang="en-US" sz="1600" spc="-1" strike="noStrike">
-                <a:latin typeface="Arial"/>
-              </a:rPr>
-              <a:t>p</a:t>
-            </a:r>
-            <a:r>
-              <a:rPr b="0" lang="en-US" sz="1600" spc="-1" strike="noStrike">
-                <a:latin typeface="Arial"/>
-              </a:rPr>
-              <a:t>p</a:t>
-            </a:r>
-            <a:r>
-              <a:rPr b="0" lang="en-US" sz="1600" spc="-1" strike="noStrike">
-                <a:latin typeface="Arial"/>
-              </a:rPr>
-              <a:t>l</a:t>
-            </a:r>
-            <a:r>
-              <a:rPr b="0" lang="en-US" sz="1600" spc="-1" strike="noStrike">
-                <a:latin typeface="Arial"/>
-              </a:rPr>
-              <a:t>i</a:t>
-            </a:r>
-            <a:r>
-              <a:rPr b="0" lang="en-US" sz="1600" spc="-1" strike="noStrike">
-                <a:latin typeface="Arial"/>
-              </a:rPr>
-              <a:t>e</a:t>
-            </a:r>
-            <a:r>
-              <a:rPr b="0" lang="en-US" sz="1600" spc="-1" strike="noStrike">
-                <a:latin typeface="Arial"/>
-              </a:rPr>
-              <a:t>d</a:t>
-            </a:r>
-            <a:r>
-              <a:rPr b="0" lang="en-US" sz="1600" spc="-1" strike="noStrike">
-                <a:latin typeface="Arial"/>
-              </a:rPr>
-              <a:t> </a:t>
-            </a:r>
-            <a:r>
-              <a:rPr b="0" lang="en-US" sz="1600" spc="-1" strike="noStrike">
-                <a:latin typeface="Arial"/>
-              </a:rPr>
-              <a:t>o</a:t>
-            </a:r>
-            <a:r>
-              <a:rPr b="0" lang="en-US" sz="1600" spc="-1" strike="noStrike">
-                <a:latin typeface="Arial"/>
-              </a:rPr>
-              <a:t>r</a:t>
-            </a:r>
-            <a:r>
-              <a:rPr b="0" lang="en-US" sz="1600" spc="-1" strike="noStrike">
-                <a:latin typeface="Arial"/>
-              </a:rPr>
-              <a:t> </a:t>
-            </a:r>
-            <a:r>
-              <a:rPr b="0" lang="en-US" sz="1600" spc="-1" strike="noStrike">
-                <a:latin typeface="Arial"/>
-              </a:rPr>
-              <a:t>i</a:t>
-            </a:r>
-            <a:r>
-              <a:rPr b="0" lang="en-US" sz="1600" spc="-1" strike="noStrike">
-                <a:latin typeface="Arial"/>
-              </a:rPr>
-              <a:t>n</a:t>
-            </a:r>
-            <a:r>
-              <a:rPr b="0" lang="en-US" sz="1600" spc="-1" strike="noStrike">
-                <a:latin typeface="Arial"/>
-              </a:rPr>
-              <a:t>f</a:t>
-            </a:r>
-            <a:r>
-              <a:rPr b="0" lang="en-US" sz="1600" spc="-1" strike="noStrike">
-                <a:latin typeface="Arial"/>
-              </a:rPr>
-              <a:t>e</a:t>
-            </a:r>
-            <a:r>
-              <a:rPr b="0" lang="en-US" sz="1600" spc="-1" strike="noStrike">
-                <a:latin typeface="Arial"/>
-              </a:rPr>
-              <a:t>r</a:t>
-            </a:r>
-            <a:r>
-              <a:rPr b="0" lang="en-US" sz="1600" spc="-1" strike="noStrike">
-                <a:latin typeface="Arial"/>
-              </a:rPr>
-              <a:t>r</a:t>
-            </a:r>
-            <a:r>
-              <a:rPr b="0" lang="en-US" sz="1600" spc="-1" strike="noStrike">
-                <a:latin typeface="Arial"/>
-              </a:rPr>
-              <a:t>e</a:t>
-            </a:r>
-            <a:r>
-              <a:rPr b="0" lang="en-US" sz="1600" spc="-1" strike="noStrike">
-                <a:latin typeface="Arial"/>
-              </a:rPr>
-              <a:t>d</a:t>
-            </a:r>
-            <a:r>
-              <a:rPr b="0" lang="en-US" sz="1600" spc="-1" strike="noStrike">
-                <a:latin typeface="Arial"/>
-              </a:rPr>
-              <a:t>,</a:t>
-            </a:r>
-            <a:r>
-              <a:rPr b="0" lang="en-US" sz="1600" spc="-1" strike="noStrike">
-                <a:latin typeface="Arial"/>
-              </a:rPr>
-              <a:t> </a:t>
-            </a:r>
-            <a:r>
-              <a:rPr b="0" lang="en-US" sz="1600" spc="-1" strike="noStrike">
-                <a:latin typeface="Arial"/>
-              </a:rPr>
-              <a:t>s</a:t>
-            </a:r>
-            <a:r>
-              <a:rPr b="0" lang="en-US" sz="1600" spc="-1" strike="noStrike">
-                <a:latin typeface="Arial"/>
-              </a:rPr>
-              <a:t>o</a:t>
-            </a:r>
-            <a:r>
-              <a:rPr b="0" lang="en-US" sz="1600" spc="-1" strike="noStrike">
-                <a:latin typeface="Arial"/>
-              </a:rPr>
-              <a:t> </a:t>
-            </a:r>
-            <a:r>
-              <a:rPr b="0" lang="en-US" sz="1600" spc="-1" strike="noStrike">
-                <a:latin typeface="Arial"/>
-              </a:rPr>
-              <a:t>a</a:t>
-            </a:r>
-            <a:r>
-              <a:rPr b="0" lang="en-US" sz="1600" spc="-1" strike="noStrike">
-                <a:latin typeface="Arial"/>
-              </a:rPr>
-              <a:t> </a:t>
-            </a:r>
-            <a:r>
-              <a:rPr b="0" lang="en-US" sz="1600" spc="-1" strike="noStrike">
-                <a:latin typeface="Arial"/>
-              </a:rPr>
-              <a:t>p</a:t>
-            </a:r>
-            <a:r>
-              <a:rPr b="0" lang="en-US" sz="1600" spc="-1" strike="noStrike">
-                <a:latin typeface="Arial"/>
-              </a:rPr>
-              <a:t>l</a:t>
-            </a:r>
-            <a:r>
-              <a:rPr b="0" lang="en-US" sz="1600" spc="-1" strike="noStrike">
-                <a:latin typeface="Arial"/>
-              </a:rPr>
-              <a:t>a</a:t>
-            </a:r>
-            <a:r>
-              <a:rPr b="0" lang="en-US" sz="1600" spc="-1" strike="noStrike">
-                <a:latin typeface="Arial"/>
-              </a:rPr>
-              <a:t>n</a:t>
-            </a:r>
-            <a:r>
-              <a:rPr b="0" lang="en-US" sz="1600" spc="-1" strike="noStrike">
-                <a:latin typeface="Arial"/>
-              </a:rPr>
-              <a:t>n</a:t>
-            </a:r>
-            <a:r>
-              <a:rPr b="0" lang="en-US" sz="1600" spc="-1" strike="noStrike">
-                <a:latin typeface="Arial"/>
-              </a:rPr>
-              <a:t>e</a:t>
-            </a:r>
-            <a:r>
-              <a:rPr b="0" lang="en-US" sz="1600" spc="-1" strike="noStrike">
-                <a:latin typeface="Arial"/>
-              </a:rPr>
-              <a:t>r</a:t>
-            </a:r>
-            <a:r>
-              <a:rPr b="0" lang="en-US" sz="1600" spc="-1" strike="noStrike">
-                <a:latin typeface="Arial"/>
-              </a:rPr>
-              <a:t> </a:t>
-            </a:r>
-            <a:r>
-              <a:rPr b="0" lang="en-US" sz="1600" spc="-1" strike="noStrike">
-                <a:latin typeface="Arial"/>
-              </a:rPr>
-              <a:t>k</a:t>
-            </a:r>
-            <a:r>
-              <a:rPr b="0" lang="en-US" sz="1600" spc="-1" strike="noStrike">
-                <a:latin typeface="Arial"/>
-              </a:rPr>
-              <a:t>n</a:t>
-            </a:r>
-            <a:r>
-              <a:rPr b="0" lang="en-US" sz="1600" spc="-1" strike="noStrike">
-                <a:latin typeface="Arial"/>
-              </a:rPr>
-              <a:t>o</a:t>
-            </a:r>
-            <a:r>
-              <a:rPr b="0" lang="en-US" sz="1600" spc="-1" strike="noStrike">
-                <a:latin typeface="Arial"/>
-              </a:rPr>
-              <a:t>w</a:t>
-            </a:r>
-            <a:r>
-              <a:rPr b="0" lang="en-US" sz="1600" spc="-1" strike="noStrike">
-                <a:latin typeface="Arial"/>
-              </a:rPr>
-              <a:t>s</a:t>
-            </a:r>
-            <a:r>
-              <a:rPr b="0" lang="en-US" sz="1600" spc="-1" strike="noStrike">
-                <a:latin typeface="Arial"/>
-              </a:rPr>
-              <a:t> </a:t>
-            </a:r>
-            <a:r>
-              <a:rPr b="0" lang="en-US" sz="1600" spc="-1" strike="noStrike">
-                <a:latin typeface="Arial"/>
-              </a:rPr>
-              <a:t>w</a:t>
-            </a:r>
-            <a:r>
-              <a:rPr b="0" lang="en-US" sz="1600" spc="-1" strike="noStrike">
-                <a:latin typeface="Arial"/>
-              </a:rPr>
-              <a:t>h</a:t>
-            </a:r>
-            <a:r>
-              <a:rPr b="0" lang="en-US" sz="1600" spc="-1" strike="noStrike">
-                <a:latin typeface="Arial"/>
-              </a:rPr>
-              <a:t>i</a:t>
-            </a:r>
-            <a:r>
-              <a:rPr b="0" lang="en-US" sz="1600" spc="-1" strike="noStrike">
-                <a:latin typeface="Arial"/>
-              </a:rPr>
-              <a:t>c</a:t>
-            </a:r>
-            <a:r>
-              <a:rPr b="0" lang="en-US" sz="1600" spc="-1" strike="noStrike">
-                <a:latin typeface="Arial"/>
-              </a:rPr>
-              <a:t>h</a:t>
-            </a:r>
-            <a:r>
-              <a:rPr b="0" lang="en-US" sz="1600" spc="-1" strike="noStrike">
-                <a:latin typeface="Arial"/>
-              </a:rPr>
-              <a:t> </a:t>
-            </a:r>
-            <a:r>
-              <a:rPr b="0" lang="en-US" sz="1600" spc="-1" strike="noStrike">
-                <a:latin typeface="Arial"/>
-              </a:rPr>
-              <a:t>n</a:t>
-            </a:r>
-            <a:r>
-              <a:rPr b="0" lang="en-US" sz="1600" spc="-1" strike="noStrike">
-                <a:latin typeface="Arial"/>
-              </a:rPr>
-              <a:t>u</a:t>
-            </a:r>
-            <a:r>
-              <a:rPr b="0" lang="en-US" sz="1600" spc="-1" strike="noStrike">
-                <a:latin typeface="Arial"/>
-              </a:rPr>
-              <a:t>m</a:t>
-            </a:r>
-            <a:r>
-              <a:rPr b="0" lang="en-US" sz="1600" spc="-1" strike="noStrike">
-                <a:latin typeface="Arial"/>
-              </a:rPr>
-              <a:t>b</a:t>
-            </a:r>
-            <a:r>
-              <a:rPr b="0" lang="en-US" sz="1600" spc="-1" strike="noStrike">
-                <a:latin typeface="Arial"/>
-              </a:rPr>
-              <a:t>e</a:t>
-            </a:r>
-            <a:r>
-              <a:rPr b="0" lang="en-US" sz="1600" spc="-1" strike="noStrike">
-                <a:latin typeface="Arial"/>
-              </a:rPr>
-              <a:t>r</a:t>
-            </a:r>
-            <a:r>
-              <a:rPr b="0" lang="en-US" sz="1600" spc="-1" strike="noStrike">
-                <a:latin typeface="Arial"/>
-              </a:rPr>
-              <a:t>s</a:t>
-            </a:r>
-            <a:r>
-              <a:rPr b="0" lang="en-US" sz="1600" spc="-1" strike="noStrike">
-                <a:latin typeface="Arial"/>
-              </a:rPr>
-              <a:t> </a:t>
-            </a:r>
-            <a:r>
-              <a:rPr b="0" lang="en-US" sz="1600" spc="-1" strike="noStrike">
-                <a:latin typeface="Arial"/>
-              </a:rPr>
-              <a:t>t</a:t>
-            </a:r>
-            <a:r>
-              <a:rPr b="0" lang="en-US" sz="1600" spc="-1" strike="noStrike">
-                <a:latin typeface="Arial"/>
-              </a:rPr>
-              <a:t>h</a:t>
-            </a:r>
-            <a:r>
-              <a:rPr b="0" lang="en-US" sz="1600" spc="-1" strike="noStrike">
-                <a:latin typeface="Arial"/>
-              </a:rPr>
-              <a:t>e</a:t>
-            </a:r>
-            <a:r>
-              <a:rPr b="0" lang="en-US" sz="1600" spc="-1" strike="noStrike">
-                <a:latin typeface="Arial"/>
-              </a:rPr>
-              <a:t> </a:t>
-            </a:r>
-            <a:r>
-              <a:rPr b="0" lang="en-US" sz="1600" spc="-1" strike="noStrike">
-                <a:latin typeface="Arial"/>
-              </a:rPr>
-              <a:t>m</a:t>
-            </a:r>
-            <a:r>
-              <a:rPr b="0" lang="en-US" sz="1600" spc="-1" strike="noStrike">
-                <a:latin typeface="Arial"/>
-              </a:rPr>
-              <a:t>o</a:t>
-            </a:r>
-            <a:r>
-              <a:rPr b="0" lang="en-US" sz="1600" spc="-1" strike="noStrike">
-                <a:latin typeface="Arial"/>
-              </a:rPr>
-              <a:t>d</a:t>
-            </a:r>
-            <a:r>
-              <a:rPr b="0" lang="en-US" sz="1600" spc="-1" strike="noStrike">
-                <a:latin typeface="Arial"/>
-              </a:rPr>
-              <a:t>e</a:t>
-            </a:r>
-            <a:r>
-              <a:rPr b="0" lang="en-US" sz="1600" spc="-1" strike="noStrike">
-                <a:latin typeface="Arial"/>
-              </a:rPr>
-              <a:t>l</a:t>
-            </a:r>
-            <a:r>
-              <a:rPr b="0" lang="en-US" sz="1600" spc="-1" strike="noStrike">
-                <a:latin typeface="Arial"/>
-              </a:rPr>
-              <a:t> </a:t>
-            </a:r>
-            <a:r>
-              <a:rPr b="0" lang="en-US" sz="1600" spc="-1" strike="noStrike">
-                <a:latin typeface="Arial"/>
-              </a:rPr>
-              <a:t>g</a:t>
-            </a:r>
-            <a:r>
-              <a:rPr b="0" lang="en-US" sz="1600" spc="-1" strike="noStrike">
-                <a:latin typeface="Arial"/>
-              </a:rPr>
-              <a:t>u</a:t>
-            </a:r>
-            <a:r>
-              <a:rPr b="0" lang="en-US" sz="1600" spc="-1" strike="noStrike">
-                <a:latin typeface="Arial"/>
-              </a:rPr>
-              <a:t>e</a:t>
-            </a:r>
-            <a:r>
-              <a:rPr b="0" lang="en-US" sz="1600" spc="-1" strike="noStrike">
-                <a:latin typeface="Arial"/>
-              </a:rPr>
-              <a:t>s</a:t>
-            </a:r>
-            <a:r>
-              <a:rPr b="0" lang="en-US" sz="1600" spc="-1" strike="noStrike">
-                <a:latin typeface="Arial"/>
-              </a:rPr>
-              <a:t>s</a:t>
-            </a:r>
-            <a:r>
-              <a:rPr b="0" lang="en-US" sz="1600" spc="-1" strike="noStrike">
-                <a:latin typeface="Arial"/>
-              </a:rPr>
-              <a:t>e</a:t>
-            </a:r>
-            <a:r>
-              <a:rPr b="0" lang="en-US" sz="1600" spc="-1" strike="noStrike">
-                <a:latin typeface="Arial"/>
-              </a:rPr>
-              <a:t>d</a:t>
-            </a:r>
-            <a:endParaRPr b="0" lang="en-US" sz="1600" spc="-1" strike="noStrike">
-              <a:latin typeface="Arial"/>
-            </a:endParaRPr>
-          </a:p>
-          <a:p>
-            <a:pPr algn="just">
-              <a:buNone/>
-            </a:pPr>
-            <a:r>
-              <a:rPr b="0" lang="en-US" sz="1600" spc="-1" strike="noStrike">
-                <a:latin typeface="Arial"/>
-              </a:rPr>
-              <a:t> </a:t>
-            </a:r>
-            <a:r>
-              <a:rPr b="0" lang="en-US" sz="1600" spc="-1" strike="noStrike">
-                <a:latin typeface="Arial"/>
-              </a:rPr>
-              <a:t> </a:t>
-            </a:r>
-            <a:r>
-              <a:rPr b="0" lang="en-US" sz="1600" spc="-1" strike="noStrike">
-                <a:latin typeface="Arial"/>
-              </a:rPr>
-              <a:t>-</a:t>
-            </a:r>
-            <a:r>
-              <a:rPr b="0" lang="en-US" sz="1600" spc="-1" strike="noStrike">
-                <a:latin typeface="Arial"/>
-              </a:rPr>
-              <a:t> </a:t>
-            </a:r>
-            <a:r>
-              <a:rPr b="0" lang="en-US" sz="1600" spc="-1" strike="noStrike">
-                <a:latin typeface="Arial"/>
-              </a:rPr>
-              <a:t>G</a:t>
-            </a:r>
-            <a:r>
-              <a:rPr b="0" lang="en-US" sz="1600" spc="-1" strike="noStrike">
-                <a:latin typeface="Arial"/>
-              </a:rPr>
-              <a:t>r</a:t>
-            </a:r>
-            <a:r>
-              <a:rPr b="0" lang="en-US" sz="1600" spc="-1" strike="noStrike">
-                <a:latin typeface="Arial"/>
-              </a:rPr>
-              <a:t>a</a:t>
-            </a:r>
-            <a:r>
-              <a:rPr b="0" lang="en-US" sz="1600" spc="-1" strike="noStrike">
-                <a:latin typeface="Arial"/>
-              </a:rPr>
-              <a:t>c</a:t>
-            </a:r>
-            <a:r>
-              <a:rPr b="0" lang="en-US" sz="1600" spc="-1" strike="noStrike">
-                <a:latin typeface="Arial"/>
-              </a:rPr>
-              <a:t>e</a:t>
-            </a:r>
-            <a:r>
-              <a:rPr b="0" lang="en-US" sz="1600" spc="-1" strike="noStrike">
-                <a:latin typeface="Arial"/>
-              </a:rPr>
-              <a:t>f</a:t>
-            </a:r>
-            <a:r>
-              <a:rPr b="0" lang="en-US" sz="1600" spc="-1" strike="noStrike">
-                <a:latin typeface="Arial"/>
-              </a:rPr>
-              <a:t>u</a:t>
-            </a:r>
-            <a:r>
-              <a:rPr b="0" lang="en-US" sz="1600" spc="-1" strike="noStrike">
-                <a:latin typeface="Arial"/>
-              </a:rPr>
-              <a:t>l</a:t>
-            </a:r>
-            <a:r>
-              <a:rPr b="0" lang="en-US" sz="1600" spc="-1" strike="noStrike">
-                <a:latin typeface="Arial"/>
-              </a:rPr>
-              <a:t> </a:t>
-            </a:r>
-            <a:r>
-              <a:rPr b="0" lang="en-US" sz="1600" spc="-1" strike="noStrike">
-                <a:latin typeface="Arial"/>
-              </a:rPr>
-              <a:t>d</a:t>
-            </a:r>
-            <a:r>
-              <a:rPr b="0" lang="en-US" sz="1600" spc="-1" strike="noStrike">
-                <a:latin typeface="Arial"/>
-              </a:rPr>
-              <a:t>e</a:t>
-            </a:r>
-            <a:r>
-              <a:rPr b="0" lang="en-US" sz="1600" spc="-1" strike="noStrike">
-                <a:latin typeface="Arial"/>
-              </a:rPr>
-              <a:t>g</a:t>
-            </a:r>
-            <a:r>
-              <a:rPr b="0" lang="en-US" sz="1600" spc="-1" strike="noStrike">
-                <a:latin typeface="Arial"/>
-              </a:rPr>
-              <a:t>r</a:t>
-            </a:r>
-            <a:r>
-              <a:rPr b="0" lang="en-US" sz="1600" spc="-1" strike="noStrike">
-                <a:latin typeface="Arial"/>
-              </a:rPr>
-              <a:t>a</a:t>
-            </a:r>
-            <a:r>
-              <a:rPr b="0" lang="en-US" sz="1600" spc="-1" strike="noStrike">
-                <a:latin typeface="Arial"/>
-              </a:rPr>
-              <a:t>d</a:t>
-            </a:r>
-            <a:r>
-              <a:rPr b="0" lang="en-US" sz="1600" spc="-1" strike="noStrike">
-                <a:latin typeface="Arial"/>
-              </a:rPr>
-              <a:t>a</a:t>
-            </a:r>
-            <a:r>
-              <a:rPr b="0" lang="en-US" sz="1600" spc="-1" strike="noStrike">
-                <a:latin typeface="Arial"/>
-              </a:rPr>
-              <a:t>t</a:t>
-            </a:r>
-            <a:r>
-              <a:rPr b="0" lang="en-US" sz="1600" spc="-1" strike="noStrike">
-                <a:latin typeface="Arial"/>
-              </a:rPr>
-              <a:t>i</a:t>
-            </a:r>
-            <a:r>
-              <a:rPr b="0" lang="en-US" sz="1600" spc="-1" strike="noStrike">
-                <a:latin typeface="Arial"/>
-              </a:rPr>
-              <a:t>o</a:t>
-            </a:r>
-            <a:r>
-              <a:rPr b="0" lang="en-US" sz="1600" spc="-1" strike="noStrike">
-                <a:latin typeface="Arial"/>
-              </a:rPr>
-              <a:t>n</a:t>
-            </a:r>
-            <a:r>
-              <a:rPr b="0" lang="en-US" sz="1600" spc="-1" strike="noStrike">
-                <a:latin typeface="Arial"/>
-              </a:rPr>
-              <a:t>:</a:t>
-            </a:r>
-            <a:r>
-              <a:rPr b="0" lang="en-US" sz="1600" spc="-1" strike="noStrike">
-                <a:latin typeface="Arial"/>
-              </a:rPr>
-              <a:t> </a:t>
-            </a:r>
-            <a:r>
-              <a:rPr b="0" lang="en-US" sz="1600" spc="-1" strike="noStrike">
-                <a:latin typeface="Arial"/>
-              </a:rPr>
-              <a:t>a</a:t>
-            </a:r>
-            <a:r>
-              <a:rPr b="0" lang="en-US" sz="1600" spc="-1" strike="noStrike">
-                <a:latin typeface="Arial"/>
-              </a:rPr>
-              <a:t> </a:t>
-            </a:r>
-            <a:r>
-              <a:rPr b="0" lang="en-US" sz="1600" spc="-1" strike="noStrike">
-                <a:latin typeface="Arial"/>
-              </a:rPr>
-              <a:t>f</a:t>
-            </a:r>
-            <a:r>
-              <a:rPr b="0" lang="en-US" sz="1600" spc="-1" strike="noStrike">
-                <a:latin typeface="Arial"/>
-              </a:rPr>
-              <a:t>a</a:t>
-            </a:r>
-            <a:r>
-              <a:rPr b="0" lang="en-US" sz="1600" spc="-1" strike="noStrike">
-                <a:latin typeface="Arial"/>
-              </a:rPr>
-              <a:t>i</a:t>
-            </a:r>
-            <a:r>
-              <a:rPr b="0" lang="en-US" sz="1600" spc="-1" strike="noStrike">
-                <a:latin typeface="Arial"/>
-              </a:rPr>
-              <a:t>l</a:t>
-            </a:r>
-            <a:r>
-              <a:rPr b="0" lang="en-US" sz="1600" spc="-1" strike="noStrike">
-                <a:latin typeface="Arial"/>
-              </a:rPr>
-              <a:t>e</a:t>
-            </a:r>
-            <a:r>
-              <a:rPr b="0" lang="en-US" sz="1600" spc="-1" strike="noStrike">
-                <a:latin typeface="Arial"/>
-              </a:rPr>
-              <a:t>d</a:t>
-            </a:r>
-            <a:r>
-              <a:rPr b="0" lang="en-US" sz="1600" spc="-1" strike="noStrike">
-                <a:latin typeface="Arial"/>
-              </a:rPr>
-              <a:t> </a:t>
-            </a:r>
-            <a:r>
-              <a:rPr b="0" lang="en-US" sz="1600" spc="-1" strike="noStrike">
-                <a:latin typeface="Arial"/>
-              </a:rPr>
-              <a:t>a</a:t>
-            </a:r>
-            <a:r>
-              <a:rPr b="0" lang="en-US" sz="1600" spc="-1" strike="noStrike">
-                <a:latin typeface="Arial"/>
-              </a:rPr>
-              <a:t>l</a:t>
-            </a:r>
-            <a:r>
-              <a:rPr b="0" lang="en-US" sz="1600" spc="-1" strike="noStrike">
-                <a:latin typeface="Arial"/>
-              </a:rPr>
-              <a:t>e</a:t>
-            </a:r>
-            <a:r>
-              <a:rPr b="0" lang="en-US" sz="1600" spc="-1" strike="noStrike">
-                <a:latin typeface="Arial"/>
-              </a:rPr>
-              <a:t>r</a:t>
-            </a:r>
-            <a:r>
-              <a:rPr b="0" lang="en-US" sz="1600" spc="-1" strike="noStrike">
-                <a:latin typeface="Arial"/>
-              </a:rPr>
-              <a:t>t</a:t>
-            </a:r>
-            <a:r>
-              <a:rPr b="0" lang="en-US" sz="1600" spc="-1" strike="noStrike">
-                <a:latin typeface="Arial"/>
-              </a:rPr>
-              <a:t> </a:t>
-            </a:r>
-            <a:r>
-              <a:rPr b="0" lang="en-US" sz="1600" spc="-1" strike="noStrike">
-                <a:latin typeface="Arial"/>
-              </a:rPr>
-              <a:t>o</a:t>
-            </a:r>
-            <a:r>
-              <a:rPr b="0" lang="en-US" sz="1600" spc="-1" strike="noStrike">
-                <a:latin typeface="Arial"/>
-              </a:rPr>
-              <a:t>r</a:t>
-            </a:r>
-            <a:r>
-              <a:rPr b="0" lang="en-US" sz="1600" spc="-1" strike="noStrike">
-                <a:latin typeface="Arial"/>
-              </a:rPr>
-              <a:t> </a:t>
-            </a:r>
-            <a:r>
-              <a:rPr b="0" lang="en-US" sz="1600" spc="-1" strike="noStrike">
-                <a:latin typeface="Arial"/>
-              </a:rPr>
-              <a:t>c</a:t>
-            </a:r>
-            <a:r>
-              <a:rPr b="0" lang="en-US" sz="1600" spc="-1" strike="noStrike">
-                <a:latin typeface="Arial"/>
-              </a:rPr>
-              <a:t>l</a:t>
-            </a:r>
-            <a:r>
-              <a:rPr b="0" lang="en-US" sz="1600" spc="-1" strike="noStrike">
-                <a:latin typeface="Arial"/>
-              </a:rPr>
-              <a:t>i</a:t>
-            </a:r>
-            <a:r>
-              <a:rPr b="0" lang="en-US" sz="1600" spc="-1" strike="noStrike">
-                <a:latin typeface="Arial"/>
-              </a:rPr>
-              <a:t>m</a:t>
-            </a:r>
-            <a:r>
-              <a:rPr b="0" lang="en-US" sz="1600" spc="-1" strike="noStrike">
-                <a:latin typeface="Arial"/>
-              </a:rPr>
-              <a:t>a</a:t>
-            </a:r>
-            <a:r>
-              <a:rPr b="0" lang="en-US" sz="1600" spc="-1" strike="noStrike">
-                <a:latin typeface="Arial"/>
-              </a:rPr>
-              <a:t>t</a:t>
-            </a:r>
-            <a:r>
-              <a:rPr b="0" lang="en-US" sz="1600" spc="-1" strike="noStrike">
-                <a:latin typeface="Arial"/>
-              </a:rPr>
-              <a:t>e</a:t>
-            </a:r>
-            <a:r>
-              <a:rPr b="0" lang="en-US" sz="1600" spc="-1" strike="noStrike">
-                <a:latin typeface="Arial"/>
-              </a:rPr>
-              <a:t> </a:t>
-            </a:r>
-            <a:r>
-              <a:rPr b="0" lang="en-US" sz="1600" spc="-1" strike="noStrike">
-                <a:latin typeface="Arial"/>
-              </a:rPr>
-              <a:t>l</a:t>
-            </a:r>
-            <a:r>
-              <a:rPr b="0" lang="en-US" sz="1600" spc="-1" strike="noStrike">
-                <a:latin typeface="Arial"/>
-              </a:rPr>
-              <a:t>o</a:t>
-            </a:r>
-            <a:r>
-              <a:rPr b="0" lang="en-US" sz="1600" spc="-1" strike="noStrike">
-                <a:latin typeface="Arial"/>
-              </a:rPr>
-              <a:t>o</a:t>
-            </a:r>
-            <a:r>
-              <a:rPr b="0" lang="en-US" sz="1600" spc="-1" strike="noStrike">
-                <a:latin typeface="Arial"/>
-              </a:rPr>
-              <a:t>k</a:t>
-            </a:r>
-            <a:r>
-              <a:rPr b="0" lang="en-US" sz="1600" spc="-1" strike="noStrike">
-                <a:latin typeface="Arial"/>
-              </a:rPr>
-              <a:t>u</a:t>
-            </a:r>
-            <a:r>
-              <a:rPr b="0" lang="en-US" sz="1600" spc="-1" strike="noStrike">
-                <a:latin typeface="Arial"/>
-              </a:rPr>
-              <a:t>p</a:t>
-            </a:r>
-            <a:r>
-              <a:rPr b="0" lang="en-US" sz="1600" spc="-1" strike="noStrike">
-                <a:latin typeface="Arial"/>
-              </a:rPr>
-              <a:t> </a:t>
-            </a:r>
-            <a:r>
-              <a:rPr b="0" lang="en-US" sz="1600" spc="-1" strike="noStrike">
-                <a:latin typeface="Arial"/>
-              </a:rPr>
-              <a:t>n</a:t>
-            </a:r>
-            <a:r>
-              <a:rPr b="0" lang="en-US" sz="1600" spc="-1" strike="noStrike">
-                <a:latin typeface="Arial"/>
-              </a:rPr>
-              <a:t>e</a:t>
-            </a:r>
-            <a:r>
-              <a:rPr b="0" lang="en-US" sz="1600" spc="-1" strike="noStrike">
-                <a:latin typeface="Arial"/>
-              </a:rPr>
-              <a:t>v</a:t>
-            </a:r>
-            <a:r>
-              <a:rPr b="0" lang="en-US" sz="1600" spc="-1" strike="noStrike">
-                <a:latin typeface="Arial"/>
-              </a:rPr>
-              <a:t>e</a:t>
-            </a:r>
-            <a:r>
-              <a:rPr b="0" lang="en-US" sz="1600" spc="-1" strike="noStrike">
-                <a:latin typeface="Arial"/>
-              </a:rPr>
-              <a:t>r</a:t>
-            </a:r>
-            <a:r>
-              <a:rPr b="0" lang="en-US" sz="1600" spc="-1" strike="noStrike">
-                <a:latin typeface="Arial"/>
-              </a:rPr>
-              <a:t> </a:t>
-            </a:r>
-            <a:r>
-              <a:rPr b="0" lang="en-US" sz="1600" spc="-1" strike="noStrike">
-                <a:latin typeface="Arial"/>
-              </a:rPr>
-              <a:t>f</a:t>
-            </a:r>
-            <a:r>
-              <a:rPr b="0" lang="en-US" sz="1600" spc="-1" strike="noStrike">
-                <a:latin typeface="Arial"/>
-              </a:rPr>
-              <a:t>a</a:t>
-            </a:r>
-            <a:r>
-              <a:rPr b="0" lang="en-US" sz="1600" spc="-1" strike="noStrike">
-                <a:latin typeface="Arial"/>
-              </a:rPr>
-              <a:t>i</a:t>
-            </a:r>
-            <a:r>
-              <a:rPr b="0" lang="en-US" sz="1600" spc="-1" strike="noStrike">
-                <a:latin typeface="Arial"/>
-              </a:rPr>
-              <a:t>l</a:t>
-            </a:r>
-            <a:r>
-              <a:rPr b="0" lang="en-US" sz="1600" spc="-1" strike="noStrike">
-                <a:latin typeface="Arial"/>
-              </a:rPr>
-              <a:t>s</a:t>
-            </a:r>
-            <a:r>
-              <a:rPr b="0" lang="en-US" sz="1600" spc="-1" strike="noStrike">
-                <a:latin typeface="Arial"/>
-              </a:rPr>
-              <a:t> </a:t>
-            </a:r>
-            <a:r>
-              <a:rPr b="0" lang="en-US" sz="1600" spc="-1" strike="noStrike">
-                <a:latin typeface="Arial"/>
-              </a:rPr>
-              <a:t>t</a:t>
-            </a:r>
-            <a:r>
-              <a:rPr b="0" lang="en-US" sz="1600" spc="-1" strike="noStrike">
-                <a:latin typeface="Arial"/>
-              </a:rPr>
-              <a:t>h</a:t>
-            </a:r>
-            <a:r>
-              <a:rPr b="0" lang="en-US" sz="1600" spc="-1" strike="noStrike">
-                <a:latin typeface="Arial"/>
-              </a:rPr>
-              <a:t>e</a:t>
-            </a:r>
-            <a:r>
-              <a:rPr b="0" lang="en-US" sz="1600" spc="-1" strike="noStrike">
-                <a:latin typeface="Arial"/>
-              </a:rPr>
-              <a:t> </a:t>
-            </a:r>
-            <a:r>
-              <a:rPr b="0" lang="en-US" sz="1600" spc="-1" strike="noStrike">
-                <a:latin typeface="Arial"/>
-              </a:rPr>
-              <a:t>a</a:t>
-            </a:r>
-            <a:r>
-              <a:rPr b="0" lang="en-US" sz="1600" spc="-1" strike="noStrike">
-                <a:latin typeface="Arial"/>
-              </a:rPr>
-              <a:t>n</a:t>
-            </a:r>
-            <a:r>
-              <a:rPr b="0" lang="en-US" sz="1600" spc="-1" strike="noStrike">
-                <a:latin typeface="Arial"/>
-              </a:rPr>
-              <a:t>a</a:t>
-            </a:r>
-            <a:r>
-              <a:rPr b="0" lang="en-US" sz="1600" spc="-1" strike="noStrike">
-                <a:latin typeface="Arial"/>
-              </a:rPr>
-              <a:t>l</a:t>
-            </a:r>
-            <a:r>
-              <a:rPr b="0" lang="en-US" sz="1600" spc="-1" strike="noStrike">
-                <a:latin typeface="Arial"/>
-              </a:rPr>
-              <a:t>y</a:t>
-            </a:r>
-            <a:r>
-              <a:rPr b="0" lang="en-US" sz="1600" spc="-1" strike="noStrike">
-                <a:latin typeface="Arial"/>
-              </a:rPr>
-              <a:t>s</a:t>
-            </a:r>
-            <a:r>
-              <a:rPr b="0" lang="en-US" sz="1600" spc="-1" strike="noStrike">
-                <a:latin typeface="Arial"/>
-              </a:rPr>
-              <a:t>i</a:t>
-            </a:r>
-            <a:r>
-              <a:rPr b="0" lang="en-US" sz="1600" spc="-1" strike="noStrike">
-                <a:latin typeface="Arial"/>
-              </a:rPr>
-              <a:t>s</a:t>
+              <a:t>- Graceful degradation: a failed alert or climate lookup never fails the analysis</a:t>
             </a:r>
             <a:endParaRPr b="0" lang="en-US" sz="1600" spc="-1" strike="noStrike">
               <a:latin typeface="Arial"/>
@@ -8477,13 +6102,13 @@
         </p:nvPicPr>
         <p:blipFill>
           <a:blip r:embed="rId1"/>
-          <a:srcRect l="0" t="0" r="0" b="98010"/>
+          <a:srcRect l="0" t="0" r="0" b="98031"/>
           <a:stretch/>
         </p:blipFill>
         <p:spPr>
           <a:xfrm>
             <a:off x="0" y="5093640"/>
-            <a:ext cx="9143640" cy="54000"/>
+            <a:ext cx="9142920" cy="53280"/>
           </a:xfrm>
           <a:prstGeom prst="rect">
             <a:avLst/>
@@ -8506,7 +6131,7 @@
         <p:spPr>
           <a:xfrm>
             <a:off x="0" y="0"/>
-            <a:ext cx="9143640" cy="506880"/>
+            <a:ext cx="9142920" cy="506160"/>
           </a:xfrm>
           <a:prstGeom prst="rect">
             <a:avLst/>
@@ -8525,7 +6150,7 @@
         <p:spPr>
           <a:xfrm>
             <a:off x="-29160" y="5072040"/>
-            <a:ext cx="9173160" cy="97560"/>
+            <a:ext cx="9172440" cy="96840"/>
           </a:xfrm>
           <a:prstGeom prst="rect">
             <a:avLst/>
@@ -8553,7 +6178,7 @@
         <p:spPr>
           <a:xfrm>
             <a:off x="265320" y="663840"/>
-            <a:ext cx="8942760" cy="561600"/>
+            <a:ext cx="8942040" cy="560880"/>
           </a:xfrm>
           <a:prstGeom prst="rect">
             <a:avLst/>
@@ -8570,7 +6195,7 @@
           <a:fontRef idx="minor"/>
         </p:style>
         <p:txBody>
-          <a:bodyPr tIns="91440" bIns="91440" anchor="t">
+          <a:bodyPr lIns="90000" rIns="90000" tIns="91440" bIns="91440" anchor="t">
             <a:noAutofit/>
           </a:bodyPr>
           <a:p>
@@ -8593,7 +6218,7 @@
               </a:rPr>
               <a:t>Process flow diagram or Use-case diagram</a:t>
             </a:r>
-            <a:endParaRPr b="1" lang="en-US" sz="1600" spc="-1" strike="noStrike">
+            <a:endParaRPr b="0" lang="en-US" sz="1600" spc="-1" strike="noStrike">
               <a:latin typeface="Arial"/>
             </a:endParaRPr>
           </a:p>
@@ -8612,7 +6237,7 @@
         <p:spPr>
           <a:xfrm>
             <a:off x="722520" y="1105200"/>
-            <a:ext cx="7049880" cy="3466800"/>
+            <a:ext cx="7049160" cy="3466080"/>
           </a:xfrm>
           <a:prstGeom prst="rect">
             <a:avLst/>
@@ -8625,13 +6250,13 @@
       <p:sp>
         <p:nvSpPr>
           <p:cNvPr id="66" name=""/>
-          <p:cNvSpPr txBox="1"/>
+          <p:cNvSpPr/>
           <p:nvPr/>
         </p:nvSpPr>
         <p:spPr>
           <a:xfrm>
             <a:off x="265320" y="4341240"/>
-            <a:ext cx="8650080" cy="993240"/>
+            <a:ext cx="8649360" cy="992520"/>
           </a:xfrm>
           <a:prstGeom prst="rect">
             <a:avLst/>
@@ -8641,14 +6266,30 @@
             <a:noFill/>
           </a:ln>
         </p:spPr>
+        <p:style>
+          <a:lnRef idx="0"/>
+          <a:fillRef idx="0"/>
+          <a:effectRef idx="0"/>
+          <a:fontRef idx="minor"/>
+        </p:style>
         <p:txBody>
           <a:bodyPr lIns="90000" rIns="90000" tIns="45000" bIns="45000" anchor="t">
             <a:noAutofit/>
           </a:bodyPr>
           <a:p>
+            <a:pPr>
+              <a:lnSpc>
+                <a:spcPct val="100000"/>
+              </a:lnSpc>
+              <a:buNone/>
+            </a:pPr>
             <a:r>
               <a:rPr b="0" lang="en-US" sz="1500" spc="-1" strike="noStrike">
-                <a:latin typeface="Arial"/>
+                <a:solidFill>
+                  <a:srgbClr val="000000"/>
+                </a:solidFill>
+                <a:latin typeface="Arial"/>
+                <a:ea typeface="DejaVu Sans"/>
               </a:rPr>
               <a:t>Caption: Operator to retrofit plan.</a:t>
             </a:r>
@@ -8657,9 +6298,19 @@
             </a:endParaRPr>
           </a:p>
           <a:p>
+            <a:pPr>
+              <a:lnSpc>
+                <a:spcPct val="100000"/>
+              </a:lnSpc>
+              <a:buNone/>
+            </a:pPr>
             <a:r>
               <a:rPr b="0" lang="en-US" sz="1500" spc="-1" strike="noStrike">
-                <a:latin typeface="Arial"/>
+                <a:solidFill>
+                  <a:srgbClr val="000000"/>
+                </a:solidFill>
+                <a:latin typeface="Arial"/>
+                <a:ea typeface="DejaVu Sans"/>
               </a:rPr>
               <a:t>Steps 3-6 are independent: a failed alert or climate lookup degrades the report, it never fails the analysis.</a:t>
             </a:r>
@@ -8707,13 +6358,13 @@
         </p:nvPicPr>
         <p:blipFill>
           <a:blip r:embed="rId1"/>
-          <a:srcRect l="0" t="0" r="0" b="98010"/>
+          <a:srcRect l="0" t="0" r="0" b="98031"/>
           <a:stretch/>
         </p:blipFill>
         <p:spPr>
           <a:xfrm>
             <a:off x="0" y="5093640"/>
-            <a:ext cx="9143640" cy="54000"/>
+            <a:ext cx="9142920" cy="53280"/>
           </a:xfrm>
           <a:prstGeom prst="rect">
             <a:avLst/>
@@ -8736,7 +6387,7 @@
         <p:spPr>
           <a:xfrm>
             <a:off x="0" y="0"/>
-            <a:ext cx="9143640" cy="506880"/>
+            <a:ext cx="9142920" cy="506160"/>
           </a:xfrm>
           <a:prstGeom prst="rect">
             <a:avLst/>
@@ -8755,7 +6406,7 @@
         <p:spPr>
           <a:xfrm>
             <a:off x="-29160" y="5072040"/>
-            <a:ext cx="9173160" cy="97560"/>
+            <a:ext cx="9172440" cy="96840"/>
           </a:xfrm>
           <a:prstGeom prst="rect">
             <a:avLst/>
@@ -8787,7 +6438,7 @@
         <p:spPr>
           <a:xfrm>
             <a:off x="1143000" y="928440"/>
-            <a:ext cx="7086600" cy="3764880"/>
+            <a:ext cx="7085880" cy="3764160"/>
           </a:xfrm>
           <a:prstGeom prst="rect">
             <a:avLst/>
@@ -8806,7 +6457,7 @@
         <p:spPr>
           <a:xfrm>
             <a:off x="265320" y="663840"/>
-            <a:ext cx="8942760" cy="561600"/>
+            <a:ext cx="8942040" cy="560880"/>
           </a:xfrm>
           <a:prstGeom prst="rect">
             <a:avLst/>
@@ -8823,7 +6474,7 @@
           <a:fontRef idx="minor"/>
         </p:style>
         <p:txBody>
-          <a:bodyPr tIns="91440" bIns="91440" anchor="t">
+          <a:bodyPr lIns="90000" rIns="90000" tIns="91440" bIns="91440" anchor="t">
             <a:noAutofit/>
           </a:bodyPr>
           <a:p>
@@ -8846,7 +6497,7 @@
               </a:rPr>
               <a:t>Architecture diagram of the proposed solution</a:t>
             </a:r>
-            <a:endParaRPr b="1" lang="en-US" sz="1600" spc="-1" strike="noStrike">
+            <a:endParaRPr b="0" lang="en-US" sz="1600" spc="-1" strike="noStrike">
               <a:latin typeface="Arial"/>
             </a:endParaRPr>
           </a:p>
@@ -8855,13 +6506,13 @@
       <p:sp>
         <p:nvSpPr>
           <p:cNvPr id="72" name=""/>
-          <p:cNvSpPr txBox="1"/>
+          <p:cNvSpPr/>
           <p:nvPr/>
         </p:nvSpPr>
         <p:spPr>
           <a:xfrm>
             <a:off x="609120" y="4539240"/>
-            <a:ext cx="8458200" cy="707400"/>
+            <a:ext cx="8457480" cy="706680"/>
           </a:xfrm>
           <a:prstGeom prst="rect">
             <a:avLst/>
@@ -8871,22 +6522,32 @@
             <a:noFill/>
           </a:ln>
         </p:spPr>
+        <p:style>
+          <a:lnRef idx="0"/>
+          <a:fillRef idx="0"/>
+          <a:effectRef idx="0"/>
+          <a:fontRef idx="minor"/>
+        </p:style>
         <p:txBody>
           <a:bodyPr lIns="90000" rIns="90000" tIns="45000" bIns="45000" anchor="t">
             <a:noAutofit/>
           </a:bodyPr>
           <a:p>
+            <a:pPr>
+              <a:lnSpc>
+                <a:spcPct val="100000"/>
+              </a:lnSpc>
+              <a:buNone/>
+            </a:pPr>
             <a:r>
               <a:rPr b="0" lang="en-US" sz="1600" spc="-1" strike="noStrike">
-                <a:latin typeface="Arial"/>
-              </a:rPr>
-              <a:t>Caption: Two containers on Cloud Run in asia-southeast1. The Maps key is mounted from </a:t>
-            </a:r>
-            <a:r>
-              <a:rPr b="0" lang="en-US" sz="1600" spc="-1" strike="noStrike">
-                <a:latin typeface="Arial"/>
-              </a:rPr>
-              <a:t>Secret Manager and proxied by the backend, so it never reaches a browser.</a:t>
+                <a:solidFill>
+                  <a:srgbClr val="000000"/>
+                </a:solidFill>
+                <a:latin typeface="Arial"/>
+                <a:ea typeface="DejaVu Sans"/>
+              </a:rPr>
+              <a:t>Caption: Two containers on Cloud Run in asia-southeast1. The Maps key is mounted from Secret Manager and proxied by the backend, so it never reaches a browser.</a:t>
             </a:r>
             <a:endParaRPr b="0" lang="en-US" sz="1600" spc="-1" strike="noStrike">
               <a:latin typeface="Arial"/>
@@ -8932,13 +6593,13 @@
         </p:nvPicPr>
         <p:blipFill>
           <a:blip r:embed="rId1"/>
-          <a:srcRect l="0" t="0" r="0" b="98010"/>
+          <a:srcRect l="0" t="0" r="0" b="98031"/>
           <a:stretch/>
         </p:blipFill>
         <p:spPr>
           <a:xfrm>
             <a:off x="0" y="5093640"/>
-            <a:ext cx="9143640" cy="54000"/>
+            <a:ext cx="9142920" cy="53280"/>
           </a:xfrm>
           <a:prstGeom prst="rect">
             <a:avLst/>
@@ -8961,7 +6622,7 @@
         <p:spPr>
           <a:xfrm>
             <a:off x="0" y="0"/>
-            <a:ext cx="9143640" cy="506880"/>
+            <a:ext cx="9142920" cy="506160"/>
           </a:xfrm>
           <a:prstGeom prst="rect">
             <a:avLst/>
@@ -8980,7 +6641,7 @@
         <p:spPr>
           <a:xfrm>
             <a:off x="-29160" y="5072040"/>
-            <a:ext cx="9173160" cy="97560"/>
+            <a:ext cx="9172440" cy="96840"/>
           </a:xfrm>
           <a:prstGeom prst="rect">
             <a:avLst/>
@@ -9008,7 +6669,7 @@
         <p:spPr>
           <a:xfrm>
             <a:off x="265320" y="663840"/>
-            <a:ext cx="8942760" cy="561600"/>
+            <a:ext cx="8942040" cy="560880"/>
           </a:xfrm>
           <a:prstGeom prst="rect">
             <a:avLst/>
@@ -9025,7 +6686,7 @@
           <a:fontRef idx="minor"/>
         </p:style>
         <p:txBody>
-          <a:bodyPr tIns="91440" bIns="91440" anchor="t">
+          <a:bodyPr lIns="90000" rIns="90000" tIns="91440" bIns="91440" anchor="t">
             <a:noAutofit/>
           </a:bodyPr>
           <a:p>
@@ -9057,13 +6718,13 @@
       <p:sp>
         <p:nvSpPr>
           <p:cNvPr id="77" name=""/>
-          <p:cNvSpPr txBox="1"/>
+          <p:cNvSpPr/>
           <p:nvPr/>
         </p:nvSpPr>
         <p:spPr>
           <a:xfrm>
             <a:off x="265320" y="1225440"/>
-            <a:ext cx="8650080" cy="3575160"/>
+            <a:ext cx="8649360" cy="3574440"/>
           </a:xfrm>
           <a:prstGeom prst="rect">
             <a:avLst/>
@@ -9073,17 +6734,30 @@
             <a:noFill/>
           </a:ln>
         </p:spPr>
+        <p:style>
+          <a:lnRef idx="0"/>
+          <a:fillRef idx="0"/>
+          <a:effectRef idx="0"/>
+          <a:fontRef idx="minor"/>
+        </p:style>
         <p:txBody>
           <a:bodyPr lIns="90000" rIns="90000" tIns="45000" bIns="45000" anchor="t">
             <a:noAutofit/>
           </a:bodyPr>
           <a:p>
             <a:pPr algn="just">
+              <a:lnSpc>
+                <a:spcPct val="100000"/>
+              </a:lnSpc>
               <a:buNone/>
             </a:pPr>
             <a:r>
               <a:rPr b="1" lang="en-US" sz="1600" spc="-1" strike="noStrike">
-                <a:latin typeface="Arial"/>
+                <a:solidFill>
+                  <a:srgbClr val="000000"/>
+                </a:solidFill>
+                <a:latin typeface="Arial"/>
+                <a:ea typeface="DejaVu Sans"/>
               </a:rPr>
               <a:t>Google Cloud:</a:t>
             </a:r>
@@ -9093,17 +6767,28 @@
           </a:p>
           <a:p>
             <a:pPr algn="just">
+              <a:lnSpc>
+                <a:spcPct val="100000"/>
+              </a:lnSpc>
               <a:buNone/>
             </a:pPr>
             <a:r>
               <a:rPr b="0" lang="en-US" sz="1600" spc="-1" strike="noStrike">
-                <a:latin typeface="Arial"/>
+                <a:solidFill>
+                  <a:srgbClr val="000000"/>
+                </a:solidFill>
+                <a:latin typeface="Arial"/>
+                <a:ea typeface="DejaVu Sans"/>
               </a:rPr>
               <a:t>  </a:t>
             </a:r>
             <a:r>
               <a:rPr b="0" lang="en-US" sz="1600" spc="-1" strike="noStrike">
-                <a:latin typeface="Arial"/>
+                <a:solidFill>
+                  <a:srgbClr val="000000"/>
+                </a:solidFill>
+                <a:latin typeface="Arial"/>
+                <a:ea typeface="DejaVu Sans"/>
               </a:rPr>
               <a:t>- Gemini 2.5 Flash (Vertex AI) — multimodal analysis with an enforced JSON schema</a:t>
             </a:r>
@@ -9113,17 +6798,28 @@
           </a:p>
           <a:p>
             <a:pPr algn="just">
+              <a:lnSpc>
+                <a:spcPct val="100000"/>
+              </a:lnSpc>
               <a:buNone/>
             </a:pPr>
             <a:r>
               <a:rPr b="0" lang="en-US" sz="1600" spc="-1" strike="noStrike">
-                <a:latin typeface="Arial"/>
+                <a:solidFill>
+                  <a:srgbClr val="000000"/>
+                </a:solidFill>
+                <a:latin typeface="Arial"/>
+                <a:ea typeface="DejaVu Sans"/>
               </a:rPr>
               <a:t>  </a:t>
             </a:r>
             <a:r>
               <a:rPr b="0" lang="en-US" sz="1600" spc="-1" strike="noStrike">
-                <a:latin typeface="Arial"/>
+                <a:solidFill>
+                  <a:srgbClr val="000000"/>
+                </a:solidFill>
+                <a:latin typeface="Arial"/>
+                <a:ea typeface="DejaVu Sans"/>
               </a:rPr>
               <a:t>- Cloud Run — both services, containerized, scale to zero, asia-southeast1</a:t>
             </a:r>
@@ -9133,25 +6829,61 @@
           </a:p>
           <a:p>
             <a:pPr algn="just">
+              <a:lnSpc>
+                <a:spcPct val="100000"/>
+              </a:lnSpc>
               <a:buNone/>
             </a:pPr>
             <a:r>
               <a:rPr b="0" lang="en-US" sz="1600" spc="-1" strike="noStrike">
-                <a:latin typeface="Arial"/>
+                <a:solidFill>
+                  <a:srgbClr val="000000"/>
+                </a:solidFill>
+                <a:latin typeface="Arial"/>
+                <a:ea typeface="DejaVu Sans"/>
               </a:rPr>
               <a:t>  </a:t>
             </a:r>
             <a:r>
               <a:rPr b="0" lang="en-US" sz="1600" spc="-1" strike="noStrike">
-                <a:latin typeface="Arial"/>
-              </a:rPr>
-              <a:t>- Firebase — Firestore as the system of record, Hosting for the public alert wall, and security </a:t>
-            </a:r>
+                <a:solidFill>
+                  <a:srgbClr val="000000"/>
+                </a:solidFill>
+                <a:latin typeface="Arial"/>
+                <a:ea typeface="DejaVu Sans"/>
+              </a:rPr>
+              <a:t>- Firebase — Firestore as the system of record, Hosting for the public alert wall, and security rules making curated alerts world-readable but never writable</a:t>
+            </a:r>
+            <a:endParaRPr b="0" lang="en-US" sz="1600" spc="-1" strike="noStrike">
+              <a:latin typeface="Arial"/>
+            </a:endParaRPr>
+          </a:p>
+          <a:p>
+            <a:pPr algn="just">
+              <a:lnSpc>
+                <a:spcPct val="100000"/>
+              </a:lnSpc>
+              <a:buNone/>
+            </a:pPr>
             <a:r>
               <a:rPr b="0" lang="en-US" sz="1600" spc="-1" strike="noStrike">
-                <a:latin typeface="Arial"/>
-              </a:rPr>
-              <a:t>rules making curated alerts world-readable but never writable</a:t>
+                <a:solidFill>
+                  <a:srgbClr val="000000"/>
+                </a:solidFill>
+                <a:latin typeface="Arial"/>
+                <a:ea typeface="DejaVu Sans"/>
+              </a:rPr>
+              <a:t>  </a:t>
+            </a:r>
+            <a:r>
+              <a:rPr b="0" lang="en-US" sz="1600" spc="-1" strike="noStrike">
+                <a:solidFill>
+                  <a:srgbClr val="000000"/>
+                </a:solidFill>
+                <a:latin typeface="Arial"/>
+                <a:ea typeface="DejaVu Sans"/>
+              </a:rPr>
+              <a:t>- BigQuery — NOAA GSOD public dataset for live ambient temperature</a:t>
             </a:r>
             <a:endParaRPr b="0" lang="en-US" sz="1600" spc="-1" strike="noStrike">
               <a:latin typeface="Arial"/>
@@ -9159,19 +6891,30 @@
           </a:p>
           <a:p>
             <a:pPr algn="just">
+              <a:lnSpc>
+                <a:spcPct val="100000"/>
+              </a:lnSpc>
               <a:buNone/>
             </a:pPr>
             <a:r>
               <a:rPr b="0" lang="en-US" sz="1600" spc="-1" strike="noStrike">
-                <a:latin typeface="Arial"/>
+                <a:solidFill>
+                  <a:srgbClr val="000000"/>
+                </a:solidFill>
+                <a:latin typeface="Arial"/>
+                <a:ea typeface="DejaVu Sans"/>
               </a:rPr>
               <a:t>  </a:t>
             </a:r>
             <a:r>
               <a:rPr b="0" lang="en-US" sz="1600" spc="-1" strike="noStrike">
-                <a:latin typeface="Arial"/>
-              </a:rPr>
-              <a:t>- BigQuery — NOAA GSOD public dataset for live ambient temperature</a:t>
+                <a:solidFill>
+                  <a:srgbClr val="000000"/>
+                </a:solidFill>
+                <a:latin typeface="Arial"/>
+                <a:ea typeface="DejaVu Sans"/>
+              </a:rPr>
+              <a:t>- Pub/Sub — critical-zone alert fan-out</a:t>
             </a:r>
             <a:endParaRPr b="0" lang="en-US" sz="1600" spc="-1" strike="noStrike">
               <a:latin typeface="Arial"/>
@@ -9179,19 +6922,30 @@
           </a:p>
           <a:p>
             <a:pPr algn="just">
+              <a:lnSpc>
+                <a:spcPct val="100000"/>
+              </a:lnSpc>
               <a:buNone/>
             </a:pPr>
             <a:r>
               <a:rPr b="0" lang="en-US" sz="1600" spc="-1" strike="noStrike">
-                <a:latin typeface="Arial"/>
+                <a:solidFill>
+                  <a:srgbClr val="000000"/>
+                </a:solidFill>
+                <a:latin typeface="Arial"/>
+                <a:ea typeface="DejaVu Sans"/>
               </a:rPr>
               <a:t>  </a:t>
             </a:r>
             <a:r>
               <a:rPr b="0" lang="en-US" sz="1600" spc="-1" strike="noStrike">
-                <a:latin typeface="Arial"/>
-              </a:rPr>
-              <a:t>- Pub/Sub — critical-zone alert fan-out</a:t>
+                <a:solidFill>
+                  <a:srgbClr val="000000"/>
+                </a:solidFill>
+                <a:latin typeface="Arial"/>
+                <a:ea typeface="DejaVu Sans"/>
+              </a:rPr>
+              <a:t>- Cloud Storage — imagery cache shared across instances</a:t>
             </a:r>
             <a:endParaRPr b="0" lang="en-US" sz="1600" spc="-1" strike="noStrike">
               <a:latin typeface="Arial"/>
@@ -9199,19 +6953,30 @@
           </a:p>
           <a:p>
             <a:pPr algn="just">
+              <a:lnSpc>
+                <a:spcPct val="100000"/>
+              </a:lnSpc>
               <a:buNone/>
             </a:pPr>
             <a:r>
               <a:rPr b="0" lang="en-US" sz="1600" spc="-1" strike="noStrike">
-                <a:latin typeface="Arial"/>
+                <a:solidFill>
+                  <a:srgbClr val="000000"/>
+                </a:solidFill>
+                <a:latin typeface="Arial"/>
+                <a:ea typeface="DejaVu Sans"/>
               </a:rPr>
               <a:t>  </a:t>
             </a:r>
             <a:r>
               <a:rPr b="0" lang="en-US" sz="1600" spc="-1" strike="noStrike">
-                <a:latin typeface="Arial"/>
-              </a:rPr>
-              <a:t>- Cloud Storage — imagery cache shared across instances</a:t>
+                <a:solidFill>
+                  <a:srgbClr val="000000"/>
+                </a:solidFill>
+                <a:latin typeface="Arial"/>
+                <a:ea typeface="DejaVu Sans"/>
+              </a:rPr>
+              <a:t>- Maps Static, Geocoding and Places APIs — imagery, place search and reverse naming, all proxied server-side</a:t>
             </a:r>
             <a:endParaRPr b="0" lang="en-US" sz="1600" spc="-1" strike="noStrike">
               <a:latin typeface="Arial"/>
@@ -9219,25 +6984,93 @@
           </a:p>
           <a:p>
             <a:pPr algn="just">
+              <a:lnSpc>
+                <a:spcPct val="100000"/>
+              </a:lnSpc>
               <a:buNone/>
             </a:pPr>
             <a:r>
               <a:rPr b="0" lang="en-US" sz="1600" spc="-1" strike="noStrike">
-                <a:latin typeface="Arial"/>
+                <a:solidFill>
+                  <a:srgbClr val="000000"/>
+                </a:solidFill>
+                <a:latin typeface="Arial"/>
+                <a:ea typeface="DejaVu Sans"/>
               </a:rPr>
               <a:t>  </a:t>
             </a:r>
             <a:r>
               <a:rPr b="0" lang="en-US" sz="1600" spc="-1" strike="noStrike">
-                <a:latin typeface="Arial"/>
-              </a:rPr>
-              <a:t>- Maps Static, Geocoding and Places APIs — imagery, place search and reverse naming, all </a:t>
-            </a:r>
+                <a:solidFill>
+                  <a:srgbClr val="000000"/>
+                </a:solidFill>
+                <a:latin typeface="Arial"/>
+                <a:ea typeface="DejaVu Sans"/>
+              </a:rPr>
+              <a:t>- Secret Manager · Artifact Registry · Cloud Build</a:t>
+            </a:r>
+            <a:endParaRPr b="0" lang="en-US" sz="1600" spc="-1" strike="noStrike">
+              <a:latin typeface="Arial"/>
+            </a:endParaRPr>
+          </a:p>
+          <a:p>
+            <a:pPr algn="just">
+              <a:lnSpc>
+                <a:spcPct val="100000"/>
+              </a:lnSpc>
+              <a:buNone/>
+            </a:pPr>
+            <a:endParaRPr b="0" lang="en-US" sz="1800" spc="-1" strike="noStrike">
+              <a:latin typeface="Arial"/>
+            </a:endParaRPr>
+          </a:p>
+          <a:p>
+            <a:pPr algn="just">
+              <a:lnSpc>
+                <a:spcPct val="100000"/>
+              </a:lnSpc>
+              <a:buNone/>
+            </a:pPr>
+            <a:r>
+              <a:rPr b="1" lang="en-US" sz="1600" spc="-1" strike="noStrike">
+                <a:solidFill>
+                  <a:srgbClr val="000000"/>
+                </a:solidFill>
+                <a:latin typeface="Arial"/>
+                <a:ea typeface="DejaVu Sans"/>
+              </a:rPr>
+              <a:t>Application:</a:t>
+            </a:r>
+            <a:endParaRPr b="0" lang="en-US" sz="1600" spc="-1" strike="noStrike">
+              <a:latin typeface="Arial"/>
+            </a:endParaRPr>
+          </a:p>
+          <a:p>
+            <a:pPr algn="just">
+              <a:lnSpc>
+                <a:spcPct val="100000"/>
+              </a:lnSpc>
+              <a:buNone/>
+            </a:pPr>
             <a:r>
               <a:rPr b="0" lang="en-US" sz="1600" spc="-1" strike="noStrike">
-                <a:latin typeface="Arial"/>
-              </a:rPr>
-              <a:t>proxied server-side</a:t>
+                <a:solidFill>
+                  <a:srgbClr val="000000"/>
+                </a:solidFill>
+                <a:latin typeface="Arial"/>
+                <a:ea typeface="DejaVu Sans"/>
+              </a:rPr>
+              <a:t>  </a:t>
+            </a:r>
+            <a:r>
+              <a:rPr b="0" lang="en-US" sz="1600" spc="-1" strike="noStrike">
+                <a:solidFill>
+                  <a:srgbClr val="000000"/>
+                </a:solidFill>
+                <a:latin typeface="Arial"/>
+                <a:ea typeface="DejaVu Sans"/>
+              </a:rPr>
+              <a:t>- Python 3.10+ · FastAPI · Streamlit · Pydantic · Docker (multi-stage, non-root)</a:t>
             </a:r>
             <a:endParaRPr b="0" lang="en-US" sz="1600" spc="-1" strike="noStrike">
               <a:latin typeface="Arial"/>
@@ -9245,79 +7078,28 @@
           </a:p>
           <a:p>
             <a:pPr algn="just">
+              <a:lnSpc>
+                <a:spcPct val="100000"/>
+              </a:lnSpc>
               <a:buNone/>
             </a:pPr>
             <a:r>
               <a:rPr b="0" lang="en-US" sz="1600" spc="-1" strike="noStrike">
-                <a:latin typeface="Arial"/>
+                <a:solidFill>
+                  <a:srgbClr val="000000"/>
+                </a:solidFill>
+                <a:latin typeface="Arial"/>
+                <a:ea typeface="DejaVu Sans"/>
               </a:rPr>
               <a:t>  </a:t>
             </a:r>
             <a:r>
               <a:rPr b="0" lang="en-US" sz="1600" spc="-1" strike="noStrike">
-                <a:latin typeface="Arial"/>
-              </a:rPr>
-              <a:t>- Secret Manager · Artifact Registry · Cloud Build</a:t>
-            </a:r>
-            <a:endParaRPr b="0" lang="en-US" sz="1600" spc="-1" strike="noStrike">
-              <a:latin typeface="Arial"/>
-            </a:endParaRPr>
-          </a:p>
-          <a:p>
-            <a:pPr algn="just">
-              <a:buNone/>
-            </a:pPr>
-            <a:endParaRPr b="0" lang="en-US" sz="1800" spc="-1" strike="noStrike">
-              <a:latin typeface="Arial"/>
-            </a:endParaRPr>
-          </a:p>
-          <a:p>
-            <a:pPr algn="just">
-              <a:buNone/>
-            </a:pPr>
-            <a:r>
-              <a:rPr b="1" lang="en-US" sz="1600" spc="-1" strike="noStrike">
-                <a:latin typeface="Arial"/>
-              </a:rPr>
-              <a:t>Application:</a:t>
-            </a:r>
-            <a:endParaRPr b="0" lang="en-US" sz="1600" spc="-1" strike="noStrike">
-              <a:latin typeface="Arial"/>
-            </a:endParaRPr>
-          </a:p>
-          <a:p>
-            <a:pPr algn="just">
-              <a:buNone/>
-            </a:pPr>
-            <a:r>
-              <a:rPr b="0" lang="en-US" sz="1600" spc="-1" strike="noStrike">
-                <a:latin typeface="Arial"/>
-              </a:rPr>
-              <a:t>  </a:t>
-            </a:r>
-            <a:r>
-              <a:rPr b="0" lang="en-US" sz="1600" spc="-1" strike="noStrike">
-                <a:latin typeface="Arial"/>
-              </a:rPr>
-              <a:t>- Python 3.10+ · FastAPI · Streamlit · Pydantic · Docker (multi-stage, non-root)</a:t>
-            </a:r>
-            <a:endParaRPr b="0" lang="en-US" sz="1600" spc="-1" strike="noStrike">
-              <a:latin typeface="Arial"/>
-            </a:endParaRPr>
-          </a:p>
-          <a:p>
-            <a:pPr algn="just">
-              <a:buNone/>
-            </a:pPr>
-            <a:r>
-              <a:rPr b="0" lang="en-US" sz="1600" spc="-1" strike="noStrike">
-                <a:latin typeface="Arial"/>
-              </a:rPr>
-              <a:t>  </a:t>
-            </a:r>
-            <a:r>
-              <a:rPr b="0" lang="en-US" sz="1600" spc="-1" strike="noStrike">
-                <a:latin typeface="Arial"/>
+                <a:solidFill>
+                  <a:srgbClr val="000000"/>
+                </a:solidFill>
+                <a:latin typeface="Arial"/>
+                <a:ea typeface="DejaVu Sans"/>
               </a:rPr>
               <a:t>- GitHub Actions CI/CD with Workload Identity Federation — no service-account keys exist</a:t>
             </a:r>
@@ -9365,13 +7147,13 @@
         </p:nvPicPr>
         <p:blipFill>
           <a:blip r:embed="rId1"/>
-          <a:srcRect l="0" t="0" r="0" b="98010"/>
+          <a:srcRect l="0" t="0" r="0" b="98031"/>
           <a:stretch/>
         </p:blipFill>
         <p:spPr>
           <a:xfrm>
             <a:off x="0" y="5093640"/>
-            <a:ext cx="9143640" cy="54000"/>
+            <a:ext cx="9142920" cy="53280"/>
           </a:xfrm>
           <a:prstGeom prst="rect">
             <a:avLst/>
@@ -9394,7 +7176,7 @@
         <p:spPr>
           <a:xfrm>
             <a:off x="0" y="0"/>
-            <a:ext cx="9143640" cy="506880"/>
+            <a:ext cx="9142920" cy="506160"/>
           </a:xfrm>
           <a:prstGeom prst="rect">
             <a:avLst/>
@@ -9413,7 +7195,7 @@
         <p:spPr>
           <a:xfrm>
             <a:off x="-29160" y="5072040"/>
-            <a:ext cx="9173160" cy="97560"/>
+            <a:ext cx="9172440" cy="96840"/>
           </a:xfrm>
           <a:prstGeom prst="rect">
             <a:avLst/>
@@ -9441,7 +7223,7 @@
         <p:spPr>
           <a:xfrm>
             <a:off x="265320" y="663840"/>
-            <a:ext cx="8942760" cy="561600"/>
+            <a:ext cx="8942040" cy="560880"/>
           </a:xfrm>
           <a:prstGeom prst="rect">
             <a:avLst/>
@@ -9458,7 +7240,7 @@
           <a:fontRef idx="minor"/>
         </p:style>
         <p:txBody>
-          <a:bodyPr tIns="91440" bIns="91440" anchor="t">
+          <a:bodyPr lIns="90000" rIns="90000" tIns="91440" bIns="91440" anchor="t">
             <a:noAutofit/>
           </a:bodyPr>
           <a:p>
@@ -9481,7 +7263,7 @@
               </a:rPr>
               <a:t>Snapshots of the prototype</a:t>
             </a:r>
-            <a:endParaRPr b="1" lang="en-US" sz="1600" spc="-1" strike="noStrike">
+            <a:endParaRPr b="0" lang="en-US" sz="1600" spc="-1" strike="noStrike">
               <a:latin typeface="Arial"/>
             </a:endParaRPr>
           </a:p>
@@ -9500,7 +7282,7 @@
         <p:spPr>
           <a:xfrm>
             <a:off x="226080" y="1072800"/>
-            <a:ext cx="6629400" cy="3911400"/>
+            <a:ext cx="6628680" cy="3910680"/>
           </a:xfrm>
           <a:prstGeom prst="rect">
             <a:avLst/>
@@ -9513,13 +7295,13 @@
       <p:sp>
         <p:nvSpPr>
           <p:cNvPr id="83" name=""/>
-          <p:cNvSpPr txBox="1"/>
+          <p:cNvSpPr/>
           <p:nvPr/>
         </p:nvSpPr>
         <p:spPr>
           <a:xfrm>
             <a:off x="7086600" y="1143000"/>
-            <a:ext cx="1828800" cy="3701880"/>
+            <a:ext cx="1828080" cy="3701160"/>
           </a:xfrm>
           <a:prstGeom prst="rect">
             <a:avLst/>
@@ -9529,38 +7311,70 @@
             <a:noFill/>
           </a:ln>
         </p:spPr>
+        <p:style>
+          <a:lnRef idx="0"/>
+          <a:fillRef idx="0"/>
+          <a:effectRef idx="0"/>
+          <a:fontRef idx="minor"/>
+        </p:style>
         <p:txBody>
           <a:bodyPr lIns="90000" rIns="90000" tIns="45000" bIns="45000" anchor="t">
             <a:noAutofit/>
           </a:bodyPr>
           <a:p>
+            <a:pPr>
+              <a:lnSpc>
+                <a:spcPct val="100000"/>
+              </a:lnSpc>
+              <a:buNone/>
+            </a:pPr>
             <a:r>
               <a:rPr b="0" lang="en-US" sz="1600" spc="-1" strike="noStrike">
-                <a:latin typeface="Arial"/>
+                <a:solidFill>
+                  <a:srgbClr val="000000"/>
+                </a:solidFill>
+                <a:latin typeface="Arial"/>
+                <a:ea typeface="DejaVu Sans"/>
               </a:rPr>
               <a:t>Caption: Live analysis of </a:t>
             </a:r>
             <a:r>
               <a:rPr b="1" lang="en-US" sz="1600" spc="-1" strike="noStrike">
-                <a:latin typeface="Arial"/>
+                <a:solidFill>
+                  <a:srgbClr val="000000"/>
+                </a:solidFill>
+                <a:latin typeface="Arial"/>
+                <a:ea typeface="DejaVu Sans"/>
               </a:rPr>
               <a:t>Pasir Panjang Terminal</a:t>
             </a:r>
             <a:r>
               <a:rPr b="0" lang="en-US" sz="1600" spc="-1" strike="noStrike">
-                <a:latin typeface="Arial"/>
+                <a:solidFill>
+                  <a:srgbClr val="000000"/>
+                </a:solidFill>
+                <a:latin typeface="Arial"/>
+                <a:ea typeface="DejaVu Sans"/>
               </a:rPr>
               <a:t>, </a:t>
             </a:r>
             <a:r>
               <a:rPr b="1" lang="en-US" sz="1600" spc="-1" strike="noStrike">
-                <a:latin typeface="Arial"/>
+                <a:solidFill>
+                  <a:srgbClr val="000000"/>
+                </a:solidFill>
+                <a:latin typeface="Arial"/>
+                <a:ea typeface="DejaVu Sans"/>
               </a:rPr>
               <a:t>Singapore</a:t>
             </a:r>
             <a:r>
               <a:rPr b="0" lang="en-US" sz="1600" spc="-1" strike="noStrike">
-                <a:latin typeface="Arial"/>
+                <a:solidFill>
+                  <a:srgbClr val="000000"/>
+                </a:solidFill>
+                <a:latin typeface="Arial"/>
+                <a:ea typeface="DejaVu Sans"/>
               </a:rPr>
               <a:t>, from Google satellite imagery: HVI 8.6 CRITICAL, 0% tree canopy, ambient 31.0 °C measured from NOAA GSOD, and the Pub/Sub alert already visible to citizens on the public wall.</a:t>
             </a:r>
